--- a/docs/giddongcar_관제시스템_발표.pptx
+++ b/docs/giddongcar_관제시스템_발표.pptx
@@ -21,9 +21,11 @@
     <p:sldId id="269" r:id="rId15"/>
     <p:sldId id="270" r:id="rId16"/>
     <p:sldId id="271" r:id="rId17"/>
+    <p:sldId id="272" r:id="rId18"/>
+    <p:sldId id="273" r:id="rId19"/>
   </p:sldIdLst>
   <p:notesMasterIdLst>
-    <p:notesMasterId r:id="rId18"/>
+    <p:notesMasterId r:id="rId20"/>
   </p:notesMasterIdLst>
   <p:sldSz cx="12192000" cy="6858000"/>
   <p:notesSz cx="6858000" cy="12192000"/>
@@ -122,40 +124,42 @@
   <p:extLst>
     <p:ext uri="{521415D9-36F7-43E2-AB2F-B90AF26B5E84}">
       <p14:sectionLst xmlns:p14="http://schemas.microsoft.com/office/powerpoint/2010/main">
-        <p14:section name="배경" id="{a6a4df22-4161-b171-5830-ab12b9131e95}">
+        <p14:section name="배경" id="{a24f3b34-6855-a96f-e259-a5e3c45ce429}">
           <p14:sldIdLst>
             <p14:sldId id="256"/>
             <p14:sldId id="257"/>
             <p14:sldId id="258"/>
           </p14:sldIdLst>
         </p14:section>
-        <p14:section name="아키텍처" id="{c51edb89-b9a3-dba5-9ce4-5fabe21b0754}">
+        <p14:section name="아키텍처" id="{bdb0d9ba-d846-e55c-1add-173cd14ddbd6}">
           <p14:sldIdLst>
             <p14:sldId id="259"/>
             <p14:sldId id="260"/>
             <p14:sldId id="261"/>
+            <p14:sldId id="262"/>
           </p14:sldIdLst>
         </p14:section>
-        <p14:section name="핵심 설계" id="{419e49e2-8490-a22c-3125-ce1ee7cc15be}">
+        <p14:section name="핵심 설계" id="{6612b46d-c15f-dee9-517e-35010721ea15}">
           <p14:sldIdLst>
-            <p14:sldId id="262"/>
             <p14:sldId id="263"/>
             <p14:sldId id="264"/>
             <p14:sldId id="265"/>
+            <p14:sldId id="266"/>
           </p14:sldIdLst>
         </p14:section>
-        <p14:section name="튜닝" id="{0d3305ff-9829-8c44-f45f-f415f473e4b1}">
+        <p14:section name="튜닝" id="{988cdb3c-ed50-fe5f-86e2-f468eb3c7e7a}">
           <p14:sldIdLst>
-            <p14:sldId id="266"/>
             <p14:sldId id="267"/>
             <p14:sldId id="268"/>
+            <p14:sldId id="269"/>
+            <p14:sldId id="270"/>
           </p14:sldIdLst>
         </p14:section>
-        <p14:section name="디버깅과 다음 단계" id="{6f6b905d-72a8-4b3c-1fa6-571588ecd71c}">
+        <p14:section name="디버깅과 다음 단계" id="{4e6aa6f5-ba01-6d66-f391-5cb005063f9e}">
           <p14:sldIdLst>
-            <p14:sldId id="269"/>
-            <p14:sldId id="270"/>
             <p14:sldId id="271"/>
+            <p14:sldId id="272"/>
+            <p14:sldId id="273"/>
           </p14:sldIdLst>
         </p14:section>
       </p14:sectionLst>
@@ -650,7 +654,7 @@
           <a:p>
             <a:r>
               <a:rPr lang="en-US" dirty="0"/>
-              <a:t>Nav2 결과 코드로 재시도를 가릅니다. 104, 105, 106, 그리고 복구를 다 쓰고 코드 없이 끝난 0은 막혀서 실패한 경우라 같은 목적지로 세 번까지 다시 보냅니다. 206이나 208처럼 애초에 갈 수 없는 목적지는 다시 보내지 않습니다. 오른쪽은 운영 안전 장치입니다. 특히 제조사 bringup에 속도 타임아웃이 없어서, 종료할 때 0 속도를 보내는 걸 스크립트가 보장합니다.</a:t>
+              <a:t>판단 로직 전체입니다. 두 로봇의 계획 경로를 앞쪽 일정 길이만 잘라서 꺾은선 사이 최소 거리를 봅니다. robot2 자신이 robot1 경로 위에 서 있으면 back, 앞 경로가 겹치면 stop, 아니면 go. 하던 동작에만 10cm 여유를 붙여서 멈춤과 출발이 떨리지 않게 했습니다. robot1이 서 있으면 판단하지 않습니다. 서 있는 로봇은 Nav2가 그냥 장애물로 피합니다.</a:t>
             </a:r>
             <a:endParaRPr lang="en-US" dirty="0"/>
           </a:p>
@@ -738,7 +742,7 @@
           <a:p>
             <a:r>
               <a:rPr lang="en-US" dirty="0"/>
-              <a:t>Nav2 설정은 제조사 원본을 고치지 않고 복사본을 만들어 썼습니다. 원본과 diff를 떠 보면 바뀐 값은 정확히 다섯 개입니다. 위의 세 개는 좁은 문, 네 번째는 코너, 다섯 번째는 구석 문제에서 나왔습니다. 각 줄에 팀 주석으로 근거를 남겨 뒀습니다.</a:t>
+              <a:t>Nav2 결과 코드로 재시도를 가릅니다. 104, 105, 106, 그리고 복구를 다 쓰고 코드 없이 끝난 0은 막혀서 실패한 경우라 같은 목적지로 세 번까지 다시 보냅니다. 206이나 208처럼 애초에 갈 수 없는 목적지는 다시 보내지 않습니다. 오른쪽은 운영 안전 장치입니다. 특히 제조사 bringup에 속도 타임아웃이 없어서, 종료할 때 0 속도를 보내는 걸 스크립트가 보장합니다.</a:t>
             </a:r>
             <a:endParaRPr lang="en-US" dirty="0"/>
           </a:p>
@@ -826,7 +830,7 @@
           <a:p>
             <a:r>
               <a:rPr lang="en-US" dirty="0"/>
-              <a:t>좁은 문에서 아무것도 없는데 복구 10회 뒤 실패한 사례입니다. 로그를 세 보니 collision ahead가 750번 찍혀 있었습니다. 라이다 노이즈 2cm가 1cm 격자에서 문틀을 흔들어서 경로와 순간적으로 겹친 거고, 0.3초만 이어져도 실패였습니다. 실패 허용 시간을 1.5초로 늘리고 충돌 검사를 가까운 앞만 보게 했고, 그래도 실패하면 관제가 다시 보냅니다.</a:t>
+              <a:t>Nav2 설정은 제조사 원본을 고치지 않고 복사본을 만들어 썼습니다. 원본과 diff를 떠 보면 바뀐 값은 정확히 다섯 개입니다. 위의 세 개는 좁은 문, 네 번째는 코너, 다섯 번째는 구석 문제에서 나왔습니다. 각 줄에 팀 주석으로 근거를 남겨 뒀습니다.</a:t>
             </a:r>
             <a:endParaRPr lang="en-US" dirty="0"/>
           </a:p>
@@ -914,7 +918,7 @@
           <a:p>
             <a:r>
               <a:rPr lang="en-US" dirty="0"/>
-              <a:t>교통 파라미터는 시뮬에서 직접 보면서 줄였습니다. 처음엔 robot1의 남은 경로 전체와 비교해서, robot1이 방 반대편에 있어도 robot2가 멈췄습니다. 앞쪽 0.8m와 0.5m만 보게 바꾸니 두 로봇이 대략 1.3m 안으로 다가올 때만 양보합니다.</a:t>
+              <a:t>팀용 복사본의 다섯 개와 별개로, pinky_navigation 설정에는 작은 로봇과 좁은 방에 맞춘 조정이 이미 들어가 있습니다. 주석에 원래 값이 남아 있습니다. 격자를 1cm로 줄이고, 1cm만 움직여도 AMCL이 갱신되게 하고, cost scaling을 키워서 벽 바로 옆에서만 비용이 급하게 오르게 했습니다. 그래야 35cm 문을 지나갑니다. 대가도 있었습니다. 1cm 격자에서는 라이다 노이즈가 셀 단위로 흔들리는 게 보여서, 다음 장의 문 앞 오판으로 이어졌습니다.</a:t>
             </a:r>
             <a:endParaRPr lang="en-US" dirty="0"/>
           </a:p>
@@ -1002,7 +1006,7 @@
           <a:p>
             <a:r>
               <a:rPr lang="en-US" dirty="0"/>
-              <a:t>시간을 제일 많이 쓴 건 알고리즘이 아니라 미들웨어였습니다. 네 가지 모두 측정부터 했습니다. 시뮬에서 odom은 오는데 clock이 0개인 걸 세어 보고 RMW 문제임을 찾았고, 현장 공유기의 멀티캐스트 차단, 인터넷 없는 시계 동기화, Ctrl+Z로 쌓인 프로세스까지 전부 스크립트와 launch에서 구조적으로 막았습니다.</a:t>
+              <a:t>좁은 문에서 아무것도 없는데 복구 10회 뒤 실패한 사례입니다. 로그를 세 보니 collision ahead가 750번 찍혀 있었습니다. 라이다 노이즈 2cm가 1cm 격자에서 문틀을 흔들어서 경로와 순간적으로 겹친 거고, 0.3초만 이어져도 실패였습니다. 실패 허용 시간을 1.5초로 늘리고 충돌 검사를 가까운 앞만 보게 했고, 그래도 실패하면 관제가 다시 보냅니다.</a:t>
             </a:r>
             <a:endParaRPr lang="en-US" dirty="0"/>
           </a:p>
@@ -1090,7 +1094,7 @@
           <a:p>
             <a:r>
               <a:rPr lang="en-US" dirty="0"/>
-              <a:t>남은 숙제입니다. 가장 큰 설계 부채는 robot1 고정 우선순위라 로봇이 늘면 그대로 못 씁니다. 안전 쪽은 로봇 자체에 속도 타임아웃이 없다는 게 가장 큰 위험이고, 실물은 시뮬에서 정한 값을 아직 검증 중입니다.</a:t>
+              <a:t>교통 파라미터는 시뮬에서 직접 보면서 줄였습니다. 처음엔 robot1의 남은 경로 전체와 비교해서, robot1이 방 반대편에 있어도 robot2가 멈췄습니다. 앞쪽 0.8m와 0.5m만 보게 바꾸니 두 로봇이 대략 1.3m 안으로 다가올 때만 양보합니다.</a:t>
             </a:r>
             <a:endParaRPr lang="en-US" dirty="0"/>
           </a:p>
@@ -1178,7 +1182,7 @@
           <a:p>
             <a:r>
               <a:rPr lang="en-US" dirty="0"/>
-              <a:t>요약하면 로봇은 도메인으로 나누고, 계산은 PC에서 하고, 판단은 순수 함수로 두었습니다. 그리고 모든 튜닝은 측정한 다음에 했습니다. 질문 받겠습니다.</a:t>
+              <a:t>시간을 제일 많이 쓴 건 알고리즘이 아니라 미들웨어였습니다. 네 가지 모두 측정부터 했습니다. 시뮬에서 odom은 오는데 clock이 0개인 걸 세어 보고 RMW 문제임을 찾았고, 현장 공유기의 멀티캐스트 차단, 인터넷 없는 시계 동기화, Ctrl+Z로 쌓인 프로세스까지 전부 스크립트와 launch에서 구조적으로 막았습니다.</a:t>
             </a:r>
             <a:endParaRPr lang="en-US" dirty="0"/>
           </a:p>
@@ -1202,6 +1206,182 @@
             <a:fld id="{F7021451-1387-4CA6-816F-3879F97B5CBC}" type="slidenum">
               <a:rPr lang="en-US"/>
               <a:t>16</a:t>
+            </a:fld>
+            <a:endParaRPr lang="en-US"/>
+          </a:p>
+        </p:txBody>
+      </p:sp>
+    </p:spTree>
+    <p:extLst>
+      <p:ext uri="{BB962C8B-B14F-4D97-AF65-F5344CB8AC3E}">
+        <p14:creationId xmlns:p14="http://schemas.microsoft.com/office/powerpoint/2010/main" val="1024086991"/>
+      </p:ext>
+    </p:extLst>
+  </p:cSld>
+  <p:clrMapOvr>
+    <a:masterClrMapping/>
+  </p:clrMapOvr>
+</p:notes>
+</file>
+
+<file path=ppt/notesSlides/notesSlide17.xml><?xml version="1.0" encoding="utf-8"?>
+<p:notes xmlns:a="http://schemas.openxmlformats.org/drawingml/2006/main" xmlns:r="http://schemas.openxmlformats.org/officeDocument/2006/relationships" xmlns:p="http://schemas.openxmlformats.org/presentationml/2006/main">
+  <p:cSld>
+    <p:spTree>
+      <p:nvGrpSpPr>
+        <p:cNvPr id="1" name=""/>
+        <p:cNvGrpSpPr/>
+        <p:nvPr/>
+      </p:nvGrpSpPr>
+      <p:grpSpPr>
+        <a:xfrm>
+          <a:off x="0" y="0"/>
+          <a:ext cx="0" cy="0"/>
+          <a:chOff x="0" y="0"/>
+          <a:chExt cx="0" cy="0"/>
+        </a:xfrm>
+      </p:grpSpPr>
+      <p:sp>
+        <p:nvSpPr>
+          <p:cNvPr id="2" name="Slide Image Placeholder 1"/>
+          <p:cNvSpPr>
+            <a:spLocks noGrp="1" noRot="1" noChangeAspect="1"/>
+          </p:cNvSpPr>
+          <p:nvPr>
+            <p:ph type="sldImg"/>
+          </p:nvPr>
+        </p:nvSpPr>
+        <p:spPr/>
+      </p:sp>
+      <p:sp>
+        <p:nvSpPr>
+          <p:cNvPr id="3" name="Notes Placeholder 2"/>
+          <p:cNvSpPr>
+            <a:spLocks noGrp="1"/>
+          </p:cNvSpPr>
+          <p:nvPr>
+            <p:ph type="body" idx="1"/>
+          </p:nvPr>
+        </p:nvSpPr>
+        <p:spPr/>
+        <p:txBody>
+          <a:bodyPr/>
+          <a:lstStyle/>
+          <a:p>
+            <a:r>
+              <a:rPr lang="en-US" dirty="0"/>
+              <a:t>남은 숙제입니다. 가장 큰 설계 부채는 robot1 고정 우선순위라 로봇이 늘면 그대로 못 씁니다. 안전 쪽은 로봇 자체에 속도 타임아웃이 없다는 게 가장 큰 위험이고, 실물은 시뮬에서 정한 값을 아직 검증 중입니다.</a:t>
+            </a:r>
+            <a:endParaRPr lang="en-US" dirty="0"/>
+          </a:p>
+        </p:txBody>
+      </p:sp>
+      <p:sp>
+        <p:nvSpPr>
+          <p:cNvPr id="4" name="Slide Number Placeholder 3"/>
+          <p:cNvSpPr>
+            <a:spLocks noGrp="1"/>
+          </p:cNvSpPr>
+          <p:nvPr>
+            <p:ph type="sldNum" sz="quarter" idx="10"/>
+          </p:nvPr>
+        </p:nvSpPr>
+        <p:spPr/>
+        <p:txBody>
+          <a:bodyPr/>
+          <a:lstStyle/>
+          <a:p>
+            <a:fld id="{F7021451-1387-4CA6-816F-3879F97B5CBC}" type="slidenum">
+              <a:rPr lang="en-US"/>
+              <a:t>17</a:t>
+            </a:fld>
+            <a:endParaRPr lang="en-US"/>
+          </a:p>
+        </p:txBody>
+      </p:sp>
+    </p:spTree>
+    <p:extLst>
+      <p:ext uri="{BB962C8B-B14F-4D97-AF65-F5344CB8AC3E}">
+        <p14:creationId xmlns:p14="http://schemas.microsoft.com/office/powerpoint/2010/main" val="1024086991"/>
+      </p:ext>
+    </p:extLst>
+  </p:cSld>
+  <p:clrMapOvr>
+    <a:masterClrMapping/>
+  </p:clrMapOvr>
+</p:notes>
+</file>
+
+<file path=ppt/notesSlides/notesSlide18.xml><?xml version="1.0" encoding="utf-8"?>
+<p:notes xmlns:a="http://schemas.openxmlformats.org/drawingml/2006/main" xmlns:r="http://schemas.openxmlformats.org/officeDocument/2006/relationships" xmlns:p="http://schemas.openxmlformats.org/presentationml/2006/main">
+  <p:cSld>
+    <p:spTree>
+      <p:nvGrpSpPr>
+        <p:cNvPr id="1" name=""/>
+        <p:cNvGrpSpPr/>
+        <p:nvPr/>
+      </p:nvGrpSpPr>
+      <p:grpSpPr>
+        <a:xfrm>
+          <a:off x="0" y="0"/>
+          <a:ext cx="0" cy="0"/>
+          <a:chOff x="0" y="0"/>
+          <a:chExt cx="0" cy="0"/>
+        </a:xfrm>
+      </p:grpSpPr>
+      <p:sp>
+        <p:nvSpPr>
+          <p:cNvPr id="2" name="Slide Image Placeholder 1"/>
+          <p:cNvSpPr>
+            <a:spLocks noGrp="1" noRot="1" noChangeAspect="1"/>
+          </p:cNvSpPr>
+          <p:nvPr>
+            <p:ph type="sldImg"/>
+          </p:nvPr>
+        </p:nvSpPr>
+        <p:spPr/>
+      </p:sp>
+      <p:sp>
+        <p:nvSpPr>
+          <p:cNvPr id="3" name="Notes Placeholder 2"/>
+          <p:cNvSpPr>
+            <a:spLocks noGrp="1"/>
+          </p:cNvSpPr>
+          <p:nvPr>
+            <p:ph type="body" idx="1"/>
+          </p:nvPr>
+        </p:nvSpPr>
+        <p:spPr/>
+        <p:txBody>
+          <a:bodyPr/>
+          <a:lstStyle/>
+          <a:p>
+            <a:r>
+              <a:rPr lang="en-US" dirty="0"/>
+              <a:t>요약하면 로봇은 도메인으로 나누고, 계산은 PC에서 하고, 판단은 순수 함수로 두었습니다. 그리고 모든 튜닝은 측정한 다음에 했습니다. 질문 받겠습니다.</a:t>
+            </a:r>
+            <a:endParaRPr lang="en-US" dirty="0"/>
+          </a:p>
+        </p:txBody>
+      </p:sp>
+      <p:sp>
+        <p:nvSpPr>
+          <p:cNvPr id="4" name="Slide Number Placeholder 3"/>
+          <p:cNvSpPr>
+            <a:spLocks noGrp="1"/>
+          </p:cNvSpPr>
+          <p:nvPr>
+            <p:ph type="sldNum" sz="quarter" idx="10"/>
+          </p:nvPr>
+        </p:nvSpPr>
+        <p:spPr/>
+        <p:txBody>
+          <a:bodyPr/>
+          <a:lstStyle/>
+          <a:p>
+            <a:fld id="{F7021451-1387-4CA6-816F-3879F97B5CBC}" type="slidenum">
+              <a:rPr lang="en-US"/>
+              <a:t>18</a:t>
             </a:fld>
             <a:endParaRPr lang="en-US"/>
           </a:p>
@@ -1618,7 +1798,7 @@
           <a:p>
             <a:r>
               <a:rPr lang="en-US" dirty="0"/>
-              <a:t>관제 프로그램 내부입니다. 핵심 원칙은 판단 로직, 즉 교통 정리와 위치 찾기는 ROS를 전혀 모르는 순수 Python으로 두고, ROS 입출력은 robot.py 한 곳에만 두는 것입니다. 주황색 두 모듈이 그 순수 로직입니다. 그래서 단위 테스트 113개가 DDS 없이 몇 초 만에 돕니다.</a:t>
+              <a:t>실물에서는 Cyclone DDS를 씁니다. 현장 공유기가 멀티캐스트를 막기 때문에 멀티캐스트를 끄고 로봇 두 대와 관제 PC를 peer로 직접 적었습니다. 유니캐스트 모드에서는 한 PC, 한 도메인에서 붙을 수 있는 참가자 수 상한이 기본 10개 정도라 Nav2와 대시보드, ros2 명령이 겹치면 모자랐고, 그래서 50으로 올렸습니다. 로봇 쪽도 같은 RMW여야 하고, 시뮬레이션은 반대로 Fast DDS에 로컬호스트로 가둡니다.</a:t>
             </a:r>
             <a:endParaRPr lang="en-US" dirty="0"/>
           </a:p>
@@ -1706,7 +1886,7 @@
           <a:p>
             <a:r>
               <a:rPr lang="en-US" dirty="0"/>
-              <a:t>관제를 켜면 AMCL 전역 추정으로 지도 전체에 파티클을 뿌리고, 로봇이 제자리에서 한 바퀴 돕니다. amcl_pose 공분산의 표준편차가 위치 20cm, 방향 0.25rad 아래로 연속 세 번 들어오면 확정합니다. 한 번 우연히 모인 건 믿지 않습니다. 못 찾으면 사람이 다시 돌리거나 직접 찍습니다. 처음엔 고정 출발점 방식을 만들었는데, 로봇을 특정 자리에 묶는 게 싫어서 되돌렸습니다.</a:t>
+              <a:t>관제 프로그램 내부입니다. 핵심 원칙은 판단 로직, 즉 교통 정리와 위치 찾기는 ROS를 전혀 모르는 순수 Python으로 두고, ROS 입출력은 robot.py 한 곳에만 두는 것입니다. 주황색 두 모듈이 그 순수 로직입니다. 그래서 단위 테스트 113개가 DDS 없이 몇 초 만에 돕니다.</a:t>
             </a:r>
             <a:endParaRPr lang="en-US" dirty="0"/>
           </a:p>
@@ -1794,7 +1974,7 @@
           <a:p>
             <a:r>
               <a:rPr lang="en-US" dirty="0"/>
-              <a:t>교통 정리는 두 번 만들었습니다. v1은 칸 열쇠입니다. 지나갈 칸의 열쇠를 전부 한꺼번에 받아야 출발하니까 교착이 원천적으로 없습니다. 그런데 너무 보수적이라 경로가 조금만 겹쳐도 robot2가 아예 출발을 안 했습니다. 그래서 v2는 둘 다 움직이게 두고, 계획 경로가 실제로 가까워질 때만 robot2를 세우거나 뒤로 물립니다.</a:t>
+              <a:t>관제를 켜면 AMCL 전역 추정으로 지도 전체에 파티클을 뿌리고, 로봇이 제자리에서 한 바퀴 돕니다. amcl_pose 공분산의 표준편차가 위치 20cm, 방향 0.25rad 아래로 연속 세 번 들어오면 확정합니다. 한 번 우연히 모인 건 믿지 않습니다. 못 찾으면 사람이 다시 돌리거나 직접 찍습니다. 처음엔 고정 출발점 방식을 만들었는데, 로봇을 특정 자리에 묶는 게 싫어서 되돌렸습니다.</a:t>
             </a:r>
             <a:endParaRPr lang="en-US" dirty="0"/>
           </a:p>
@@ -1882,7 +2062,7 @@
           <a:p>
             <a:r>
               <a:rPr lang="en-US" dirty="0"/>
-              <a:t>판단 로직 전체입니다. 두 로봇의 계획 경로를 앞쪽 일정 길이만 잘라서 꺾은선 사이 최소 거리를 봅니다. robot2 자신이 robot1 경로 위에 서 있으면 back, 앞 경로가 겹치면 stop, 아니면 go. 하던 동작에만 10cm 여유를 붙여서 멈춤과 출발이 떨리지 않게 했습니다. robot1이 서 있으면 판단하지 않습니다. 서 있는 로봇은 Nav2가 그냥 장애물로 피합니다.</a:t>
+              <a:t>교통 정리는 두 번 만들었습니다. v1은 칸 열쇠입니다. 지나갈 칸의 열쇠를 전부 한꺼번에 받아야 출발하니까 교착이 원천적으로 없습니다. 그런데 너무 보수적이라 경로가 조금만 겹쳐도 robot2가 아예 출발을 안 했습니다. 그래서 v2는 둘 다 움직이게 두고, 계획 경로가 실제로 가까워질 때만 robot2를 세우거나 뒤로 물립니다.</a:t>
             </a:r>
             <a:endParaRPr lang="en-US" dirty="0"/>
           </a:p>
@@ -2846,6 +3026,793 @@
                 <a:ea typeface="Consolas" pitchFamily="34" charset="-122"/>
                 <a:cs typeface="Consolas" pitchFamily="34" charset="-120"/>
               </a:rPr>
+              <a:t>03 · YieldRule.decide()</a:t>
+            </a:r>
+            <a:endParaRPr lang="en-US" sz="1200" dirty="0"/>
+          </a:p>
+        </p:txBody>
+      </p:sp>
+      <p:sp>
+        <p:nvSpPr>
+          <p:cNvPr id="3" name="Text 0"/>
+          <p:cNvSpPr/>
+          <p:nvPr>
+            <p:ph idx="101" type="title" hasCustomPrompt="1"/>
+          </p:nvPr>
+        </p:nvSpPr>
+        <p:spPr>
+          <a:xfrm>
+            <a:off x="548640" y="731520"/>
+            <a:ext cx="11094415" cy="685800"/>
+          </a:xfrm>
+          <a:prstGeom prst="rect">
+            <a:avLst/>
+          </a:prstGeom>
+          <a:noFill/>
+          <a:ln/>
+        </p:spPr>
+        <p:txBody>
+          <a:bodyPr wrap="square" lIns="0" tIns="0" rIns="0" bIns="0" rtlCol="0" anchor="ctr"/>
+          <a:lstStyle/>
+          <a:p>
+            <a:pPr algn="l" indent="0" marL="0">
+              <a:buNone/>
+            </a:pPr>
+            <a:r>
+              <a:rPr lang="en-US" sz="2800" b="1" dirty="0">
+                <a:solidFill>
+                  <a:srgbClr val="14213D"/>
+                </a:solidFill>
+                <a:latin typeface="Malgun Gothic" pitchFamily="34" charset="0"/>
+                <a:ea typeface="Malgun Gothic" pitchFamily="34" charset="-122"/>
+                <a:cs typeface="Malgun Gothic" pitchFamily="34" charset="-120"/>
+              </a:rPr>
+              <a:t>앞쪽 경로만 잘라서, 꺾은선 거리로 판단</a:t>
+            </a:r>
+            <a:endParaRPr lang="en-US" sz="2800" dirty="0"/>
+          </a:p>
+        </p:txBody>
+      </p:sp>
+      <p:sp>
+        <p:nvSpPr>
+          <p:cNvPr id="4" name="card-108"/>
+          <p:cNvSpPr/>
+          <p:nvPr/>
+        </p:nvSpPr>
+        <p:spPr>
+          <a:xfrm>
+            <a:off x="548640" y="1737360"/>
+            <a:ext cx="6675120" cy="3931920"/>
+          </a:xfrm>
+          <a:prstGeom prst="roundRect">
+            <a:avLst>
+              <a:gd name="adj" fmla="val 2791"/>
+            </a:avLst>
+          </a:prstGeom>
+          <a:solidFill>
+            <a:srgbClr val="14213D"/>
+          </a:solidFill>
+          <a:ln w="9525">
+            <a:solidFill>
+              <a:srgbClr val="14213D"/>
+            </a:solidFill>
+            <a:prstDash val="solid"/>
+          </a:ln>
+        </p:spPr>
+      </p:sp>
+      <p:sp>
+        <p:nvSpPr>
+          <p:cNvPr id="5" name="text-109"/>
+          <p:cNvSpPr txBox="1"/>
+          <p:nvPr/>
+        </p:nvSpPr>
+        <p:spPr>
+          <a:xfrm>
+            <a:off x="868680" y="2011680"/>
+            <a:ext cx="6035040" cy="3383280"/>
+          </a:xfrm>
+          <a:prstGeom prst="rect">
+            <a:avLst/>
+          </a:prstGeom>
+          <a:noFill/>
+          <a:ln/>
+        </p:spPr>
+        <p:txBody>
+          <a:bodyPr wrap="square" lIns="0" tIns="0" rIns="0" bIns="0" rtlCol="0" anchor="t"/>
+          <a:lstStyle/>
+          <a:p>
+            <a:pPr indent="0" marL="0">
+              <a:lnSpc>
+                <a:spcPct val="125000"/>
+              </a:lnSpc>
+              <a:buNone/>
+            </a:pPr>
+            <a:r>
+              <a:rPr lang="en-US" sz="1400" dirty="0">
+                <a:solidFill>
+                  <a:srgbClr val="FFFFFF"/>
+                </a:solidFill>
+                <a:latin typeface="Consolas" pitchFamily="34" charset="0"/>
+                <a:ea typeface="Consolas" pitchFamily="34" charset="-122"/>
+                <a:cs typeface="Consolas" pitchFamily="34" charset="-120"/>
+              </a:rPr>
+              <a:t>if not leader.active: return "go"</a:t>
+            </a:r>
+            <a:endParaRPr lang="en-US" sz="1400" dirty="0"/>
+          </a:p>
+          <a:p>
+            <a:pPr indent="0" marL="0">
+              <a:lnSpc>
+                <a:spcPct val="125000"/>
+              </a:lnSpc>
+              <a:buNone/>
+            </a:pPr>
+            <a:r>
+              <a:rPr lang="en-US" sz="1400" dirty="0">
+                <a:solidFill>
+                  <a:srgbClr val="8A94A6"/>
+                </a:solidFill>
+                <a:latin typeface="Consolas" pitchFamily="34" charset="0"/>
+                <a:ea typeface="Consolas" pitchFamily="34" charset="-122"/>
+                <a:cs typeface="Consolas" pitchFamily="34" charset="-120"/>
+              </a:rPr>
+              <a:t># 하던 동작에만 여유 R (떨림 방지)</a:t>
+            </a:r>
+            <a:endParaRPr lang="en-US" sz="1400" dirty="0"/>
+          </a:p>
+          <a:p>
+            <a:pPr indent="0" marL="0">
+              <a:lnSpc>
+                <a:spcPct val="125000"/>
+              </a:lnSpc>
+              <a:buNone/>
+            </a:pPr>
+            <a:r>
+              <a:rPr lang="en-US" sz="1400" dirty="0">
+                <a:solidFill>
+                  <a:srgbClr val="FFFFFF"/>
+                </a:solidFill>
+                <a:latin typeface="Consolas" pitchFamily="34" charset="0"/>
+                <a:ea typeface="Consolas" pitchFamily="34" charset="-122"/>
+                <a:cs typeface="Consolas" pitchFamily="34" charset="-120"/>
+              </a:rPr>
+              <a:t>back_gap = D + R·(prev == "back")</a:t>
+            </a:r>
+            <a:endParaRPr lang="en-US" sz="1400" dirty="0"/>
+          </a:p>
+          <a:p>
+            <a:pPr indent="0" marL="0">
+              <a:lnSpc>
+                <a:spcPct val="125000"/>
+              </a:lnSpc>
+              <a:buNone/>
+            </a:pPr>
+            <a:r>
+              <a:rPr lang="en-US" sz="1400" dirty="0">
+                <a:solidFill>
+                  <a:srgbClr val="FFFFFF"/>
+                </a:solidFill>
+                <a:latin typeface="Consolas" pitchFamily="34" charset="0"/>
+                <a:ea typeface="Consolas" pitchFamily="34" charset="-122"/>
+                <a:cs typeface="Consolas" pitchFamily="34" charset="-120"/>
+              </a:rPr>
+              <a:t>stop_gap = D + R·(prev != "go")</a:t>
+            </a:r>
+            <a:endParaRPr lang="en-US" sz="1400" dirty="0"/>
+          </a:p>
+          <a:p>
+            <a:pPr indent="0" marL="0">
+              <a:lnSpc>
+                <a:spcPct val="125000"/>
+              </a:lnSpc>
+              <a:buNone/>
+            </a:pPr>
+            <a:r>
+              <a:rPr lang="en-US" sz="1400" dirty="0">
+                <a:solidFill>
+                  <a:srgbClr val="FFFFFF"/>
+                </a:solidFill>
+                <a:latin typeface="Consolas" pitchFamily="34" charset="0"/>
+                <a:ea typeface="Consolas" pitchFamily="34" charset="-122"/>
+                <a:cs typeface="Consolas" pitchFamily="34" charset="-120"/>
+              </a:rPr>
+              <a:t>lead  = path_ahead(leader, 0.8)</a:t>
+            </a:r>
+            <a:endParaRPr lang="en-US" sz="1400" dirty="0"/>
+          </a:p>
+          <a:p>
+            <a:pPr indent="0" marL="0">
+              <a:lnSpc>
+                <a:spcPct val="125000"/>
+              </a:lnSpc>
+              <a:buNone/>
+            </a:pPr>
+            <a:r>
+              <a:rPr lang="en-US" sz="1400" dirty="0">
+                <a:solidFill>
+                  <a:srgbClr val="FFFFFF"/>
+                </a:solidFill>
+                <a:latin typeface="Consolas" pitchFamily="34" charset="0"/>
+                <a:ea typeface="Consolas" pitchFamily="34" charset="-122"/>
+                <a:cs typeface="Consolas" pitchFamily="34" charset="-120"/>
+              </a:rPr>
+              <a:t>if dist(me.pose, lead) &lt; back_gap:</a:t>
+            </a:r>
+            <a:endParaRPr lang="en-US" sz="1400" dirty="0"/>
+          </a:p>
+          <a:p>
+            <a:pPr indent="0" marL="0">
+              <a:lnSpc>
+                <a:spcPct val="125000"/>
+              </a:lnSpc>
+              <a:buNone/>
+            </a:pPr>
+            <a:r>
+              <a:rPr lang="en-US" sz="1400" dirty="0">
+                <a:solidFill>
+                  <a:srgbClr val="F2A65A"/>
+                </a:solidFill>
+                <a:latin typeface="Consolas" pitchFamily="34" charset="0"/>
+                <a:ea typeface="Consolas" pitchFamily="34" charset="-122"/>
+                <a:cs typeface="Consolas" pitchFamily="34" charset="-120"/>
+              </a:rPr>
+              <a:t>    return "back"   # 내가 상대 경로 위</a:t>
+            </a:r>
+            <a:endParaRPr lang="en-US" sz="1400" dirty="0"/>
+          </a:p>
+          <a:p>
+            <a:pPr indent="0" marL="0">
+              <a:lnSpc>
+                <a:spcPct val="125000"/>
+              </a:lnSpc>
+              <a:buNone/>
+            </a:pPr>
+            <a:r>
+              <a:rPr lang="en-US" sz="1400" dirty="0">
+                <a:solidFill>
+                  <a:srgbClr val="FFFFFF"/>
+                </a:solidFill>
+                <a:latin typeface="Consolas" pitchFamily="34" charset="0"/>
+                <a:ea typeface="Consolas" pitchFamily="34" charset="-122"/>
+                <a:cs typeface="Consolas" pitchFamily="34" charset="-120"/>
+              </a:rPr>
+              <a:t>ahead = path_ahead(me, 0.5)</a:t>
+            </a:r>
+            <a:endParaRPr lang="en-US" sz="1400" dirty="0"/>
+          </a:p>
+          <a:p>
+            <a:pPr indent="0" marL="0">
+              <a:lnSpc>
+                <a:spcPct val="125000"/>
+              </a:lnSpc>
+              <a:buNone/>
+            </a:pPr>
+            <a:r>
+              <a:rPr lang="en-US" sz="1400" dirty="0">
+                <a:solidFill>
+                  <a:srgbClr val="FFFFFF"/>
+                </a:solidFill>
+                <a:latin typeface="Consolas" pitchFamily="34" charset="0"/>
+                <a:ea typeface="Consolas" pitchFamily="34" charset="-122"/>
+                <a:cs typeface="Consolas" pitchFamily="34" charset="-120"/>
+              </a:rPr>
+              <a:t>if dist(ahead, lead) &lt; stop_gap:</a:t>
+            </a:r>
+            <a:endParaRPr lang="en-US" sz="1400" dirty="0"/>
+          </a:p>
+          <a:p>
+            <a:pPr indent="0" marL="0">
+              <a:lnSpc>
+                <a:spcPct val="125000"/>
+              </a:lnSpc>
+              <a:buNone/>
+            </a:pPr>
+            <a:r>
+              <a:rPr lang="en-US" sz="1400" dirty="0">
+                <a:solidFill>
+                  <a:srgbClr val="F2A65A"/>
+                </a:solidFill>
+                <a:latin typeface="Consolas" pitchFamily="34" charset="0"/>
+                <a:ea typeface="Consolas" pitchFamily="34" charset="-122"/>
+                <a:cs typeface="Consolas" pitchFamily="34" charset="-120"/>
+              </a:rPr>
+              <a:t>    return "stop"   # 앞 경로가 겹침</a:t>
+            </a:r>
+            <a:endParaRPr lang="en-US" sz="1400" dirty="0"/>
+          </a:p>
+          <a:p>
+            <a:pPr indent="0" marL="0">
+              <a:lnSpc>
+                <a:spcPct val="125000"/>
+              </a:lnSpc>
+              <a:buNone/>
+            </a:pPr>
+            <a:r>
+              <a:rPr lang="en-US" sz="1400" dirty="0">
+                <a:solidFill>
+                  <a:srgbClr val="8FB3F0"/>
+                </a:solidFill>
+                <a:latin typeface="Consolas" pitchFamily="34" charset="0"/>
+                <a:ea typeface="Consolas" pitchFamily="34" charset="-122"/>
+                <a:cs typeface="Consolas" pitchFamily="34" charset="-120"/>
+              </a:rPr>
+              <a:t>return "go"</a:t>
+            </a:r>
+            <a:endParaRPr lang="en-US" sz="1400" dirty="0"/>
+          </a:p>
+        </p:txBody>
+      </p:sp>
+      <p:sp>
+        <p:nvSpPr>
+          <p:cNvPr id="6" name="card-110"/>
+          <p:cNvSpPr/>
+          <p:nvPr/>
+        </p:nvSpPr>
+        <p:spPr>
+          <a:xfrm>
+            <a:off x="7498080" y="1737360"/>
+            <a:ext cx="4142232" cy="1188720"/>
+          </a:xfrm>
+          <a:prstGeom prst="roundRect">
+            <a:avLst>
+              <a:gd name="adj" fmla="val 9231"/>
+            </a:avLst>
+          </a:prstGeom>
+          <a:solidFill>
+            <a:srgbClr val="F3F5F8"/>
+          </a:solidFill>
+          <a:ln w="9525">
+            <a:solidFill>
+              <a:srgbClr val="F3F5F8"/>
+            </a:solidFill>
+            <a:prstDash val="solid"/>
+          </a:ln>
+        </p:spPr>
+      </p:sp>
+      <p:sp>
+        <p:nvSpPr>
+          <p:cNvPr id="7" name="text-111"/>
+          <p:cNvSpPr txBox="1"/>
+          <p:nvPr/>
+        </p:nvSpPr>
+        <p:spPr>
+          <a:xfrm>
+            <a:off x="7772400" y="1901952"/>
+            <a:ext cx="3611880" cy="347472"/>
+          </a:xfrm>
+          <a:prstGeom prst="rect">
+            <a:avLst/>
+          </a:prstGeom>
+          <a:noFill/>
+          <a:ln/>
+        </p:spPr>
+        <p:txBody>
+          <a:bodyPr wrap="square" lIns="0" tIns="0" rIns="0" bIns="0" rtlCol="0" anchor="t"/>
+          <a:lstStyle/>
+          <a:p>
+            <a:pPr indent="0" marL="0">
+              <a:buNone/>
+            </a:pPr>
+            <a:r>
+              <a:rPr lang="en-US" sz="1600" b="1" dirty="0">
+                <a:solidFill>
+                  <a:srgbClr val="14213D"/>
+                </a:solidFill>
+                <a:latin typeface="Consolas" pitchFamily="34" charset="0"/>
+                <a:ea typeface="Consolas" pitchFamily="34" charset="-122"/>
+                <a:cs typeface="Consolas" pitchFamily="34" charset="-120"/>
+              </a:rPr>
+              <a:t>stop</a:t>
+            </a:r>
+            <a:endParaRPr lang="en-US" sz="1600" dirty="0"/>
+          </a:p>
+        </p:txBody>
+      </p:sp>
+      <p:sp>
+        <p:nvSpPr>
+          <p:cNvPr id="8" name="text-112"/>
+          <p:cNvSpPr txBox="1"/>
+          <p:nvPr/>
+        </p:nvSpPr>
+        <p:spPr>
+          <a:xfrm>
+            <a:off x="7772400" y="2267712"/>
+            <a:ext cx="3611880" cy="566928"/>
+          </a:xfrm>
+          <a:prstGeom prst="rect">
+            <a:avLst/>
+          </a:prstGeom>
+          <a:noFill/>
+          <a:ln/>
+        </p:spPr>
+        <p:txBody>
+          <a:bodyPr wrap="square" lIns="0" tIns="0" rIns="0" bIns="0" rtlCol="0" anchor="t"/>
+          <a:lstStyle/>
+          <a:p>
+            <a:pPr indent="0" marL="0">
+              <a:lnSpc>
+                <a:spcPct val="120000"/>
+              </a:lnSpc>
+              <a:buNone/>
+            </a:pPr>
+            <a:r>
+              <a:rPr lang="en-US" sz="1300" dirty="0">
+                <a:solidFill>
+                  <a:srgbClr val="4A5568"/>
+                </a:solidFill>
+                <a:latin typeface="Malgun Gothic" pitchFamily="34" charset="0"/>
+                <a:ea typeface="Malgun Gothic" pitchFamily="34" charset="-122"/>
+                <a:cs typeface="Malgun Gothic" pitchFamily="34" charset="-120"/>
+              </a:rPr>
+              <a:t>목적지 기억 → Nav2 목표 취소 → 대기</a:t>
+            </a:r>
+            <a:endParaRPr lang="en-US" sz="1300" dirty="0"/>
+          </a:p>
+        </p:txBody>
+      </p:sp>
+      <p:sp>
+        <p:nvSpPr>
+          <p:cNvPr id="9" name="card-113"/>
+          <p:cNvSpPr/>
+          <p:nvPr/>
+        </p:nvSpPr>
+        <p:spPr>
+          <a:xfrm>
+            <a:off x="7498080" y="3081528"/>
+            <a:ext cx="4142232" cy="1188720"/>
+          </a:xfrm>
+          <a:prstGeom prst="roundRect">
+            <a:avLst>
+              <a:gd name="adj" fmla="val 9231"/>
+            </a:avLst>
+          </a:prstGeom>
+          <a:solidFill>
+            <a:srgbClr val="F3F5F8"/>
+          </a:solidFill>
+          <a:ln w="9525">
+            <a:solidFill>
+              <a:srgbClr val="F3F5F8"/>
+            </a:solidFill>
+            <a:prstDash val="solid"/>
+          </a:ln>
+        </p:spPr>
+      </p:sp>
+      <p:sp>
+        <p:nvSpPr>
+          <p:cNvPr id="10" name="text-114"/>
+          <p:cNvSpPr txBox="1"/>
+          <p:nvPr/>
+        </p:nvSpPr>
+        <p:spPr>
+          <a:xfrm>
+            <a:off x="7772400" y="3246120"/>
+            <a:ext cx="3611880" cy="347472"/>
+          </a:xfrm>
+          <a:prstGeom prst="rect">
+            <a:avLst/>
+          </a:prstGeom>
+          <a:noFill/>
+          <a:ln/>
+        </p:spPr>
+        <p:txBody>
+          <a:bodyPr wrap="square" lIns="0" tIns="0" rIns="0" bIns="0" rtlCol="0" anchor="t"/>
+          <a:lstStyle/>
+          <a:p>
+            <a:pPr indent="0" marL="0">
+              <a:buNone/>
+            </a:pPr>
+            <a:r>
+              <a:rPr lang="en-US" sz="1600" b="1" dirty="0">
+                <a:solidFill>
+                  <a:srgbClr val="14213D"/>
+                </a:solidFill>
+                <a:latin typeface="Consolas" pitchFamily="34" charset="0"/>
+                <a:ea typeface="Consolas" pitchFamily="34" charset="-122"/>
+                <a:cs typeface="Consolas" pitchFamily="34" charset="-120"/>
+              </a:rPr>
+              <a:t>back</a:t>
+            </a:r>
+            <a:endParaRPr lang="en-US" sz="1600" dirty="0"/>
+          </a:p>
+        </p:txBody>
+      </p:sp>
+      <p:sp>
+        <p:nvSpPr>
+          <p:cNvPr id="11" name="text-115"/>
+          <p:cNvSpPr txBox="1"/>
+          <p:nvPr/>
+        </p:nvSpPr>
+        <p:spPr>
+          <a:xfrm>
+            <a:off x="7772400" y="3611880"/>
+            <a:ext cx="3611880" cy="566928"/>
+          </a:xfrm>
+          <a:prstGeom prst="rect">
+            <a:avLst/>
+          </a:prstGeom>
+          <a:noFill/>
+          <a:ln/>
+        </p:spPr>
+        <p:txBody>
+          <a:bodyPr wrap="square" lIns="0" tIns="0" rIns="0" bIns="0" rtlCol="0" anchor="t"/>
+          <a:lstStyle/>
+          <a:p>
+            <a:pPr indent="0" marL="0">
+              <a:lnSpc>
+                <a:spcPct val="120000"/>
+              </a:lnSpc>
+              <a:buNone/>
+            </a:pPr>
+            <a:r>
+              <a:rPr lang="en-US" sz="1300" dirty="0">
+                <a:solidFill>
+                  <a:srgbClr val="4A5568"/>
+                </a:solidFill>
+                <a:latin typeface="Malgun Gothic" pitchFamily="34" charset="0"/>
+                <a:ea typeface="Malgun Gothic" pitchFamily="34" charset="-122"/>
+                <a:cs typeface="Malgun Gothic" pitchFamily="34" charset="-120"/>
+              </a:rPr>
+              <a:t>Nav2 BackUp 0.15 m @ 0.08 m/s, 충돌 검사 포함. 3회 연속이면 stop</a:t>
+            </a:r>
+            <a:endParaRPr lang="en-US" sz="1300" dirty="0"/>
+          </a:p>
+        </p:txBody>
+      </p:sp>
+      <p:sp>
+        <p:nvSpPr>
+          <p:cNvPr id="12" name="card-116"/>
+          <p:cNvSpPr/>
+          <p:nvPr/>
+        </p:nvSpPr>
+        <p:spPr>
+          <a:xfrm>
+            <a:off x="7498080" y="4425696"/>
+            <a:ext cx="4142232" cy="1188720"/>
+          </a:xfrm>
+          <a:prstGeom prst="roundRect">
+            <a:avLst>
+              <a:gd name="adj" fmla="val 9231"/>
+            </a:avLst>
+          </a:prstGeom>
+          <a:solidFill>
+            <a:srgbClr val="F3F5F8"/>
+          </a:solidFill>
+          <a:ln w="9525">
+            <a:solidFill>
+              <a:srgbClr val="F3F5F8"/>
+            </a:solidFill>
+            <a:prstDash val="solid"/>
+          </a:ln>
+        </p:spPr>
+      </p:sp>
+      <p:sp>
+        <p:nvSpPr>
+          <p:cNvPr id="13" name="text-117"/>
+          <p:cNvSpPr txBox="1"/>
+          <p:nvPr/>
+        </p:nvSpPr>
+        <p:spPr>
+          <a:xfrm>
+            <a:off x="7772400" y="4590288"/>
+            <a:ext cx="3611880" cy="347472"/>
+          </a:xfrm>
+          <a:prstGeom prst="rect">
+            <a:avLst/>
+          </a:prstGeom>
+          <a:noFill/>
+          <a:ln/>
+        </p:spPr>
+        <p:txBody>
+          <a:bodyPr wrap="square" lIns="0" tIns="0" rIns="0" bIns="0" rtlCol="0" anchor="t"/>
+          <a:lstStyle/>
+          <a:p>
+            <a:pPr indent="0" marL="0">
+              <a:buNone/>
+            </a:pPr>
+            <a:r>
+              <a:rPr lang="en-US" sz="1600" b="1" dirty="0">
+                <a:solidFill>
+                  <a:srgbClr val="14213D"/>
+                </a:solidFill>
+                <a:latin typeface="Consolas" pitchFamily="34" charset="0"/>
+                <a:ea typeface="Consolas" pitchFamily="34" charset="-122"/>
+                <a:cs typeface="Consolas" pitchFamily="34" charset="-120"/>
+              </a:rPr>
+              <a:t>go (복귀)</a:t>
+            </a:r>
+            <a:endParaRPr lang="en-US" sz="1600" dirty="0"/>
+          </a:p>
+        </p:txBody>
+      </p:sp>
+      <p:sp>
+        <p:nvSpPr>
+          <p:cNvPr id="14" name="text-118"/>
+          <p:cNvSpPr txBox="1"/>
+          <p:nvPr/>
+        </p:nvSpPr>
+        <p:spPr>
+          <a:xfrm>
+            <a:off x="7772400" y="4956048"/>
+            <a:ext cx="3611880" cy="566928"/>
+          </a:xfrm>
+          <a:prstGeom prst="rect">
+            <a:avLst/>
+          </a:prstGeom>
+          <a:noFill/>
+          <a:ln/>
+        </p:spPr>
+        <p:txBody>
+          <a:bodyPr wrap="square" lIns="0" tIns="0" rIns="0" bIns="0" rtlCol="0" anchor="t"/>
+          <a:lstStyle/>
+          <a:p>
+            <a:pPr indent="0" marL="0">
+              <a:lnSpc>
+                <a:spcPct val="120000"/>
+              </a:lnSpc>
+              <a:buNone/>
+            </a:pPr>
+            <a:r>
+              <a:rPr lang="en-US" sz="1300" dirty="0">
+                <a:solidFill>
+                  <a:srgbClr val="4A5568"/>
+                </a:solidFill>
+                <a:latin typeface="Malgun Gothic" pitchFamily="34" charset="0"/>
+                <a:ea typeface="Malgun Gothic" pitchFamily="34" charset="-122"/>
+                <a:cs typeface="Malgun Gothic" pitchFamily="34" charset="-120"/>
+              </a:rPr>
+              <a:t>기억한 목적지 재전송. 사람이 개입하면 기억 폐기</a:t>
+            </a:r>
+            <a:endParaRPr lang="en-US" sz="1300" dirty="0"/>
+          </a:p>
+        </p:txBody>
+      </p:sp>
+      <p:sp>
+        <p:nvSpPr>
+          <p:cNvPr id="15" name="text-119"/>
+          <p:cNvSpPr txBox="1"/>
+          <p:nvPr/>
+        </p:nvSpPr>
+        <p:spPr>
+          <a:xfrm>
+            <a:off x="548640" y="5806440"/>
+            <a:ext cx="11094415" cy="365760"/>
+          </a:xfrm>
+          <a:prstGeom prst="rect">
+            <a:avLst/>
+          </a:prstGeom>
+          <a:noFill/>
+          <a:ln/>
+        </p:spPr>
+        <p:txBody>
+          <a:bodyPr wrap="square" lIns="0" tIns="0" rIns="0" bIns="0" rtlCol="0" anchor="t"/>
+          <a:lstStyle/>
+          <a:p>
+            <a:pPr indent="0" marL="0">
+              <a:buNone/>
+            </a:pPr>
+            <a:r>
+              <a:rPr lang="en-US" sz="1300" dirty="0">
+                <a:solidFill>
+                  <a:srgbClr val="4A5568"/>
+                </a:solidFill>
+                <a:latin typeface="Malgun Gothic" pitchFamily="34" charset="0"/>
+                <a:ea typeface="Malgun Gothic" pitchFamily="34" charset="-122"/>
+                <a:cs typeface="Malgun Gothic" pitchFamily="34" charset="-120"/>
+              </a:rPr>
+              <a:t>D = 0.25 m · R = 0.10 m · dist = 선분-선분 최소 거리(교차 판정 포함) · 서 있는 로봇은 Nav2가 장애물로 회피</a:t>
+            </a:r>
+            <a:endParaRPr lang="en-US" sz="1300" dirty="0"/>
+          </a:p>
+        </p:txBody>
+      </p:sp>
+      <p:sp>
+        <p:nvSpPr>
+          <p:cNvPr id="25" name="Slide Number Placeholder 0"/>
+          <p:cNvSpPr>
+            <a:spLocks noGrp="1"/>
+          </p:cNvSpPr>
+          <p:nvPr>
+            <p:ph type="sldNum" sz="quarter" idx="4294967295"/>
+          </p:nvPr>
+        </p:nvSpPr>
+        <p:spPr>
+          <a:xfrm>
+            <a:off x="11183112" y="6355080"/>
+            <a:ext cx="457200" cy="274320"/>
+          </a:xfrm>
+          <a:prstGeom prst="rect">
+            <a:avLst/>
+          </a:prstGeom>
+          <a:extLst>
+            <a:ext uri="{C572A759-6A51-4108-AA02-DFA0A04FC94B}">
+              <ma14:wrappingTextBoxFlag xmlns:ma14="http://schemas.microsoft.com/office/mac/drawingml/2011/main" val="0"/>
+            </a:ext>
+          </a:extLst>
+        </p:spPr>
+        <p:txBody>
+          <a:bodyPr/>
+          <a:lstStyle>
+            <a:lvl1pPr>
+              <a:defRPr sz="1000">
+                <a:solidFill>
+                  <a:srgbClr val="8A94A6"/>
+                </a:solidFill>
+                <a:latin typeface="Malgun Gothic"/>
+                <a:ea typeface="Malgun Gothic"/>
+                <a:cs typeface="Malgun Gothic"/>
+              </a:defRPr>
+            </a:lvl1pPr>
+          </a:lstStyle>
+          <a:p>
+            <a:pPr algn="r"/>
+            <a:fld id="{F7021451-1387-4CA6-816F-3879F97B5CBC}" type="slidenum">
+              <a:rPr b="0" lang="en-US"/>
+              <a:t>10</a:t>
+            </a:fld>
+            <a:endParaRPr lang="en-US"/>
+          </a:p>
+        </p:txBody>
+      </p:sp>
+    </p:spTree>
+  </p:cSld>
+  <p:clrMapOvr>
+    <a:masterClrMapping/>
+  </p:clrMapOvr>
+</p:sld>
+</file>
+
+<file path=ppt/slides/slide11.xml><?xml version="1.0" encoding="utf-8"?>
+<p:sld xmlns:a="http://schemas.openxmlformats.org/drawingml/2006/main" xmlns:r="http://schemas.openxmlformats.org/officeDocument/2006/relationships" xmlns:p="http://schemas.openxmlformats.org/presentationml/2006/main">
+  <p:cSld name="Slide 11">
+    <p:spTree>
+      <p:nvGrpSpPr>
+        <p:cNvPr id="1" name=""/>
+        <p:cNvGrpSpPr/>
+        <p:nvPr/>
+      </p:nvGrpSpPr>
+      <p:grpSpPr>
+        <a:xfrm>
+          <a:off x="0" y="0"/>
+          <a:ext cx="0" cy="0"/>
+          <a:chOff x="0" y="0"/>
+          <a:chExt cx="0" cy="0"/>
+        </a:xfrm>
+      </p:grpSpPr>
+      <p:sp>
+        <p:nvSpPr>
+          <p:cNvPr id="2" name="Text 0"/>
+          <p:cNvSpPr/>
+          <p:nvPr>
+            <p:ph idx="100" type="body" hasCustomPrompt="1"/>
+          </p:nvPr>
+        </p:nvSpPr>
+        <p:spPr>
+          <a:xfrm>
+            <a:off x="548640" y="384048"/>
+            <a:ext cx="11094415" cy="329184"/>
+          </a:xfrm>
+          <a:prstGeom prst="rect">
+            <a:avLst/>
+          </a:prstGeom>
+          <a:noFill/>
+          <a:ln/>
+        </p:spPr>
+        <p:txBody>
+          <a:bodyPr wrap="square" lIns="0" tIns="0" rIns="0" bIns="0" rtlCol="0" anchor="ctr"/>
+          <a:lstStyle/>
+          <a:p>
+            <a:pPr indent="0" marL="0">
+              <a:buNone/>
+            </a:pPr>
+            <a:r>
+              <a:rPr lang="en-US" sz="1200" spc="200" kern="0" dirty="0">
+                <a:solidFill>
+                  <a:srgbClr val="2F6FDB"/>
+                </a:solidFill>
+                <a:latin typeface="Consolas" pitchFamily="34" charset="0"/>
+                <a:ea typeface="Consolas" pitchFamily="34" charset="-122"/>
+                <a:cs typeface="Consolas" pitchFamily="34" charset="-120"/>
+              </a:rPr>
               <a:t>03 · 재시도와 안전</a:t>
             </a:r>
             <a:endParaRPr lang="en-US" sz="1200" dirty="0"/>
@@ -2895,7 +3862,7 @@
       </p:sp>
       <p:sp>
         <p:nvSpPr>
-          <p:cNvPr id="4" name="text-110"/>
+          <p:cNvPr id="4" name="text-120"/>
           <p:cNvSpPr txBox="1"/>
           <p:nvPr/>
         </p:nvSpPr>
@@ -2934,7 +3901,7 @@
       </p:sp>
       <p:graphicFrame>
         <p:nvGraphicFramePr>
-          <p:cNvPr id="11" name="table-111"/>
+          <p:cNvPr id="12" name="table-121"/>
           <p:cNvGraphicFramePr>
             <a:graphicFrameLocks noGrp="1"/>
           </p:cNvGraphicFramePr>
@@ -4201,7 +5168,7 @@
       </p:graphicFrame>
       <p:sp>
         <p:nvSpPr>
-          <p:cNvPr id="6" name="text-112"/>
+          <p:cNvPr id="6" name="text-122"/>
           <p:cNvSpPr txBox="1"/>
           <p:nvPr/>
         </p:nvSpPr>
@@ -4240,7 +5207,7 @@
       </p:sp>
       <p:sp>
         <p:nvSpPr>
-          <p:cNvPr id="7" name="card-113"/>
+          <p:cNvPr id="7" name="card-123"/>
           <p:cNvSpPr/>
           <p:nvPr/>
         </p:nvSpPr>
@@ -4267,7 +5234,7 @@
       </p:sp>
       <p:sp>
         <p:nvSpPr>
-          <p:cNvPr id="8" name="text-114"/>
+          <p:cNvPr id="8" name="text-124"/>
           <p:cNvSpPr txBox="1"/>
           <p:nvPr/>
         </p:nvSpPr>
@@ -4306,7 +5273,7 @@
       </p:sp>
       <p:sp>
         <p:nvSpPr>
-          <p:cNvPr id="9" name="text-115"/>
+          <p:cNvPr id="9" name="text-125"/>
           <p:cNvSpPr txBox="1"/>
           <p:nvPr/>
         </p:nvSpPr>
@@ -4345,7 +5312,7 @@
       </p:sp>
       <p:sp>
         <p:nvSpPr>
-          <p:cNvPr id="10" name="text-116"/>
+          <p:cNvPr id="10" name="text-126"/>
           <p:cNvSpPr txBox="1"/>
           <p:nvPr/>
         </p:nvSpPr>
@@ -4384,7 +5351,7 @@
       </p:sp>
       <p:sp>
         <p:nvSpPr>
-          <p:cNvPr id="11" name="text-117"/>
+          <p:cNvPr id="11" name="text-127"/>
           <p:cNvSpPr txBox="1"/>
           <p:nvPr/>
         </p:nvSpPr>
@@ -4423,7 +5390,7 @@
       </p:sp>
       <p:sp>
         <p:nvSpPr>
-          <p:cNvPr id="12" name="text-118"/>
+          <p:cNvPr id="12" name="text-128"/>
           <p:cNvSpPr txBox="1"/>
           <p:nvPr/>
         </p:nvSpPr>
@@ -4462,7 +5429,7 @@
       </p:sp>
       <p:sp>
         <p:nvSpPr>
-          <p:cNvPr id="13" name="text-119"/>
+          <p:cNvPr id="13" name="text-129"/>
           <p:cNvSpPr txBox="1"/>
           <p:nvPr/>
         </p:nvSpPr>
@@ -4501,7 +5468,7 @@
       </p:sp>
       <p:sp>
         <p:nvSpPr>
-          <p:cNvPr id="14" name="text-120"/>
+          <p:cNvPr id="14" name="text-130"/>
           <p:cNvSpPr txBox="1"/>
           <p:nvPr/>
         </p:nvSpPr>
@@ -4540,7 +5507,7 @@
       </p:sp>
       <p:sp>
         <p:nvSpPr>
-          <p:cNvPr id="15" name="text-121"/>
+          <p:cNvPr id="15" name="text-131"/>
           <p:cNvSpPr txBox="1"/>
           <p:nvPr/>
         </p:nvSpPr>
@@ -4579,7 +5546,7 @@
       </p:sp>
       <p:sp>
         <p:nvSpPr>
-          <p:cNvPr id="16" name="text-122"/>
+          <p:cNvPr id="16" name="text-132"/>
           <p:cNvSpPr txBox="1"/>
           <p:nvPr/>
         </p:nvSpPr>
@@ -4658,7 +5625,7 @@
             <a:pPr algn="r"/>
             <a:fld id="{F7021451-1387-4CA6-816F-3879F97B5CBC}" type="slidenum">
               <a:rPr b="0" lang="en-US"/>
-              <a:t>10</a:t>
+              <a:t>11</a:t>
             </a:fld>
             <a:endParaRPr lang="en-US"/>
           </a:p>
@@ -4672,9 +5639,9 @@
 </p:sld>
 </file>
 
-<file path=ppt/slides/slide11.xml><?xml version="1.0" encoding="utf-8"?>
+<file path=ppt/slides/slide12.xml><?xml version="1.0" encoding="utf-8"?>
 <p:sld xmlns:a="http://schemas.openxmlformats.org/drawingml/2006/main" xmlns:r="http://schemas.openxmlformats.org/officeDocument/2006/relationships" xmlns:p="http://schemas.openxmlformats.org/presentationml/2006/main">
-  <p:cSld name="Slide 11">
+  <p:cSld name="Slide 12">
     <p:spTree>
       <p:nvGrpSpPr>
         <p:cNvPr id="1" name=""/>
@@ -4773,7 +5740,7 @@
       </p:sp>
       <p:graphicFrame>
         <p:nvGraphicFramePr>
-          <p:cNvPr id="12" name="table-123"/>
+          <p:cNvPr id="13" name="table-133"/>
           <p:cNvGraphicFramePr>
             <a:graphicFrameLocks noGrp="1"/>
           </p:cNvGraphicFramePr>
@@ -6449,7 +7416,7 @@
       </p:graphicFrame>
       <p:sp>
         <p:nvSpPr>
-          <p:cNvPr id="5" name="card-124"/>
+          <p:cNvPr id="5" name="card-134"/>
           <p:cNvSpPr/>
           <p:nvPr/>
         </p:nvSpPr>
@@ -6476,7 +7443,7 @@
       </p:sp>
       <p:sp>
         <p:nvSpPr>
-          <p:cNvPr id="6" name="text-125"/>
+          <p:cNvPr id="6" name="text-135"/>
           <p:cNvSpPr txBox="1"/>
           <p:nvPr/>
         </p:nvSpPr>
@@ -6515,7 +7482,7 @@
       </p:sp>
       <p:sp>
         <p:nvSpPr>
-          <p:cNvPr id="7" name="card-126"/>
+          <p:cNvPr id="7" name="card-136"/>
           <p:cNvSpPr/>
           <p:nvPr/>
         </p:nvSpPr>
@@ -6542,7 +7509,7 @@
       </p:sp>
       <p:sp>
         <p:nvSpPr>
-          <p:cNvPr id="8" name="text-127"/>
+          <p:cNvPr id="8" name="text-137"/>
           <p:cNvSpPr txBox="1"/>
           <p:nvPr/>
         </p:nvSpPr>
@@ -6621,7 +7588,7 @@
             <a:pPr algn="r"/>
             <a:fld id="{F7021451-1387-4CA6-816F-3879F97B5CBC}" type="slidenum">
               <a:rPr b="0" lang="en-US"/>
-              <a:t>11</a:t>
+              <a:t>12</a:t>
             </a:fld>
             <a:endParaRPr lang="en-US"/>
           </a:p>
@@ -6635,9 +7602,9 @@
 </p:sld>
 </file>
 
-<file path=ppt/slides/slide12.xml><?xml version="1.0" encoding="utf-8"?>
+<file path=ppt/slides/slide13.xml><?xml version="1.0" encoding="utf-8"?>
 <p:sld xmlns:a="http://schemas.openxmlformats.org/drawingml/2006/main" xmlns:r="http://schemas.openxmlformats.org/officeDocument/2006/relationships" xmlns:p="http://schemas.openxmlformats.org/presentationml/2006/main">
-  <p:cSld name="Slide 12">
+  <p:cSld name="Slide 13">
     <p:spTree>
       <p:nvGrpSpPr>
         <p:cNvPr id="1" name=""/>
@@ -6687,7 +7654,7 @@
                 <a:ea typeface="Consolas" pitchFamily="34" charset="-122"/>
                 <a:cs typeface="Consolas" pitchFamily="34" charset="-120"/>
               </a:rPr>
-              <a:t>04 · 튜닝 근거</a:t>
+              <a:t>04 · pinky_navigation 파라미터</a:t>
             </a:r>
             <a:endParaRPr lang="en-US" sz="1200" dirty="0"/>
           </a:p>
@@ -6728,61 +7695,1522 @@
                 <a:ea typeface="Malgun Gothic" pitchFamily="34" charset="-122"/>
                 <a:cs typeface="Malgun Gothic" pitchFamily="34" charset="-120"/>
               </a:rPr>
-              <a:t>막힌 것도 없는데 문 앞에서 실패한 이유</a:t>
+              <a:t>작은 로봇·좁은 방에 맞춘 기본 조정</a:t>
             </a:r>
             <a:endParaRPr lang="en-US" sz="2800" dirty="0"/>
           </a:p>
         </p:txBody>
       </p:sp>
-      <p:sp>
-        <p:nvSpPr>
-          <p:cNvPr id="4" name="text-128"/>
+      <p:graphicFrame>
+        <p:nvGraphicFramePr>
+          <p:cNvPr id="14" name="table-138"/>
+          <p:cNvGraphicFramePr>
+            <a:graphicFrameLocks noGrp="1"/>
+          </p:cNvGraphicFramePr>
+          <p:nvPr>
+            <p:extLst>
+              <p:ext uri="{D42A27DB-BD31-4B8C-83A1-F6EECF244321}">
+                <p14:modId xmlns:p14="http://schemas.microsoft.com/office/powerpoint/2010/main" val="1579011935"/>
+              </p:ext>
+            </p:extLst>
+          </p:nvPr>
+        </p:nvGraphicFramePr>
+        <p:xfrm>
+          <a:off x="548640" y="1737360"/>
+          <a:ext cx="11094415" cy="914400"/>
+        </p:xfrm>
+        <a:graphic>
+          <a:graphicData uri="http://schemas.openxmlformats.org/drawingml/2006/table">
+            <a:tbl>
+              <a:tblPr/>
+              <a:tblGrid>
+                <a:gridCol w="4023360"/>
+                <a:gridCol w="2926080"/>
+                <a:gridCol w="4144975"/>
+              </a:tblGrid>
+              <a:tr h="512064">
+                <a:tc>
+                  <a:txBody>
+                    <a:bodyPr/>
+                    <a:lstStyle/>
+                    <a:p>
+                      <a:pPr indent="0" marL="0">
+                        <a:buNone/>
+                      </a:pPr>
+                      <a:r>
+                        <a:rPr lang="en-US" sz="1400" b="1" dirty="0">
+                          <a:solidFill>
+                            <a:srgbClr val="FFFFFF"/>
+                          </a:solidFill>
+                          <a:latin typeface="Malgun Gothic" pitchFamily="34" charset="0"/>
+                          <a:ea typeface="Malgun Gothic" pitchFamily="34" charset="-122"/>
+                          <a:cs typeface="Malgun Gothic" pitchFamily="34" charset="-120"/>
+                        </a:rPr>
+                        <a:t>파라미터</a:t>
+                      </a:r>
+                      <a:endParaRPr lang="en-US" sz="1400" dirty="0">
+                        <a:latin typeface="Malgun Gothic" charset="0"/>
+                        <a:ea typeface="Malgun Gothic" charset="0"/>
+                        <a:cs typeface="Malgun Gothic" charset="0"/>
+                      </a:endParaRPr>
+                    </a:p>
+                  </a:txBody>
+                  <a:tcPr marL="109728" marR="109728" marT="54864" marB="54864" anchor="ctr">
+                    <a:lnL w="9525" cap="flat" cmpd="sng" algn="ctr">
+                      <a:solidFill>
+                        <a:srgbClr val="DDE2E8"/>
+                      </a:solidFill>
+                      <a:prstDash val="solid"/>
+                      <a:round/>
+                      <a:headEnd type="none" w="med" len="med"/>
+                      <a:tailEnd type="none" w="med" len="med"/>
+                    </a:lnL>
+                    <a:lnR w="9525" cap="flat" cmpd="sng" algn="ctr">
+                      <a:solidFill>
+                        <a:srgbClr val="DDE2E8"/>
+                      </a:solidFill>
+                      <a:prstDash val="solid"/>
+                      <a:round/>
+                      <a:headEnd type="none" w="med" len="med"/>
+                      <a:tailEnd type="none" w="med" len="med"/>
+                    </a:lnR>
+                    <a:lnT w="9525" cap="flat" cmpd="sng" algn="ctr">
+                      <a:solidFill>
+                        <a:srgbClr val="DDE2E8"/>
+                      </a:solidFill>
+                      <a:prstDash val="solid"/>
+                      <a:round/>
+                      <a:headEnd type="none" w="med" len="med"/>
+                      <a:tailEnd type="none" w="med" len="med"/>
+                    </a:lnT>
+                    <a:lnB w="9525" cap="flat" cmpd="sng" algn="ctr">
+                      <a:solidFill>
+                        <a:srgbClr val="DDE2E8"/>
+                      </a:solidFill>
+                      <a:prstDash val="solid"/>
+                      <a:round/>
+                      <a:headEnd type="none" w="med" len="med"/>
+                      <a:tailEnd type="none" w="med" len="med"/>
+                    </a:lnB>
+                    <a:solidFill>
+                      <a:srgbClr val="14213D"/>
+                    </a:solidFill>
+                  </a:tcPr>
+                </a:tc>
+                <a:tc>
+                  <a:txBody>
+                    <a:bodyPr/>
+                    <a:lstStyle/>
+                    <a:p>
+                      <a:pPr indent="0" marL="0">
+                        <a:buNone/>
+                      </a:pPr>
+                      <a:r>
+                        <a:rPr lang="en-US" sz="1400" b="1" dirty="0">
+                          <a:solidFill>
+                            <a:srgbClr val="FFFFFF"/>
+                          </a:solidFill>
+                          <a:latin typeface="Malgun Gothic" pitchFamily="34" charset="0"/>
+                          <a:ea typeface="Malgun Gothic" pitchFamily="34" charset="-122"/>
+                          <a:cs typeface="Malgun Gothic" pitchFamily="34" charset="-120"/>
+                        </a:rPr>
+                        <a:t>이전 값 → 적용</a:t>
+                      </a:r>
+                      <a:endParaRPr lang="en-US" sz="1400" dirty="0">
+                        <a:latin typeface="Malgun Gothic" charset="0"/>
+                        <a:ea typeface="Malgun Gothic" charset="0"/>
+                        <a:cs typeface="Malgun Gothic" charset="0"/>
+                      </a:endParaRPr>
+                    </a:p>
+                  </a:txBody>
+                  <a:tcPr marL="109728" marR="109728" marT="54864" marB="54864" anchor="ctr">
+                    <a:lnL w="9525" cap="flat" cmpd="sng" algn="ctr">
+                      <a:solidFill>
+                        <a:srgbClr val="DDE2E8"/>
+                      </a:solidFill>
+                      <a:prstDash val="solid"/>
+                      <a:round/>
+                      <a:headEnd type="none" w="med" len="med"/>
+                      <a:tailEnd type="none" w="med" len="med"/>
+                    </a:lnL>
+                    <a:lnR w="9525" cap="flat" cmpd="sng" algn="ctr">
+                      <a:solidFill>
+                        <a:srgbClr val="DDE2E8"/>
+                      </a:solidFill>
+                      <a:prstDash val="solid"/>
+                      <a:round/>
+                      <a:headEnd type="none" w="med" len="med"/>
+                      <a:tailEnd type="none" w="med" len="med"/>
+                    </a:lnR>
+                    <a:lnT w="9525" cap="flat" cmpd="sng" algn="ctr">
+                      <a:solidFill>
+                        <a:srgbClr val="DDE2E8"/>
+                      </a:solidFill>
+                      <a:prstDash val="solid"/>
+                      <a:round/>
+                      <a:headEnd type="none" w="med" len="med"/>
+                      <a:tailEnd type="none" w="med" len="med"/>
+                    </a:lnT>
+                    <a:lnB w="9525" cap="flat" cmpd="sng" algn="ctr">
+                      <a:solidFill>
+                        <a:srgbClr val="DDE2E8"/>
+                      </a:solidFill>
+                      <a:prstDash val="solid"/>
+                      <a:round/>
+                      <a:headEnd type="none" w="med" len="med"/>
+                      <a:tailEnd type="none" w="med" len="med"/>
+                    </a:lnB>
+                    <a:solidFill>
+                      <a:srgbClr val="14213D"/>
+                    </a:solidFill>
+                  </a:tcPr>
+                </a:tc>
+                <a:tc>
+                  <a:txBody>
+                    <a:bodyPr/>
+                    <a:lstStyle/>
+                    <a:p>
+                      <a:pPr indent="0" marL="0">
+                        <a:buNone/>
+                      </a:pPr>
+                      <a:r>
+                        <a:rPr lang="en-US" sz="1400" b="1" dirty="0">
+                          <a:solidFill>
+                            <a:srgbClr val="FFFFFF"/>
+                          </a:solidFill>
+                          <a:latin typeface="Malgun Gothic" pitchFamily="34" charset="0"/>
+                          <a:ea typeface="Malgun Gothic" pitchFamily="34" charset="-122"/>
+                          <a:cs typeface="Malgun Gothic" pitchFamily="34" charset="-120"/>
+                        </a:rPr>
+                        <a:t>의도</a:t>
+                      </a:r>
+                      <a:endParaRPr lang="en-US" sz="1400" dirty="0">
+                        <a:latin typeface="Malgun Gothic" charset="0"/>
+                        <a:ea typeface="Malgun Gothic" charset="0"/>
+                        <a:cs typeface="Malgun Gothic" charset="0"/>
+                      </a:endParaRPr>
+                    </a:p>
+                  </a:txBody>
+                  <a:tcPr marL="109728" marR="109728" marT="54864" marB="54864" anchor="ctr">
+                    <a:lnL w="9525" cap="flat" cmpd="sng" algn="ctr">
+                      <a:solidFill>
+                        <a:srgbClr val="DDE2E8"/>
+                      </a:solidFill>
+                      <a:prstDash val="solid"/>
+                      <a:round/>
+                      <a:headEnd type="none" w="med" len="med"/>
+                      <a:tailEnd type="none" w="med" len="med"/>
+                    </a:lnL>
+                    <a:lnR w="9525" cap="flat" cmpd="sng" algn="ctr">
+                      <a:solidFill>
+                        <a:srgbClr val="DDE2E8"/>
+                      </a:solidFill>
+                      <a:prstDash val="solid"/>
+                      <a:round/>
+                      <a:headEnd type="none" w="med" len="med"/>
+                      <a:tailEnd type="none" w="med" len="med"/>
+                    </a:lnR>
+                    <a:lnT w="9525" cap="flat" cmpd="sng" algn="ctr">
+                      <a:solidFill>
+                        <a:srgbClr val="DDE2E8"/>
+                      </a:solidFill>
+                      <a:prstDash val="solid"/>
+                      <a:round/>
+                      <a:headEnd type="none" w="med" len="med"/>
+                      <a:tailEnd type="none" w="med" len="med"/>
+                    </a:lnT>
+                    <a:lnB w="9525" cap="flat" cmpd="sng" algn="ctr">
+                      <a:solidFill>
+                        <a:srgbClr val="DDE2E8"/>
+                      </a:solidFill>
+                      <a:prstDash val="solid"/>
+                      <a:round/>
+                      <a:headEnd type="none" w="med" len="med"/>
+                      <a:tailEnd type="none" w="med" len="med"/>
+                    </a:lnB>
+                    <a:solidFill>
+                      <a:srgbClr val="14213D"/>
+                    </a:solidFill>
+                  </a:tcPr>
+                </a:tc>
+              </a:tr>
+              <a:tr h="512064">
+                <a:tc>
+                  <a:txBody>
+                    <a:bodyPr/>
+                    <a:lstStyle/>
+                    <a:p>
+                      <a:pPr indent="0" marL="0">
+                        <a:buNone/>
+                      </a:pPr>
+                      <a:r>
+                        <a:rPr lang="en-US" sz="1400" dirty="0">
+                          <a:solidFill>
+                            <a:srgbClr val="14213D"/>
+                          </a:solidFill>
+                          <a:latin typeface="Malgun Gothic" pitchFamily="34" charset="0"/>
+                          <a:ea typeface="Malgun Gothic" pitchFamily="34" charset="-122"/>
+                          <a:cs typeface="Malgun Gothic" pitchFamily="34" charset="-120"/>
+                        </a:rPr>
+                        <a:t>AMCL · update_min_d / update_min_a</a:t>
+                      </a:r>
+                      <a:endParaRPr lang="en-US" sz="1400" dirty="0">
+                        <a:latin typeface="Malgun Gothic" charset="0"/>
+                        <a:ea typeface="Malgun Gothic" charset="0"/>
+                        <a:cs typeface="Malgun Gothic" charset="0"/>
+                      </a:endParaRPr>
+                    </a:p>
+                  </a:txBody>
+                  <a:tcPr marL="109728" marR="109728" marT="54864" marB="54864" anchor="ctr">
+                    <a:lnL w="9525" cap="flat" cmpd="sng" algn="ctr">
+                      <a:solidFill>
+                        <a:srgbClr val="DDE2E8"/>
+                      </a:solidFill>
+                      <a:prstDash val="solid"/>
+                      <a:round/>
+                      <a:headEnd type="none" w="med" len="med"/>
+                      <a:tailEnd type="none" w="med" len="med"/>
+                    </a:lnL>
+                    <a:lnR w="9525" cap="flat" cmpd="sng" algn="ctr">
+                      <a:solidFill>
+                        <a:srgbClr val="DDE2E8"/>
+                      </a:solidFill>
+                      <a:prstDash val="solid"/>
+                      <a:round/>
+                      <a:headEnd type="none" w="med" len="med"/>
+                      <a:tailEnd type="none" w="med" len="med"/>
+                    </a:lnR>
+                    <a:lnT w="9525" cap="flat" cmpd="sng" algn="ctr">
+                      <a:solidFill>
+                        <a:srgbClr val="DDE2E8"/>
+                      </a:solidFill>
+                      <a:prstDash val="solid"/>
+                      <a:round/>
+                      <a:headEnd type="none" w="med" len="med"/>
+                      <a:tailEnd type="none" w="med" len="med"/>
+                    </a:lnT>
+                    <a:lnB w="9525" cap="flat" cmpd="sng" algn="ctr">
+                      <a:solidFill>
+                        <a:srgbClr val="DDE2E8"/>
+                      </a:solidFill>
+                      <a:prstDash val="solid"/>
+                      <a:round/>
+                      <a:headEnd type="none" w="med" len="med"/>
+                      <a:tailEnd type="none" w="med" len="med"/>
+                    </a:lnB>
+                    <a:solidFill>
+                      <a:srgbClr val="FFFFFF"/>
+                    </a:solidFill>
+                  </a:tcPr>
+                </a:tc>
+                <a:tc>
+                  <a:txBody>
+                    <a:bodyPr/>
+                    <a:lstStyle/>
+                    <a:p>
+                      <a:pPr algn="ctr" indent="0" marL="0">
+                        <a:buNone/>
+                      </a:pPr>
+                      <a:r>
+                        <a:rPr lang="en-US" sz="1400" dirty="0">
+                          <a:solidFill>
+                            <a:srgbClr val="14213D"/>
+                          </a:solidFill>
+                          <a:latin typeface="Malgun Gothic" pitchFamily="34" charset="0"/>
+                          <a:ea typeface="Malgun Gothic" pitchFamily="34" charset="-122"/>
+                          <a:cs typeface="Malgun Gothic" pitchFamily="34" charset="-120"/>
+                        </a:rPr>
+                        <a:t>0.15 m / 0.1 → 0.01 m / 0.01</a:t>
+                      </a:r>
+                      <a:endParaRPr lang="en-US" sz="1400" dirty="0">
+                        <a:latin typeface="Malgun Gothic" charset="0"/>
+                        <a:ea typeface="Malgun Gothic" charset="0"/>
+                        <a:cs typeface="Malgun Gothic" charset="0"/>
+                      </a:endParaRPr>
+                    </a:p>
+                  </a:txBody>
+                  <a:tcPr marL="109728" marR="109728" marT="54864" marB="54864" anchor="ctr">
+                    <a:lnL w="9525" cap="flat" cmpd="sng" algn="ctr">
+                      <a:solidFill>
+                        <a:srgbClr val="DDE2E8"/>
+                      </a:solidFill>
+                      <a:prstDash val="solid"/>
+                      <a:round/>
+                      <a:headEnd type="none" w="med" len="med"/>
+                      <a:tailEnd type="none" w="med" len="med"/>
+                    </a:lnL>
+                    <a:lnR w="9525" cap="flat" cmpd="sng" algn="ctr">
+                      <a:solidFill>
+                        <a:srgbClr val="DDE2E8"/>
+                      </a:solidFill>
+                      <a:prstDash val="solid"/>
+                      <a:round/>
+                      <a:headEnd type="none" w="med" len="med"/>
+                      <a:tailEnd type="none" w="med" len="med"/>
+                    </a:lnR>
+                    <a:lnT w="9525" cap="flat" cmpd="sng" algn="ctr">
+                      <a:solidFill>
+                        <a:srgbClr val="DDE2E8"/>
+                      </a:solidFill>
+                      <a:prstDash val="solid"/>
+                      <a:round/>
+                      <a:headEnd type="none" w="med" len="med"/>
+                      <a:tailEnd type="none" w="med" len="med"/>
+                    </a:lnT>
+                    <a:lnB w="9525" cap="flat" cmpd="sng" algn="ctr">
+                      <a:solidFill>
+                        <a:srgbClr val="DDE2E8"/>
+                      </a:solidFill>
+                      <a:prstDash val="solid"/>
+                      <a:round/>
+                      <a:headEnd type="none" w="med" len="med"/>
+                      <a:tailEnd type="none" w="med" len="med"/>
+                    </a:lnB>
+                    <a:solidFill>
+                      <a:srgbClr val="FFFFFF"/>
+                    </a:solidFill>
+                  </a:tcPr>
+                </a:tc>
+                <a:tc>
+                  <a:txBody>
+                    <a:bodyPr/>
+                    <a:lstStyle/>
+                    <a:p>
+                      <a:pPr indent="0" marL="0">
+                        <a:buNone/>
+                      </a:pPr>
+                      <a:r>
+                        <a:rPr lang="en-US" sz="1400" dirty="0">
+                          <a:solidFill>
+                            <a:srgbClr val="14213D"/>
+                          </a:solidFill>
+                          <a:latin typeface="Malgun Gothic" pitchFamily="34" charset="0"/>
+                          <a:ea typeface="Malgun Gothic" pitchFamily="34" charset="-122"/>
+                          <a:cs typeface="Malgun Gothic" pitchFamily="34" charset="-120"/>
+                        </a:rPr>
+                        <a:t>1 cm만 움직여도 위치 갱신</a:t>
+                      </a:r>
+                      <a:endParaRPr lang="en-US" sz="1400" dirty="0">
+                        <a:latin typeface="Malgun Gothic" charset="0"/>
+                        <a:ea typeface="Malgun Gothic" charset="0"/>
+                        <a:cs typeface="Malgun Gothic" charset="0"/>
+                      </a:endParaRPr>
+                    </a:p>
+                  </a:txBody>
+                  <a:tcPr marL="109728" marR="109728" marT="54864" marB="54864" anchor="ctr">
+                    <a:lnL w="9525" cap="flat" cmpd="sng" algn="ctr">
+                      <a:solidFill>
+                        <a:srgbClr val="DDE2E8"/>
+                      </a:solidFill>
+                      <a:prstDash val="solid"/>
+                      <a:round/>
+                      <a:headEnd type="none" w="med" len="med"/>
+                      <a:tailEnd type="none" w="med" len="med"/>
+                    </a:lnL>
+                    <a:lnR w="9525" cap="flat" cmpd="sng" algn="ctr">
+                      <a:solidFill>
+                        <a:srgbClr val="DDE2E8"/>
+                      </a:solidFill>
+                      <a:prstDash val="solid"/>
+                      <a:round/>
+                      <a:headEnd type="none" w="med" len="med"/>
+                      <a:tailEnd type="none" w="med" len="med"/>
+                    </a:lnR>
+                    <a:lnT w="9525" cap="flat" cmpd="sng" algn="ctr">
+                      <a:solidFill>
+                        <a:srgbClr val="DDE2E8"/>
+                      </a:solidFill>
+                      <a:prstDash val="solid"/>
+                      <a:round/>
+                      <a:headEnd type="none" w="med" len="med"/>
+                      <a:tailEnd type="none" w="med" len="med"/>
+                    </a:lnT>
+                    <a:lnB w="9525" cap="flat" cmpd="sng" algn="ctr">
+                      <a:solidFill>
+                        <a:srgbClr val="DDE2E8"/>
+                      </a:solidFill>
+                      <a:prstDash val="solid"/>
+                      <a:round/>
+                      <a:headEnd type="none" w="med" len="med"/>
+                      <a:tailEnd type="none" w="med" len="med"/>
+                    </a:lnB>
+                    <a:solidFill>
+                      <a:srgbClr val="FFFFFF"/>
+                    </a:solidFill>
+                  </a:tcPr>
+                </a:tc>
+              </a:tr>
+              <a:tr h="512064">
+                <a:tc>
+                  <a:txBody>
+                    <a:bodyPr/>
+                    <a:lstStyle/>
+                    <a:p>
+                      <a:pPr indent="0" marL="0">
+                        <a:buNone/>
+                      </a:pPr>
+                      <a:r>
+                        <a:rPr lang="en-US" sz="1400" dirty="0">
+                          <a:solidFill>
+                            <a:srgbClr val="14213D"/>
+                          </a:solidFill>
+                          <a:latin typeface="Malgun Gothic" pitchFamily="34" charset="0"/>
+                          <a:ea typeface="Malgun Gothic" pitchFamily="34" charset="-122"/>
+                          <a:cs typeface="Malgun Gothic" pitchFamily="34" charset="-120"/>
+                        </a:rPr>
+                        <a:t>RPP · lookahead_dist</a:t>
+                      </a:r>
+                      <a:endParaRPr lang="en-US" sz="1400" dirty="0">
+                        <a:latin typeface="Malgun Gothic" charset="0"/>
+                        <a:ea typeface="Malgun Gothic" charset="0"/>
+                        <a:cs typeface="Malgun Gothic" charset="0"/>
+                      </a:endParaRPr>
+                    </a:p>
+                  </a:txBody>
+                  <a:tcPr marL="109728" marR="109728" marT="54864" marB="54864" anchor="ctr">
+                    <a:lnL w="9525" cap="flat" cmpd="sng" algn="ctr">
+                      <a:solidFill>
+                        <a:srgbClr val="DDE2E8"/>
+                      </a:solidFill>
+                      <a:prstDash val="solid"/>
+                      <a:round/>
+                      <a:headEnd type="none" w="med" len="med"/>
+                      <a:tailEnd type="none" w="med" len="med"/>
+                    </a:lnL>
+                    <a:lnR w="9525" cap="flat" cmpd="sng" algn="ctr">
+                      <a:solidFill>
+                        <a:srgbClr val="DDE2E8"/>
+                      </a:solidFill>
+                      <a:prstDash val="solid"/>
+                      <a:round/>
+                      <a:headEnd type="none" w="med" len="med"/>
+                      <a:tailEnd type="none" w="med" len="med"/>
+                    </a:lnR>
+                    <a:lnT w="9525" cap="flat" cmpd="sng" algn="ctr">
+                      <a:solidFill>
+                        <a:srgbClr val="DDE2E8"/>
+                      </a:solidFill>
+                      <a:prstDash val="solid"/>
+                      <a:round/>
+                      <a:headEnd type="none" w="med" len="med"/>
+                      <a:tailEnd type="none" w="med" len="med"/>
+                    </a:lnT>
+                    <a:lnB w="9525" cap="flat" cmpd="sng" algn="ctr">
+                      <a:solidFill>
+                        <a:srgbClr val="DDE2E8"/>
+                      </a:solidFill>
+                      <a:prstDash val="solid"/>
+                      <a:round/>
+                      <a:headEnd type="none" w="med" len="med"/>
+                      <a:tailEnd type="none" w="med" len="med"/>
+                    </a:lnB>
+                    <a:solidFill>
+                      <a:srgbClr val="F3F5F8"/>
+                    </a:solidFill>
+                  </a:tcPr>
+                </a:tc>
+                <a:tc>
+                  <a:txBody>
+                    <a:bodyPr/>
+                    <a:lstStyle/>
+                    <a:p>
+                      <a:pPr algn="ctr" indent="0" marL="0">
+                        <a:buNone/>
+                      </a:pPr>
+                      <a:r>
+                        <a:rPr lang="en-US" sz="1400" dirty="0">
+                          <a:solidFill>
+                            <a:srgbClr val="14213D"/>
+                          </a:solidFill>
+                          <a:latin typeface="Malgun Gothic" pitchFamily="34" charset="0"/>
+                          <a:ea typeface="Malgun Gothic" pitchFamily="34" charset="-122"/>
+                          <a:cs typeface="Malgun Gothic" pitchFamily="34" charset="-120"/>
+                        </a:rPr>
+                        <a:t>0.6 m → 0.05 m</a:t>
+                      </a:r>
+                      <a:endParaRPr lang="en-US" sz="1400" dirty="0">
+                        <a:latin typeface="Malgun Gothic" charset="0"/>
+                        <a:ea typeface="Malgun Gothic" charset="0"/>
+                        <a:cs typeface="Malgun Gothic" charset="0"/>
+                      </a:endParaRPr>
+                    </a:p>
+                  </a:txBody>
+                  <a:tcPr marL="109728" marR="109728" marT="54864" marB="54864" anchor="ctr">
+                    <a:lnL w="9525" cap="flat" cmpd="sng" algn="ctr">
+                      <a:solidFill>
+                        <a:srgbClr val="DDE2E8"/>
+                      </a:solidFill>
+                      <a:prstDash val="solid"/>
+                      <a:round/>
+                      <a:headEnd type="none" w="med" len="med"/>
+                      <a:tailEnd type="none" w="med" len="med"/>
+                    </a:lnL>
+                    <a:lnR w="9525" cap="flat" cmpd="sng" algn="ctr">
+                      <a:solidFill>
+                        <a:srgbClr val="DDE2E8"/>
+                      </a:solidFill>
+                      <a:prstDash val="solid"/>
+                      <a:round/>
+                      <a:headEnd type="none" w="med" len="med"/>
+                      <a:tailEnd type="none" w="med" len="med"/>
+                    </a:lnR>
+                    <a:lnT w="9525" cap="flat" cmpd="sng" algn="ctr">
+                      <a:solidFill>
+                        <a:srgbClr val="DDE2E8"/>
+                      </a:solidFill>
+                      <a:prstDash val="solid"/>
+                      <a:round/>
+                      <a:headEnd type="none" w="med" len="med"/>
+                      <a:tailEnd type="none" w="med" len="med"/>
+                    </a:lnT>
+                    <a:lnB w="9525" cap="flat" cmpd="sng" algn="ctr">
+                      <a:solidFill>
+                        <a:srgbClr val="DDE2E8"/>
+                      </a:solidFill>
+                      <a:prstDash val="solid"/>
+                      <a:round/>
+                      <a:headEnd type="none" w="med" len="med"/>
+                      <a:tailEnd type="none" w="med" len="med"/>
+                    </a:lnB>
+                    <a:solidFill>
+                      <a:srgbClr val="F3F5F8"/>
+                    </a:solidFill>
+                  </a:tcPr>
+                </a:tc>
+                <a:tc>
+                  <a:txBody>
+                    <a:bodyPr/>
+                    <a:lstStyle/>
+                    <a:p>
+                      <a:pPr indent="0" marL="0">
+                        <a:buNone/>
+                      </a:pPr>
+                      <a:r>
+                        <a:rPr lang="en-US" sz="1400" dirty="0">
+                          <a:solidFill>
+                            <a:srgbClr val="14213D"/>
+                          </a:solidFill>
+                          <a:latin typeface="Malgun Gothic" pitchFamily="34" charset="0"/>
+                          <a:ea typeface="Malgun Gothic" pitchFamily="34" charset="-122"/>
+                          <a:cs typeface="Malgun Gothic" pitchFamily="34" charset="-120"/>
+                        </a:rPr>
+                        <a:t>실제는 속도 비례 0.15 ~ 0.9 m로 제한</a:t>
+                      </a:r>
+                      <a:endParaRPr lang="en-US" sz="1400" dirty="0">
+                        <a:latin typeface="Malgun Gothic" charset="0"/>
+                        <a:ea typeface="Malgun Gothic" charset="0"/>
+                        <a:cs typeface="Malgun Gothic" charset="0"/>
+                      </a:endParaRPr>
+                    </a:p>
+                  </a:txBody>
+                  <a:tcPr marL="109728" marR="109728" marT="54864" marB="54864" anchor="ctr">
+                    <a:lnL w="9525" cap="flat" cmpd="sng" algn="ctr">
+                      <a:solidFill>
+                        <a:srgbClr val="DDE2E8"/>
+                      </a:solidFill>
+                      <a:prstDash val="solid"/>
+                      <a:round/>
+                      <a:headEnd type="none" w="med" len="med"/>
+                      <a:tailEnd type="none" w="med" len="med"/>
+                    </a:lnL>
+                    <a:lnR w="9525" cap="flat" cmpd="sng" algn="ctr">
+                      <a:solidFill>
+                        <a:srgbClr val="DDE2E8"/>
+                      </a:solidFill>
+                      <a:prstDash val="solid"/>
+                      <a:round/>
+                      <a:headEnd type="none" w="med" len="med"/>
+                      <a:tailEnd type="none" w="med" len="med"/>
+                    </a:lnR>
+                    <a:lnT w="9525" cap="flat" cmpd="sng" algn="ctr">
+                      <a:solidFill>
+                        <a:srgbClr val="DDE2E8"/>
+                      </a:solidFill>
+                      <a:prstDash val="solid"/>
+                      <a:round/>
+                      <a:headEnd type="none" w="med" len="med"/>
+                      <a:tailEnd type="none" w="med" len="med"/>
+                    </a:lnT>
+                    <a:lnB w="9525" cap="flat" cmpd="sng" algn="ctr">
+                      <a:solidFill>
+                        <a:srgbClr val="DDE2E8"/>
+                      </a:solidFill>
+                      <a:prstDash val="solid"/>
+                      <a:round/>
+                      <a:headEnd type="none" w="med" len="med"/>
+                      <a:tailEnd type="none" w="med" len="med"/>
+                    </a:lnB>
+                    <a:solidFill>
+                      <a:srgbClr val="F3F5F8"/>
+                    </a:solidFill>
+                  </a:tcPr>
+                </a:tc>
+              </a:tr>
+              <a:tr h="512064">
+                <a:tc>
+                  <a:txBody>
+                    <a:bodyPr/>
+                    <a:lstStyle/>
+                    <a:p>
+                      <a:pPr indent="0" marL="0">
+                        <a:buNone/>
+                      </a:pPr>
+                      <a:r>
+                        <a:rPr lang="en-US" sz="1400" dirty="0">
+                          <a:solidFill>
+                            <a:srgbClr val="14213D"/>
+                          </a:solidFill>
+                          <a:latin typeface="Malgun Gothic" pitchFamily="34" charset="0"/>
+                          <a:ea typeface="Malgun Gothic" pitchFamily="34" charset="-122"/>
+                          <a:cs typeface="Malgun Gothic" pitchFamily="34" charset="-120"/>
+                        </a:rPr>
+                        <a:t>costmap · resolution (local / global)</a:t>
+                      </a:r>
+                      <a:endParaRPr lang="en-US" sz="1400" dirty="0">
+                        <a:latin typeface="Malgun Gothic" charset="0"/>
+                        <a:ea typeface="Malgun Gothic" charset="0"/>
+                        <a:cs typeface="Malgun Gothic" charset="0"/>
+                      </a:endParaRPr>
+                    </a:p>
+                  </a:txBody>
+                  <a:tcPr marL="109728" marR="109728" marT="54864" marB="54864" anchor="ctr">
+                    <a:lnL w="9525" cap="flat" cmpd="sng" algn="ctr">
+                      <a:solidFill>
+                        <a:srgbClr val="DDE2E8"/>
+                      </a:solidFill>
+                      <a:prstDash val="solid"/>
+                      <a:round/>
+                      <a:headEnd type="none" w="med" len="med"/>
+                      <a:tailEnd type="none" w="med" len="med"/>
+                    </a:lnL>
+                    <a:lnR w="9525" cap="flat" cmpd="sng" algn="ctr">
+                      <a:solidFill>
+                        <a:srgbClr val="DDE2E8"/>
+                      </a:solidFill>
+                      <a:prstDash val="solid"/>
+                      <a:round/>
+                      <a:headEnd type="none" w="med" len="med"/>
+                      <a:tailEnd type="none" w="med" len="med"/>
+                    </a:lnR>
+                    <a:lnT w="9525" cap="flat" cmpd="sng" algn="ctr">
+                      <a:solidFill>
+                        <a:srgbClr val="DDE2E8"/>
+                      </a:solidFill>
+                      <a:prstDash val="solid"/>
+                      <a:round/>
+                      <a:headEnd type="none" w="med" len="med"/>
+                      <a:tailEnd type="none" w="med" len="med"/>
+                    </a:lnT>
+                    <a:lnB w="9525" cap="flat" cmpd="sng" algn="ctr">
+                      <a:solidFill>
+                        <a:srgbClr val="DDE2E8"/>
+                      </a:solidFill>
+                      <a:prstDash val="solid"/>
+                      <a:round/>
+                      <a:headEnd type="none" w="med" len="med"/>
+                      <a:tailEnd type="none" w="med" len="med"/>
+                    </a:lnB>
+                    <a:solidFill>
+                      <a:srgbClr val="FFFFFF"/>
+                    </a:solidFill>
+                  </a:tcPr>
+                </a:tc>
+                <a:tc>
+                  <a:txBody>
+                    <a:bodyPr/>
+                    <a:lstStyle/>
+                    <a:p>
+                      <a:pPr algn="ctr" indent="0" marL="0">
+                        <a:buNone/>
+                      </a:pPr>
+                      <a:r>
+                        <a:rPr lang="en-US" sz="1400" dirty="0">
+                          <a:solidFill>
+                            <a:srgbClr val="14213D"/>
+                          </a:solidFill>
+                          <a:latin typeface="Malgun Gothic" pitchFamily="34" charset="0"/>
+                          <a:ea typeface="Malgun Gothic" pitchFamily="34" charset="-122"/>
+                          <a:cs typeface="Malgun Gothic" pitchFamily="34" charset="-120"/>
+                        </a:rPr>
+                        <a:t>0.05 m → 0.01 m</a:t>
+                      </a:r>
+                      <a:endParaRPr lang="en-US" sz="1400" dirty="0">
+                        <a:latin typeface="Malgun Gothic" charset="0"/>
+                        <a:ea typeface="Malgun Gothic" charset="0"/>
+                        <a:cs typeface="Malgun Gothic" charset="0"/>
+                      </a:endParaRPr>
+                    </a:p>
+                  </a:txBody>
+                  <a:tcPr marL="109728" marR="109728" marT="54864" marB="54864" anchor="ctr">
+                    <a:lnL w="9525" cap="flat" cmpd="sng" algn="ctr">
+                      <a:solidFill>
+                        <a:srgbClr val="DDE2E8"/>
+                      </a:solidFill>
+                      <a:prstDash val="solid"/>
+                      <a:round/>
+                      <a:headEnd type="none" w="med" len="med"/>
+                      <a:tailEnd type="none" w="med" len="med"/>
+                    </a:lnL>
+                    <a:lnR w="9525" cap="flat" cmpd="sng" algn="ctr">
+                      <a:solidFill>
+                        <a:srgbClr val="DDE2E8"/>
+                      </a:solidFill>
+                      <a:prstDash val="solid"/>
+                      <a:round/>
+                      <a:headEnd type="none" w="med" len="med"/>
+                      <a:tailEnd type="none" w="med" len="med"/>
+                    </a:lnR>
+                    <a:lnT w="9525" cap="flat" cmpd="sng" algn="ctr">
+                      <a:solidFill>
+                        <a:srgbClr val="DDE2E8"/>
+                      </a:solidFill>
+                      <a:prstDash val="solid"/>
+                      <a:round/>
+                      <a:headEnd type="none" w="med" len="med"/>
+                      <a:tailEnd type="none" w="med" len="med"/>
+                    </a:lnT>
+                    <a:lnB w="9525" cap="flat" cmpd="sng" algn="ctr">
+                      <a:solidFill>
+                        <a:srgbClr val="DDE2E8"/>
+                      </a:solidFill>
+                      <a:prstDash val="solid"/>
+                      <a:round/>
+                      <a:headEnd type="none" w="med" len="med"/>
+                      <a:tailEnd type="none" w="med" len="med"/>
+                    </a:lnB>
+                    <a:solidFill>
+                      <a:srgbClr val="FFFFFF"/>
+                    </a:solidFill>
+                  </a:tcPr>
+                </a:tc>
+                <a:tc>
+                  <a:txBody>
+                    <a:bodyPr/>
+                    <a:lstStyle/>
+                    <a:p>
+                      <a:pPr indent="0" marL="0">
+                        <a:buNone/>
+                      </a:pPr>
+                      <a:r>
+                        <a:rPr lang="en-US" sz="1400" dirty="0">
+                          <a:solidFill>
+                            <a:srgbClr val="14213D"/>
+                          </a:solidFill>
+                          <a:latin typeface="Malgun Gothic" pitchFamily="34" charset="0"/>
+                          <a:ea typeface="Malgun Gothic" pitchFamily="34" charset="-122"/>
+                          <a:cs typeface="Malgun Gothic" pitchFamily="34" charset="-120"/>
+                        </a:rPr>
+                        <a:t>12×10 cm 로봇과 35 cm 문을 표현</a:t>
+                      </a:r>
+                      <a:endParaRPr lang="en-US" sz="1400" dirty="0">
+                        <a:latin typeface="Malgun Gothic" charset="0"/>
+                        <a:ea typeface="Malgun Gothic" charset="0"/>
+                        <a:cs typeface="Malgun Gothic" charset="0"/>
+                      </a:endParaRPr>
+                    </a:p>
+                  </a:txBody>
+                  <a:tcPr marL="109728" marR="109728" marT="54864" marB="54864" anchor="ctr">
+                    <a:lnL w="9525" cap="flat" cmpd="sng" algn="ctr">
+                      <a:solidFill>
+                        <a:srgbClr val="DDE2E8"/>
+                      </a:solidFill>
+                      <a:prstDash val="solid"/>
+                      <a:round/>
+                      <a:headEnd type="none" w="med" len="med"/>
+                      <a:tailEnd type="none" w="med" len="med"/>
+                    </a:lnL>
+                    <a:lnR w="9525" cap="flat" cmpd="sng" algn="ctr">
+                      <a:solidFill>
+                        <a:srgbClr val="DDE2E8"/>
+                      </a:solidFill>
+                      <a:prstDash val="solid"/>
+                      <a:round/>
+                      <a:headEnd type="none" w="med" len="med"/>
+                      <a:tailEnd type="none" w="med" len="med"/>
+                    </a:lnR>
+                    <a:lnT w="9525" cap="flat" cmpd="sng" algn="ctr">
+                      <a:solidFill>
+                        <a:srgbClr val="DDE2E8"/>
+                      </a:solidFill>
+                      <a:prstDash val="solid"/>
+                      <a:round/>
+                      <a:headEnd type="none" w="med" len="med"/>
+                      <a:tailEnd type="none" w="med" len="med"/>
+                    </a:lnT>
+                    <a:lnB w="9525" cap="flat" cmpd="sng" algn="ctr">
+                      <a:solidFill>
+                        <a:srgbClr val="DDE2E8"/>
+                      </a:solidFill>
+                      <a:prstDash val="solid"/>
+                      <a:round/>
+                      <a:headEnd type="none" w="med" len="med"/>
+                      <a:tailEnd type="none" w="med" len="med"/>
+                    </a:lnB>
+                    <a:solidFill>
+                      <a:srgbClr val="FFFFFF"/>
+                    </a:solidFill>
+                  </a:tcPr>
+                </a:tc>
+              </a:tr>
+              <a:tr h="512064">
+                <a:tc>
+                  <a:txBody>
+                    <a:bodyPr/>
+                    <a:lstStyle/>
+                    <a:p>
+                      <a:pPr indent="0" marL="0">
+                        <a:buNone/>
+                      </a:pPr>
+                      <a:r>
+                        <a:rPr lang="en-US" sz="1400" dirty="0">
+                          <a:solidFill>
+                            <a:srgbClr val="14213D"/>
+                          </a:solidFill>
+                          <a:latin typeface="Malgun Gothic" pitchFamily="34" charset="0"/>
+                          <a:ea typeface="Malgun Gothic" pitchFamily="34" charset="-122"/>
+                          <a:cs typeface="Malgun Gothic" pitchFamily="34" charset="-120"/>
+                        </a:rPr>
+                        <a:t>local · inflation_radius</a:t>
+                      </a:r>
+                      <a:endParaRPr lang="en-US" sz="1400" dirty="0">
+                        <a:latin typeface="Malgun Gothic" charset="0"/>
+                        <a:ea typeface="Malgun Gothic" charset="0"/>
+                        <a:cs typeface="Malgun Gothic" charset="0"/>
+                      </a:endParaRPr>
+                    </a:p>
+                  </a:txBody>
+                  <a:tcPr marL="109728" marR="109728" marT="54864" marB="54864" anchor="ctr">
+                    <a:lnL w="9525" cap="flat" cmpd="sng" algn="ctr">
+                      <a:solidFill>
+                        <a:srgbClr val="DDE2E8"/>
+                      </a:solidFill>
+                      <a:prstDash val="solid"/>
+                      <a:round/>
+                      <a:headEnd type="none" w="med" len="med"/>
+                      <a:tailEnd type="none" w="med" len="med"/>
+                    </a:lnL>
+                    <a:lnR w="9525" cap="flat" cmpd="sng" algn="ctr">
+                      <a:solidFill>
+                        <a:srgbClr val="DDE2E8"/>
+                      </a:solidFill>
+                      <a:prstDash val="solid"/>
+                      <a:round/>
+                      <a:headEnd type="none" w="med" len="med"/>
+                      <a:tailEnd type="none" w="med" len="med"/>
+                    </a:lnR>
+                    <a:lnT w="9525" cap="flat" cmpd="sng" algn="ctr">
+                      <a:solidFill>
+                        <a:srgbClr val="DDE2E8"/>
+                      </a:solidFill>
+                      <a:prstDash val="solid"/>
+                      <a:round/>
+                      <a:headEnd type="none" w="med" len="med"/>
+                      <a:tailEnd type="none" w="med" len="med"/>
+                    </a:lnT>
+                    <a:lnB w="9525" cap="flat" cmpd="sng" algn="ctr">
+                      <a:solidFill>
+                        <a:srgbClr val="DDE2E8"/>
+                      </a:solidFill>
+                      <a:prstDash val="solid"/>
+                      <a:round/>
+                      <a:headEnd type="none" w="med" len="med"/>
+                      <a:tailEnd type="none" w="med" len="med"/>
+                    </a:lnB>
+                    <a:solidFill>
+                      <a:srgbClr val="F3F5F8"/>
+                    </a:solidFill>
+                  </a:tcPr>
+                </a:tc>
+                <a:tc>
+                  <a:txBody>
+                    <a:bodyPr/>
+                    <a:lstStyle/>
+                    <a:p>
+                      <a:pPr algn="ctr" indent="0" marL="0">
+                        <a:buNone/>
+                      </a:pPr>
+                      <a:r>
+                        <a:rPr lang="en-US" sz="1400" dirty="0">
+                          <a:solidFill>
+                            <a:srgbClr val="14213D"/>
+                          </a:solidFill>
+                          <a:latin typeface="Malgun Gothic" pitchFamily="34" charset="0"/>
+                          <a:ea typeface="Malgun Gothic" pitchFamily="34" charset="-122"/>
+                          <a:cs typeface="Malgun Gothic" pitchFamily="34" charset="-120"/>
+                        </a:rPr>
+                        <a:t>0.15 m → 0.4 m</a:t>
+                      </a:r>
+                      <a:endParaRPr lang="en-US" sz="1400" dirty="0">
+                        <a:latin typeface="Malgun Gothic" charset="0"/>
+                        <a:ea typeface="Malgun Gothic" charset="0"/>
+                        <a:cs typeface="Malgun Gothic" charset="0"/>
+                      </a:endParaRPr>
+                    </a:p>
+                  </a:txBody>
+                  <a:tcPr marL="109728" marR="109728" marT="54864" marB="54864" anchor="ctr">
+                    <a:lnL w="9525" cap="flat" cmpd="sng" algn="ctr">
+                      <a:solidFill>
+                        <a:srgbClr val="DDE2E8"/>
+                      </a:solidFill>
+                      <a:prstDash val="solid"/>
+                      <a:round/>
+                      <a:headEnd type="none" w="med" len="med"/>
+                      <a:tailEnd type="none" w="med" len="med"/>
+                    </a:lnL>
+                    <a:lnR w="9525" cap="flat" cmpd="sng" algn="ctr">
+                      <a:solidFill>
+                        <a:srgbClr val="DDE2E8"/>
+                      </a:solidFill>
+                      <a:prstDash val="solid"/>
+                      <a:round/>
+                      <a:headEnd type="none" w="med" len="med"/>
+                      <a:tailEnd type="none" w="med" len="med"/>
+                    </a:lnR>
+                    <a:lnT w="9525" cap="flat" cmpd="sng" algn="ctr">
+                      <a:solidFill>
+                        <a:srgbClr val="DDE2E8"/>
+                      </a:solidFill>
+                      <a:prstDash val="solid"/>
+                      <a:round/>
+                      <a:headEnd type="none" w="med" len="med"/>
+                      <a:tailEnd type="none" w="med" len="med"/>
+                    </a:lnT>
+                    <a:lnB w="9525" cap="flat" cmpd="sng" algn="ctr">
+                      <a:solidFill>
+                        <a:srgbClr val="DDE2E8"/>
+                      </a:solidFill>
+                      <a:prstDash val="solid"/>
+                      <a:round/>
+                      <a:headEnd type="none" w="med" len="med"/>
+                      <a:tailEnd type="none" w="med" len="med"/>
+                    </a:lnB>
+                    <a:solidFill>
+                      <a:srgbClr val="F3F5F8"/>
+                    </a:solidFill>
+                  </a:tcPr>
+                </a:tc>
+                <a:tc>
+                  <a:txBody>
+                    <a:bodyPr/>
+                    <a:lstStyle/>
+                    <a:p>
+                      <a:pPr indent="0" marL="0">
+                        <a:buNone/>
+                      </a:pPr>
+                      <a:r>
+                        <a:rPr lang="en-US" sz="1400" dirty="0">
+                          <a:solidFill>
+                            <a:srgbClr val="14213D"/>
+                          </a:solidFill>
+                          <a:latin typeface="Malgun Gothic" pitchFamily="34" charset="0"/>
+                          <a:ea typeface="Malgun Gothic" pitchFamily="34" charset="-122"/>
+                          <a:cs typeface="Malgun Gothic" pitchFamily="34" charset="-120"/>
+                        </a:rPr>
+                        <a:t>벽 주변 비용 범위 확대</a:t>
+                      </a:r>
+                      <a:endParaRPr lang="en-US" sz="1400" dirty="0">
+                        <a:latin typeface="Malgun Gothic" charset="0"/>
+                        <a:ea typeface="Malgun Gothic" charset="0"/>
+                        <a:cs typeface="Malgun Gothic" charset="0"/>
+                      </a:endParaRPr>
+                    </a:p>
+                  </a:txBody>
+                  <a:tcPr marL="109728" marR="109728" marT="54864" marB="54864" anchor="ctr">
+                    <a:lnL w="9525" cap="flat" cmpd="sng" algn="ctr">
+                      <a:solidFill>
+                        <a:srgbClr val="DDE2E8"/>
+                      </a:solidFill>
+                      <a:prstDash val="solid"/>
+                      <a:round/>
+                      <a:headEnd type="none" w="med" len="med"/>
+                      <a:tailEnd type="none" w="med" len="med"/>
+                    </a:lnL>
+                    <a:lnR w="9525" cap="flat" cmpd="sng" algn="ctr">
+                      <a:solidFill>
+                        <a:srgbClr val="DDE2E8"/>
+                      </a:solidFill>
+                      <a:prstDash val="solid"/>
+                      <a:round/>
+                      <a:headEnd type="none" w="med" len="med"/>
+                      <a:tailEnd type="none" w="med" len="med"/>
+                    </a:lnR>
+                    <a:lnT w="9525" cap="flat" cmpd="sng" algn="ctr">
+                      <a:solidFill>
+                        <a:srgbClr val="DDE2E8"/>
+                      </a:solidFill>
+                      <a:prstDash val="solid"/>
+                      <a:round/>
+                      <a:headEnd type="none" w="med" len="med"/>
+                      <a:tailEnd type="none" w="med" len="med"/>
+                    </a:lnT>
+                    <a:lnB w="9525" cap="flat" cmpd="sng" algn="ctr">
+                      <a:solidFill>
+                        <a:srgbClr val="DDE2E8"/>
+                      </a:solidFill>
+                      <a:prstDash val="solid"/>
+                      <a:round/>
+                      <a:headEnd type="none" w="med" len="med"/>
+                      <a:tailEnd type="none" w="med" len="med"/>
+                    </a:lnB>
+                    <a:solidFill>
+                      <a:srgbClr val="F3F5F8"/>
+                    </a:solidFill>
+                  </a:tcPr>
+                </a:tc>
+              </a:tr>
+              <a:tr h="512064">
+                <a:tc>
+                  <a:txBody>
+                    <a:bodyPr/>
+                    <a:lstStyle/>
+                    <a:p>
+                      <a:pPr indent="0" marL="0">
+                        <a:buNone/>
+                      </a:pPr>
+                      <a:r>
+                        <a:rPr lang="en-US" sz="1400" dirty="0">
+                          <a:solidFill>
+                            <a:srgbClr val="14213D"/>
+                          </a:solidFill>
+                          <a:latin typeface="Malgun Gothic" pitchFamily="34" charset="0"/>
+                          <a:ea typeface="Malgun Gothic" pitchFamily="34" charset="-122"/>
+                          <a:cs typeface="Malgun Gothic" pitchFamily="34" charset="-120"/>
+                        </a:rPr>
+                        <a:t>global · inflation_radius</a:t>
+                      </a:r>
+                      <a:endParaRPr lang="en-US" sz="1400" dirty="0">
+                        <a:latin typeface="Malgun Gothic" charset="0"/>
+                        <a:ea typeface="Malgun Gothic" charset="0"/>
+                        <a:cs typeface="Malgun Gothic" charset="0"/>
+                      </a:endParaRPr>
+                    </a:p>
+                  </a:txBody>
+                  <a:tcPr marL="109728" marR="109728" marT="54864" marB="54864" anchor="ctr">
+                    <a:lnL w="9525" cap="flat" cmpd="sng" algn="ctr">
+                      <a:solidFill>
+                        <a:srgbClr val="DDE2E8"/>
+                      </a:solidFill>
+                      <a:prstDash val="solid"/>
+                      <a:round/>
+                      <a:headEnd type="none" w="med" len="med"/>
+                      <a:tailEnd type="none" w="med" len="med"/>
+                    </a:lnL>
+                    <a:lnR w="9525" cap="flat" cmpd="sng" algn="ctr">
+                      <a:solidFill>
+                        <a:srgbClr val="DDE2E8"/>
+                      </a:solidFill>
+                      <a:prstDash val="solid"/>
+                      <a:round/>
+                      <a:headEnd type="none" w="med" len="med"/>
+                      <a:tailEnd type="none" w="med" len="med"/>
+                    </a:lnR>
+                    <a:lnT w="9525" cap="flat" cmpd="sng" algn="ctr">
+                      <a:solidFill>
+                        <a:srgbClr val="DDE2E8"/>
+                      </a:solidFill>
+                      <a:prstDash val="solid"/>
+                      <a:round/>
+                      <a:headEnd type="none" w="med" len="med"/>
+                      <a:tailEnd type="none" w="med" len="med"/>
+                    </a:lnT>
+                    <a:lnB w="9525" cap="flat" cmpd="sng" algn="ctr">
+                      <a:solidFill>
+                        <a:srgbClr val="DDE2E8"/>
+                      </a:solidFill>
+                      <a:prstDash val="solid"/>
+                      <a:round/>
+                      <a:headEnd type="none" w="med" len="med"/>
+                      <a:tailEnd type="none" w="med" len="med"/>
+                    </a:lnB>
+                    <a:solidFill>
+                      <a:srgbClr val="FFFFFF"/>
+                    </a:solidFill>
+                  </a:tcPr>
+                </a:tc>
+                <a:tc>
+                  <a:txBody>
+                    <a:bodyPr/>
+                    <a:lstStyle/>
+                    <a:p>
+                      <a:pPr algn="ctr" indent="0" marL="0">
+                        <a:buNone/>
+                      </a:pPr>
+                      <a:r>
+                        <a:rPr lang="en-US" sz="1400" dirty="0">
+                          <a:solidFill>
+                            <a:srgbClr val="14213D"/>
+                          </a:solidFill>
+                          <a:latin typeface="Malgun Gothic" pitchFamily="34" charset="0"/>
+                          <a:ea typeface="Malgun Gothic" pitchFamily="34" charset="-122"/>
+                          <a:cs typeface="Malgun Gothic" pitchFamily="34" charset="-120"/>
+                        </a:rPr>
+                        <a:t>0.15 m → 1.0 m</a:t>
+                      </a:r>
+                      <a:endParaRPr lang="en-US" sz="1400" dirty="0">
+                        <a:latin typeface="Malgun Gothic" charset="0"/>
+                        <a:ea typeface="Malgun Gothic" charset="0"/>
+                        <a:cs typeface="Malgun Gothic" charset="0"/>
+                      </a:endParaRPr>
+                    </a:p>
+                  </a:txBody>
+                  <a:tcPr marL="109728" marR="109728" marT="54864" marB="54864" anchor="ctr">
+                    <a:lnL w="9525" cap="flat" cmpd="sng" algn="ctr">
+                      <a:solidFill>
+                        <a:srgbClr val="DDE2E8"/>
+                      </a:solidFill>
+                      <a:prstDash val="solid"/>
+                      <a:round/>
+                      <a:headEnd type="none" w="med" len="med"/>
+                      <a:tailEnd type="none" w="med" len="med"/>
+                    </a:lnL>
+                    <a:lnR w="9525" cap="flat" cmpd="sng" algn="ctr">
+                      <a:solidFill>
+                        <a:srgbClr val="DDE2E8"/>
+                      </a:solidFill>
+                      <a:prstDash val="solid"/>
+                      <a:round/>
+                      <a:headEnd type="none" w="med" len="med"/>
+                      <a:tailEnd type="none" w="med" len="med"/>
+                    </a:lnR>
+                    <a:lnT w="9525" cap="flat" cmpd="sng" algn="ctr">
+                      <a:solidFill>
+                        <a:srgbClr val="DDE2E8"/>
+                      </a:solidFill>
+                      <a:prstDash val="solid"/>
+                      <a:round/>
+                      <a:headEnd type="none" w="med" len="med"/>
+                      <a:tailEnd type="none" w="med" len="med"/>
+                    </a:lnT>
+                    <a:lnB w="9525" cap="flat" cmpd="sng" algn="ctr">
+                      <a:solidFill>
+                        <a:srgbClr val="DDE2E8"/>
+                      </a:solidFill>
+                      <a:prstDash val="solid"/>
+                      <a:round/>
+                      <a:headEnd type="none" w="med" len="med"/>
+                      <a:tailEnd type="none" w="med" len="med"/>
+                    </a:lnB>
+                    <a:solidFill>
+                      <a:srgbClr val="FFFFFF"/>
+                    </a:solidFill>
+                  </a:tcPr>
+                </a:tc>
+                <a:tc>
+                  <a:txBody>
+                    <a:bodyPr/>
+                    <a:lstStyle/>
+                    <a:p>
+                      <a:pPr indent="0" marL="0">
+                        <a:buNone/>
+                      </a:pPr>
+                      <a:r>
+                        <a:rPr lang="en-US" sz="1400" dirty="0">
+                          <a:solidFill>
+                            <a:srgbClr val="14213D"/>
+                          </a:solidFill>
+                          <a:latin typeface="Malgun Gothic" pitchFamily="34" charset="0"/>
+                          <a:ea typeface="Malgun Gothic" pitchFamily="34" charset="-122"/>
+                          <a:cs typeface="Malgun Gothic" pitchFamily="34" charset="-120"/>
+                        </a:rPr>
+                        <a:t>경로가 방 가운데로 지나가게</a:t>
+                      </a:r>
+                      <a:endParaRPr lang="en-US" sz="1400" dirty="0">
+                        <a:latin typeface="Malgun Gothic" charset="0"/>
+                        <a:ea typeface="Malgun Gothic" charset="0"/>
+                        <a:cs typeface="Malgun Gothic" charset="0"/>
+                      </a:endParaRPr>
+                    </a:p>
+                  </a:txBody>
+                  <a:tcPr marL="109728" marR="109728" marT="54864" marB="54864" anchor="ctr">
+                    <a:lnL w="9525" cap="flat" cmpd="sng" algn="ctr">
+                      <a:solidFill>
+                        <a:srgbClr val="DDE2E8"/>
+                      </a:solidFill>
+                      <a:prstDash val="solid"/>
+                      <a:round/>
+                      <a:headEnd type="none" w="med" len="med"/>
+                      <a:tailEnd type="none" w="med" len="med"/>
+                    </a:lnL>
+                    <a:lnR w="9525" cap="flat" cmpd="sng" algn="ctr">
+                      <a:solidFill>
+                        <a:srgbClr val="DDE2E8"/>
+                      </a:solidFill>
+                      <a:prstDash val="solid"/>
+                      <a:round/>
+                      <a:headEnd type="none" w="med" len="med"/>
+                      <a:tailEnd type="none" w="med" len="med"/>
+                    </a:lnR>
+                    <a:lnT w="9525" cap="flat" cmpd="sng" algn="ctr">
+                      <a:solidFill>
+                        <a:srgbClr val="DDE2E8"/>
+                      </a:solidFill>
+                      <a:prstDash val="solid"/>
+                      <a:round/>
+                      <a:headEnd type="none" w="med" len="med"/>
+                      <a:tailEnd type="none" w="med" len="med"/>
+                    </a:lnT>
+                    <a:lnB w="9525" cap="flat" cmpd="sng" algn="ctr">
+                      <a:solidFill>
+                        <a:srgbClr val="DDE2E8"/>
+                      </a:solidFill>
+                      <a:prstDash val="solid"/>
+                      <a:round/>
+                      <a:headEnd type="none" w="med" len="med"/>
+                      <a:tailEnd type="none" w="med" len="med"/>
+                    </a:lnB>
+                    <a:solidFill>
+                      <a:srgbClr val="FFFFFF"/>
+                    </a:solidFill>
+                  </a:tcPr>
+                </a:tc>
+              </a:tr>
+              <a:tr h="512064">
+                <a:tc>
+                  <a:txBody>
+                    <a:bodyPr/>
+                    <a:lstStyle/>
+                    <a:p>
+                      <a:pPr indent="0" marL="0">
+                        <a:buNone/>
+                      </a:pPr>
+                      <a:r>
+                        <a:rPr lang="en-US" sz="1400" dirty="0">
+                          <a:solidFill>
+                            <a:srgbClr val="14213D"/>
+                          </a:solidFill>
+                          <a:latin typeface="Malgun Gothic" pitchFamily="34" charset="0"/>
+                          <a:ea typeface="Malgun Gothic" pitchFamily="34" charset="-122"/>
+                          <a:cs typeface="Malgun Gothic" pitchFamily="34" charset="-120"/>
+                        </a:rPr>
+                        <a:t>cost_scaling_factor (local / global)</a:t>
+                      </a:r>
+                      <a:endParaRPr lang="en-US" sz="1400" dirty="0">
+                        <a:latin typeface="Malgun Gothic" charset="0"/>
+                        <a:ea typeface="Malgun Gothic" charset="0"/>
+                        <a:cs typeface="Malgun Gothic" charset="0"/>
+                      </a:endParaRPr>
+                    </a:p>
+                  </a:txBody>
+                  <a:tcPr marL="109728" marR="109728" marT="54864" marB="54864" anchor="ctr">
+                    <a:lnL w="9525" cap="flat" cmpd="sng" algn="ctr">
+                      <a:solidFill>
+                        <a:srgbClr val="DDE2E8"/>
+                      </a:solidFill>
+                      <a:prstDash val="solid"/>
+                      <a:round/>
+                      <a:headEnd type="none" w="med" len="med"/>
+                      <a:tailEnd type="none" w="med" len="med"/>
+                    </a:lnL>
+                    <a:lnR w="9525" cap="flat" cmpd="sng" algn="ctr">
+                      <a:solidFill>
+                        <a:srgbClr val="DDE2E8"/>
+                      </a:solidFill>
+                      <a:prstDash val="solid"/>
+                      <a:round/>
+                      <a:headEnd type="none" w="med" len="med"/>
+                      <a:tailEnd type="none" w="med" len="med"/>
+                    </a:lnR>
+                    <a:lnT w="9525" cap="flat" cmpd="sng" algn="ctr">
+                      <a:solidFill>
+                        <a:srgbClr val="DDE2E8"/>
+                      </a:solidFill>
+                      <a:prstDash val="solid"/>
+                      <a:round/>
+                      <a:headEnd type="none" w="med" len="med"/>
+                      <a:tailEnd type="none" w="med" len="med"/>
+                    </a:lnT>
+                    <a:lnB w="9525" cap="flat" cmpd="sng" algn="ctr">
+                      <a:solidFill>
+                        <a:srgbClr val="DDE2E8"/>
+                      </a:solidFill>
+                      <a:prstDash val="solid"/>
+                      <a:round/>
+                      <a:headEnd type="none" w="med" len="med"/>
+                      <a:tailEnd type="none" w="med" len="med"/>
+                    </a:lnB>
+                    <a:solidFill>
+                      <a:srgbClr val="F3F5F8"/>
+                    </a:solidFill>
+                  </a:tcPr>
+                </a:tc>
+                <a:tc>
+                  <a:txBody>
+                    <a:bodyPr/>
+                    <a:lstStyle/>
+                    <a:p>
+                      <a:pPr algn="ctr" indent="0" marL="0">
+                        <a:buNone/>
+                      </a:pPr>
+                      <a:r>
+                        <a:rPr lang="en-US" sz="1400" dirty="0">
+                          <a:solidFill>
+                            <a:srgbClr val="14213D"/>
+                          </a:solidFill>
+                          <a:latin typeface="Malgun Gothic" pitchFamily="34" charset="0"/>
+                          <a:ea typeface="Malgun Gothic" pitchFamily="34" charset="-122"/>
+                          <a:cs typeface="Malgun Gothic" pitchFamily="34" charset="-120"/>
+                        </a:rPr>
+                        <a:t>3.0 → 10.0</a:t>
+                      </a:r>
+                      <a:endParaRPr lang="en-US" sz="1400" dirty="0">
+                        <a:latin typeface="Malgun Gothic" charset="0"/>
+                        <a:ea typeface="Malgun Gothic" charset="0"/>
+                        <a:cs typeface="Malgun Gothic" charset="0"/>
+                      </a:endParaRPr>
+                    </a:p>
+                  </a:txBody>
+                  <a:tcPr marL="109728" marR="109728" marT="54864" marB="54864" anchor="ctr">
+                    <a:lnL w="9525" cap="flat" cmpd="sng" algn="ctr">
+                      <a:solidFill>
+                        <a:srgbClr val="DDE2E8"/>
+                      </a:solidFill>
+                      <a:prstDash val="solid"/>
+                      <a:round/>
+                      <a:headEnd type="none" w="med" len="med"/>
+                      <a:tailEnd type="none" w="med" len="med"/>
+                    </a:lnL>
+                    <a:lnR w="9525" cap="flat" cmpd="sng" algn="ctr">
+                      <a:solidFill>
+                        <a:srgbClr val="DDE2E8"/>
+                      </a:solidFill>
+                      <a:prstDash val="solid"/>
+                      <a:round/>
+                      <a:headEnd type="none" w="med" len="med"/>
+                      <a:tailEnd type="none" w="med" len="med"/>
+                    </a:lnR>
+                    <a:lnT w="9525" cap="flat" cmpd="sng" algn="ctr">
+                      <a:solidFill>
+                        <a:srgbClr val="DDE2E8"/>
+                      </a:solidFill>
+                      <a:prstDash val="solid"/>
+                      <a:round/>
+                      <a:headEnd type="none" w="med" len="med"/>
+                      <a:tailEnd type="none" w="med" len="med"/>
+                    </a:lnT>
+                    <a:lnB w="9525" cap="flat" cmpd="sng" algn="ctr">
+                      <a:solidFill>
+                        <a:srgbClr val="DDE2E8"/>
+                      </a:solidFill>
+                      <a:prstDash val="solid"/>
+                      <a:round/>
+                      <a:headEnd type="none" w="med" len="med"/>
+                      <a:tailEnd type="none" w="med" len="med"/>
+                    </a:lnB>
+                    <a:solidFill>
+                      <a:srgbClr val="F3F5F8"/>
+                    </a:solidFill>
+                  </a:tcPr>
+                </a:tc>
+                <a:tc>
+                  <a:txBody>
+                    <a:bodyPr/>
+                    <a:lstStyle/>
+                    <a:p>
+                      <a:pPr indent="0" marL="0">
+                        <a:buNone/>
+                      </a:pPr>
+                      <a:r>
+                        <a:rPr lang="en-US" sz="1400" dirty="0">
+                          <a:solidFill>
+                            <a:srgbClr val="14213D"/>
+                          </a:solidFill>
+                          <a:latin typeface="Malgun Gothic" pitchFamily="34" charset="0"/>
+                          <a:ea typeface="Malgun Gothic" pitchFamily="34" charset="-122"/>
+                          <a:cs typeface="Malgun Gothic" pitchFamily="34" charset="-120"/>
+                        </a:rPr>
+                        <a:t>비용이 벽 가까이에서만 급증 → 좁은 통로 통과</a:t>
+                      </a:r>
+                      <a:endParaRPr lang="en-US" sz="1400" dirty="0">
+                        <a:latin typeface="Malgun Gothic" charset="0"/>
+                        <a:ea typeface="Malgun Gothic" charset="0"/>
+                        <a:cs typeface="Malgun Gothic" charset="0"/>
+                      </a:endParaRPr>
+                    </a:p>
+                  </a:txBody>
+                  <a:tcPr marL="109728" marR="109728" marT="54864" marB="54864" anchor="ctr">
+                    <a:lnL w="9525" cap="flat" cmpd="sng" algn="ctr">
+                      <a:solidFill>
+                        <a:srgbClr val="DDE2E8"/>
+                      </a:solidFill>
+                      <a:prstDash val="solid"/>
+                      <a:round/>
+                      <a:headEnd type="none" w="med" len="med"/>
+                      <a:tailEnd type="none" w="med" len="med"/>
+                    </a:lnL>
+                    <a:lnR w="9525" cap="flat" cmpd="sng" algn="ctr">
+                      <a:solidFill>
+                        <a:srgbClr val="DDE2E8"/>
+                      </a:solidFill>
+                      <a:prstDash val="solid"/>
+                      <a:round/>
+                      <a:headEnd type="none" w="med" len="med"/>
+                      <a:tailEnd type="none" w="med" len="med"/>
+                    </a:lnR>
+                    <a:lnT w="9525" cap="flat" cmpd="sng" algn="ctr">
+                      <a:solidFill>
+                        <a:srgbClr val="DDE2E8"/>
+                      </a:solidFill>
+                      <a:prstDash val="solid"/>
+                      <a:round/>
+                      <a:headEnd type="none" w="med" len="med"/>
+                      <a:tailEnd type="none" w="med" len="med"/>
+                    </a:lnT>
+                    <a:lnB w="9525" cap="flat" cmpd="sng" algn="ctr">
+                      <a:solidFill>
+                        <a:srgbClr val="DDE2E8"/>
+                      </a:solidFill>
+                      <a:prstDash val="solid"/>
+                      <a:round/>
+                      <a:headEnd type="none" w="med" len="med"/>
+                      <a:tailEnd type="none" w="med" len="med"/>
+                    </a:lnB>
+                    <a:solidFill>
+                      <a:srgbClr val="F3F5F8"/>
+                    </a:solidFill>
+                  </a:tcPr>
+                </a:tc>
+              </a:tr>
+            </a:tbl>
+          </a:graphicData>
+        </a:graphic>
+      </p:graphicFrame>
+      <p:sp>
+        <p:nvSpPr>
+          <p:cNvPr id="5" name="card-139"/>
+          <p:cNvSpPr/>
+          <p:nvPr/>
+        </p:nvSpPr>
+        <p:spPr>
+          <a:xfrm>
+            <a:off x="548640" y="5440680"/>
+            <a:ext cx="11094415" cy="594360"/>
+          </a:xfrm>
+          <a:prstGeom prst="roundRect">
+            <a:avLst>
+              <a:gd name="adj" fmla="val 18462"/>
+            </a:avLst>
+          </a:prstGeom>
+          <a:solidFill>
+            <a:srgbClr val="FFF4E6"/>
+          </a:solidFill>
+          <a:ln w="15875">
+            <a:solidFill>
+              <a:srgbClr val="D9822B"/>
+            </a:solidFill>
+            <a:prstDash val="solid"/>
+          </a:ln>
+        </p:spPr>
+      </p:sp>
+      <p:sp>
+        <p:nvSpPr>
+          <p:cNvPr id="6" name="text-140"/>
           <p:cNvSpPr txBox="1"/>
           <p:nvPr/>
         </p:nvSpPr>
         <p:spPr>
           <a:xfrm>
-            <a:off x="548640" y="1691640"/>
-            <a:ext cx="2194560" cy="1005840"/>
-          </a:xfrm>
-          <a:prstGeom prst="rect">
-            <a:avLst/>
-          </a:prstGeom>
-          <a:noFill/>
-          <a:ln/>
-        </p:spPr>
-        <p:txBody>
-          <a:bodyPr wrap="square" lIns="0" tIns="0" rIns="0" bIns="0" rtlCol="0" anchor="t"/>
-          <a:lstStyle/>
-          <a:p>
-            <a:pPr indent="0" marL="0">
-              <a:buNone/>
-            </a:pPr>
-            <a:r>
-              <a:rPr lang="en-US" sz="6000" b="1" dirty="0">
-                <a:solidFill>
-                  <a:srgbClr val="D9822B"/>
-                </a:solidFill>
-                <a:latin typeface="Consolas" pitchFamily="34" charset="0"/>
-                <a:ea typeface="Consolas" pitchFamily="34" charset="-122"/>
-                <a:cs typeface="Consolas" pitchFamily="34" charset="-120"/>
-              </a:rPr>
-              <a:t>750</a:t>
-            </a:r>
-            <a:endParaRPr lang="en-US" sz="6000" dirty="0"/>
-          </a:p>
-        </p:txBody>
-      </p:sp>
-      <p:sp>
-        <p:nvSpPr>
-          <p:cNvPr id="5" name="text-129"/>
-          <p:cNvSpPr txBox="1"/>
-          <p:nvPr/>
-        </p:nvSpPr>
-        <p:spPr>
-          <a:xfrm>
-            <a:off x="2788920" y="1828800"/>
-            <a:ext cx="3749040" cy="777240"/>
+            <a:off x="777240" y="5440680"/>
+            <a:ext cx="10637215" cy="594360"/>
           </a:xfrm>
           <a:prstGeom prst="rect">
             <a:avLst/>
@@ -6798,63 +9226,7 @@
               <a:buNone/>
             </a:pPr>
             <a:r>
-              <a:rPr lang="en-US" sz="1600" dirty="0">
-                <a:solidFill>
-                  <a:srgbClr val="14213D"/>
-                </a:solidFill>
-                <a:latin typeface="Malgun Gothic" pitchFamily="34" charset="0"/>
-                <a:ea typeface="Malgun Gothic" pitchFamily="34" charset="-122"/>
-                <a:cs typeface="Malgun Gothic" pitchFamily="34" charset="-120"/>
-              </a:rPr>
-              <a:t>번의 "detected collision ahead!"</a:t>
-            </a:r>
-            <a:endParaRPr lang="en-US" sz="1600" dirty="0"/>
-          </a:p>
-          <a:p>
-            <a:pPr indent="0" marL="0">
-              <a:buNone/>
-            </a:pPr>
-            <a:r>
-              <a:rPr lang="en-US" sz="1600" dirty="0">
-                <a:solidFill>
-                  <a:srgbClr val="14213D"/>
-                </a:solidFill>
-                <a:latin typeface="Malgun Gothic" pitchFamily="34" charset="0"/>
-                <a:ea typeface="Malgun Gothic" pitchFamily="34" charset="-122"/>
-                <a:cs typeface="Malgun Gothic" pitchFamily="34" charset="-120"/>
-              </a:rPr>
-              <a:t>복구 10회 → error 104</a:t>
-            </a:r>
-            <a:endParaRPr lang="en-US" sz="1600" dirty="0"/>
-          </a:p>
-        </p:txBody>
-      </p:sp>
-      <p:sp>
-        <p:nvSpPr>
-          <p:cNvPr id="6" name="text-130"/>
-          <p:cNvSpPr txBox="1"/>
-          <p:nvPr/>
-        </p:nvSpPr>
-        <p:spPr>
-          <a:xfrm>
-            <a:off x="548640" y="2926080"/>
-            <a:ext cx="6035040" cy="320040"/>
-          </a:xfrm>
-          <a:prstGeom prst="rect">
-            <a:avLst/>
-          </a:prstGeom>
-          <a:noFill/>
-          <a:ln/>
-        </p:spPr>
-        <p:txBody>
-          <a:bodyPr wrap="square" lIns="0" tIns="0" rIns="0" bIns="0" rtlCol="0" anchor="t"/>
-          <a:lstStyle/>
-          <a:p>
-            <a:pPr indent="0" marL="0">
-              <a:buNone/>
-            </a:pPr>
-            <a:r>
-              <a:rPr lang="en-US" sz="1500" b="1" dirty="0">
+              <a:rPr lang="en-US" sz="1300" b="1" dirty="0">
                 <a:solidFill>
                   <a:srgbClr val="A85A12"/>
                 </a:solidFill>
@@ -6862,267 +9234,12 @@
                 <a:ea typeface="Malgun Gothic" pitchFamily="34" charset="-122"/>
                 <a:cs typeface="Malgun Gothic" pitchFamily="34" charset="-120"/>
               </a:rPr>
-              <a:t>원인</a:t>
-            </a:r>
-            <a:endParaRPr lang="en-US" sz="1500" dirty="0"/>
-          </a:p>
-        </p:txBody>
-      </p:sp>
-      <p:sp>
-        <p:nvSpPr>
-          <p:cNvPr id="7" name="text-131"/>
-          <p:cNvSpPr txBox="1"/>
-          <p:nvPr/>
-        </p:nvSpPr>
-        <p:spPr>
-          <a:xfrm>
-            <a:off x="548640" y="3255264"/>
-            <a:ext cx="6035040" cy="640080"/>
-          </a:xfrm>
-          <a:prstGeom prst="rect">
-            <a:avLst/>
-          </a:prstGeom>
-          <a:noFill/>
-          <a:ln/>
-        </p:spPr>
-        <p:txBody>
-          <a:bodyPr wrap="square" lIns="0" tIns="0" rIns="0" bIns="0" rtlCol="0" anchor="t"/>
-          <a:lstStyle/>
-          <a:p>
-            <a:pPr indent="0" marL="0">
-              <a:lnSpc>
-                <a:spcPct val="120000"/>
-              </a:lnSpc>
-              <a:buNone/>
-            </a:pPr>
-            <a:r>
-              <a:rPr lang="en-US" sz="1300" dirty="0">
-                <a:solidFill>
-                  <a:srgbClr val="4A5568"/>
-                </a:solidFill>
-                <a:latin typeface="Malgun Gothic" pitchFamily="34" charset="0"/>
-                <a:ea typeface="Malgun Gothic" pitchFamily="34" charset="-122"/>
-                <a:cs typeface="Malgun Gothic" pitchFamily="34" charset="-120"/>
-              </a:rPr>
-              <a:t>시뮬 LiDAR 노이즈 σ 0.02 m, costmap 해상도 0.01 m → 문틀 점이 셀 단위로 흔들려 경로와 순간 겹침. 0.3 s 지속만으로 실패</a:t>
+              <a:t>대가: 0.01 m 격자에서는 LiDAR 노이즈(±2 cm)가 셀 단위 흔들림으로 보인다 → 다음 장의 문 앞 false collision으로 이어졌다</a:t>
             </a:r>
             <a:endParaRPr lang="en-US" sz="1300" dirty="0"/>
           </a:p>
         </p:txBody>
       </p:sp>
-      <p:sp>
-        <p:nvSpPr>
-          <p:cNvPr id="8" name="text-132"/>
-          <p:cNvSpPr txBox="1"/>
-          <p:nvPr/>
-        </p:nvSpPr>
-        <p:spPr>
-          <a:xfrm>
-            <a:off x="548640" y="3950208"/>
-            <a:ext cx="6035040" cy="320040"/>
-          </a:xfrm>
-          <a:prstGeom prst="rect">
-            <a:avLst/>
-          </a:prstGeom>
-          <a:noFill/>
-          <a:ln/>
-        </p:spPr>
-        <p:txBody>
-          <a:bodyPr wrap="square" lIns="0" tIns="0" rIns="0" bIns="0" rtlCol="0" anchor="t"/>
-          <a:lstStyle/>
-          <a:p>
-            <a:pPr indent="0" marL="0">
-              <a:buNone/>
-            </a:pPr>
-            <a:r>
-              <a:rPr lang="en-US" sz="1500" b="1" dirty="0">
-                <a:solidFill>
-                  <a:srgbClr val="2E7D4F"/>
-                </a:solidFill>
-                <a:latin typeface="Malgun Gothic" pitchFamily="34" charset="0"/>
-                <a:ea typeface="Malgun Gothic" pitchFamily="34" charset="-122"/>
-                <a:cs typeface="Malgun Gothic" pitchFamily="34" charset="-120"/>
-              </a:rPr>
-              <a:t>조치</a:t>
-            </a:r>
-            <a:endParaRPr lang="en-US" sz="1500" dirty="0"/>
-          </a:p>
-        </p:txBody>
-      </p:sp>
-      <p:sp>
-        <p:nvSpPr>
-          <p:cNvPr id="9" name="text-133"/>
-          <p:cNvSpPr txBox="1"/>
-          <p:nvPr/>
-        </p:nvSpPr>
-        <p:spPr>
-          <a:xfrm>
-            <a:off x="548640" y="4279392"/>
-            <a:ext cx="6035040" cy="640080"/>
-          </a:xfrm>
-          <a:prstGeom prst="rect">
-            <a:avLst/>
-          </a:prstGeom>
-          <a:noFill/>
-          <a:ln/>
-        </p:spPr>
-        <p:txBody>
-          <a:bodyPr wrap="square" lIns="0" tIns="0" rIns="0" bIns="0" rtlCol="0" anchor="t"/>
-          <a:lstStyle/>
-          <a:p>
-            <a:pPr indent="0" marL="0">
-              <a:lnSpc>
-                <a:spcPct val="120000"/>
-              </a:lnSpc>
-              <a:buNone/>
-            </a:pPr>
-            <a:r>
-              <a:rPr lang="en-US" sz="1300" dirty="0">
-                <a:solidFill>
-                  <a:srgbClr val="4A5568"/>
-                </a:solidFill>
-                <a:latin typeface="Malgun Gothic" pitchFamily="34" charset="0"/>
-                <a:ea typeface="Malgun Gothic" pitchFamily="34" charset="-122"/>
-                <a:cs typeface="Malgun Gothic" pitchFamily="34" charset="-120"/>
-              </a:rPr>
-              <a:t>failure_tolerance 1.5 s · 충돌 검사 0.5 s · 104/105/106/0 재시도 3회</a:t>
-            </a:r>
-            <a:endParaRPr lang="en-US" sz="1300" dirty="0"/>
-          </a:p>
-        </p:txBody>
-      </p:sp>
-      <p:sp>
-        <p:nvSpPr>
-          <p:cNvPr id="10" name="text-134"/>
-          <p:cNvSpPr txBox="1"/>
-          <p:nvPr/>
-        </p:nvSpPr>
-        <p:spPr>
-          <a:xfrm>
-            <a:off x="548640" y="4974336"/>
-            <a:ext cx="6035040" cy="320040"/>
-          </a:xfrm>
-          <a:prstGeom prst="rect">
-            <a:avLst/>
-          </a:prstGeom>
-          <a:noFill/>
-          <a:ln/>
-        </p:spPr>
-        <p:txBody>
-          <a:bodyPr wrap="square" lIns="0" tIns="0" rIns="0" bIns="0" rtlCol="0" anchor="t"/>
-          <a:lstStyle/>
-          <a:p>
-            <a:pPr indent="0" marL="0">
-              <a:buNone/>
-            </a:pPr>
-            <a:r>
-              <a:rPr lang="en-US" sz="1500" b="1" dirty="0">
-                <a:solidFill>
-                  <a:srgbClr val="2F6FDB"/>
-                </a:solidFill>
-                <a:latin typeface="Malgun Gothic" pitchFamily="34" charset="0"/>
-                <a:ea typeface="Malgun Gothic" pitchFamily="34" charset="-122"/>
-                <a:cs typeface="Malgun Gothic" pitchFamily="34" charset="-120"/>
-              </a:rPr>
-              <a:t>결과</a:t>
-            </a:r>
-            <a:endParaRPr lang="en-US" sz="1500" dirty="0"/>
-          </a:p>
-        </p:txBody>
-      </p:sp>
-      <p:sp>
-        <p:nvSpPr>
-          <p:cNvPr id="11" name="text-135"/>
-          <p:cNvSpPr txBox="1"/>
-          <p:nvPr/>
-        </p:nvSpPr>
-        <p:spPr>
-          <a:xfrm>
-            <a:off x="548640" y="5303520"/>
-            <a:ext cx="6035040" cy="640080"/>
-          </a:xfrm>
-          <a:prstGeom prst="rect">
-            <a:avLst/>
-          </a:prstGeom>
-          <a:noFill/>
-          <a:ln/>
-        </p:spPr>
-        <p:txBody>
-          <a:bodyPr wrap="square" lIns="0" tIns="0" rIns="0" bIns="0" rtlCol="0" anchor="t"/>
-          <a:lstStyle/>
-          <a:p>
-            <a:pPr indent="0" marL="0">
-              <a:lnSpc>
-                <a:spcPct val="120000"/>
-              </a:lnSpc>
-              <a:buNone/>
-            </a:pPr>
-            <a:r>
-              <a:rPr lang="en-US" sz="1300" dirty="0">
-                <a:solidFill>
-                  <a:srgbClr val="4A5568"/>
-                </a:solidFill>
-                <a:latin typeface="Malgun Gothic" pitchFamily="34" charset="0"/>
-                <a:ea typeface="Malgun Gothic" pitchFamily="34" charset="-122"/>
-                <a:cs typeface="Malgun Gothic" pitchFamily="34" charset="-120"/>
-              </a:rPr>
-              <a:t>"막혀서 실패 → 다시 보냄 (1/3)" 후 도착 확인. Nav2 값 단독 효과는 추가 검증 필요</a:t>
-            </a:r>
-            <a:endParaRPr lang="en-US" sz="1300" dirty="0"/>
-          </a:p>
-        </p:txBody>
-      </p:sp>
-      <p:sp>
-        <p:nvSpPr>
-          <p:cNvPr id="12" name="card-136"/>
-          <p:cNvSpPr/>
-          <p:nvPr/>
-        </p:nvSpPr>
-        <p:spPr>
-          <a:xfrm>
-            <a:off x="6903720" y="1691640"/>
-            <a:ext cx="4736592" cy="4434840"/>
-          </a:xfrm>
-          <a:prstGeom prst="roundRect">
-            <a:avLst>
-              <a:gd name="adj" fmla="val 2474"/>
-            </a:avLst>
-          </a:prstGeom>
-          <a:solidFill>
-            <a:srgbClr val="1B2333"/>
-          </a:solidFill>
-          <a:ln w="9525">
-            <a:solidFill>
-              <a:srgbClr val="1B2333"/>
-            </a:solidFill>
-            <a:prstDash val="solid"/>
-          </a:ln>
-        </p:spPr>
-      </p:sp>
-      <p:pic>
-        <p:nvPicPr>
-          <p:cNvPr id="13" name="door-shot" descr="관제 화면 캡처: 문 안의 robot2가 장애물 없이 복구 10회를 기록한 상태">    </p:cNvPr>
-          <p:cNvPicPr>
-            <a:picLocks noChangeAspect="1"/>
-          </p:cNvPicPr>
-          <p:nvPr/>
-        </p:nvPicPr>
-        <p:blipFill>
-          <a:blip r:embed="rId1"/>
-          <a:stretch>
-            <a:fillRect/>
-          </a:stretch>
-        </p:blipFill>
-        <p:spPr>
-          <a:xfrm>
-            <a:off x="7086600" y="1828800"/>
-            <a:ext cx="4224528" cy="4169664"/>
-          </a:xfrm>
-          <a:prstGeom prst="rect">
-            <a:avLst/>
-          </a:prstGeom>
-        </p:spPr>
-      </p:pic>
       <p:sp>
         <p:nvSpPr>
           <p:cNvPr id="25" name="Slide Number Placeholder 0"/>
@@ -7165,7 +9282,7 @@
             <a:pPr algn="r"/>
             <a:fld id="{F7021451-1387-4CA6-816F-3879F97B5CBC}" type="slidenum">
               <a:rPr b="0" lang="en-US"/>
-              <a:t>12</a:t>
+              <a:t>13</a:t>
             </a:fld>
             <a:endParaRPr lang="en-US"/>
           </a:p>
@@ -7179,9 +9296,553 @@
 </p:sld>
 </file>
 
-<file path=ppt/slides/slide13.xml><?xml version="1.0" encoding="utf-8"?>
+<file path=ppt/slides/slide14.xml><?xml version="1.0" encoding="utf-8"?>
 <p:sld xmlns:a="http://schemas.openxmlformats.org/drawingml/2006/main" xmlns:r="http://schemas.openxmlformats.org/officeDocument/2006/relationships" xmlns:p="http://schemas.openxmlformats.org/presentationml/2006/main">
-  <p:cSld name="Slide 13">
+  <p:cSld name="Slide 14">
+    <p:spTree>
+      <p:nvGrpSpPr>
+        <p:cNvPr id="1" name=""/>
+        <p:cNvGrpSpPr/>
+        <p:nvPr/>
+      </p:nvGrpSpPr>
+      <p:grpSpPr>
+        <a:xfrm>
+          <a:off x="0" y="0"/>
+          <a:ext cx="0" cy="0"/>
+          <a:chOff x="0" y="0"/>
+          <a:chExt cx="0" cy="0"/>
+        </a:xfrm>
+      </p:grpSpPr>
+      <p:sp>
+        <p:nvSpPr>
+          <p:cNvPr id="2" name="Text 0"/>
+          <p:cNvSpPr/>
+          <p:nvPr>
+            <p:ph idx="100" type="body" hasCustomPrompt="1"/>
+          </p:nvPr>
+        </p:nvSpPr>
+        <p:spPr>
+          <a:xfrm>
+            <a:off x="548640" y="384048"/>
+            <a:ext cx="11094415" cy="329184"/>
+          </a:xfrm>
+          <a:prstGeom prst="rect">
+            <a:avLst/>
+          </a:prstGeom>
+          <a:noFill/>
+          <a:ln/>
+        </p:spPr>
+        <p:txBody>
+          <a:bodyPr wrap="square" lIns="0" tIns="0" rIns="0" bIns="0" rtlCol="0" anchor="ctr"/>
+          <a:lstStyle/>
+          <a:p>
+            <a:pPr indent="0" marL="0">
+              <a:buNone/>
+            </a:pPr>
+            <a:r>
+              <a:rPr lang="en-US" sz="1200" spc="200" kern="0" dirty="0">
+                <a:solidFill>
+                  <a:srgbClr val="2F6FDB"/>
+                </a:solidFill>
+                <a:latin typeface="Consolas" pitchFamily="34" charset="0"/>
+                <a:ea typeface="Consolas" pitchFamily="34" charset="-122"/>
+                <a:cs typeface="Consolas" pitchFamily="34" charset="-120"/>
+              </a:rPr>
+              <a:t>04 · 튜닝 근거</a:t>
+            </a:r>
+            <a:endParaRPr lang="en-US" sz="1200" dirty="0"/>
+          </a:p>
+        </p:txBody>
+      </p:sp>
+      <p:sp>
+        <p:nvSpPr>
+          <p:cNvPr id="3" name="Text 0"/>
+          <p:cNvSpPr/>
+          <p:nvPr>
+            <p:ph idx="101" type="title" hasCustomPrompt="1"/>
+          </p:nvPr>
+        </p:nvSpPr>
+        <p:spPr>
+          <a:xfrm>
+            <a:off x="548640" y="731520"/>
+            <a:ext cx="11094415" cy="685800"/>
+          </a:xfrm>
+          <a:prstGeom prst="rect">
+            <a:avLst/>
+          </a:prstGeom>
+          <a:noFill/>
+          <a:ln/>
+        </p:spPr>
+        <p:txBody>
+          <a:bodyPr wrap="square" lIns="0" tIns="0" rIns="0" bIns="0" rtlCol="0" anchor="ctr"/>
+          <a:lstStyle/>
+          <a:p>
+            <a:pPr algn="l" indent="0" marL="0">
+              <a:buNone/>
+            </a:pPr>
+            <a:r>
+              <a:rPr lang="en-US" sz="2800" b="1" dirty="0">
+                <a:solidFill>
+                  <a:srgbClr val="14213D"/>
+                </a:solidFill>
+                <a:latin typeface="Malgun Gothic" pitchFamily="34" charset="0"/>
+                <a:ea typeface="Malgun Gothic" pitchFamily="34" charset="-122"/>
+                <a:cs typeface="Malgun Gothic" pitchFamily="34" charset="-120"/>
+              </a:rPr>
+              <a:t>막힌 것도 없는데 문 앞에서 실패한 이유</a:t>
+            </a:r>
+            <a:endParaRPr lang="en-US" sz="2800" dirty="0"/>
+          </a:p>
+        </p:txBody>
+      </p:sp>
+      <p:sp>
+        <p:nvSpPr>
+          <p:cNvPr id="4" name="text-141"/>
+          <p:cNvSpPr txBox="1"/>
+          <p:nvPr/>
+        </p:nvSpPr>
+        <p:spPr>
+          <a:xfrm>
+            <a:off x="548640" y="1691640"/>
+            <a:ext cx="2194560" cy="1005840"/>
+          </a:xfrm>
+          <a:prstGeom prst="rect">
+            <a:avLst/>
+          </a:prstGeom>
+          <a:noFill/>
+          <a:ln/>
+        </p:spPr>
+        <p:txBody>
+          <a:bodyPr wrap="square" lIns="0" tIns="0" rIns="0" bIns="0" rtlCol="0" anchor="t"/>
+          <a:lstStyle/>
+          <a:p>
+            <a:pPr indent="0" marL="0">
+              <a:buNone/>
+            </a:pPr>
+            <a:r>
+              <a:rPr lang="en-US" sz="6000" b="1" dirty="0">
+                <a:solidFill>
+                  <a:srgbClr val="D9822B"/>
+                </a:solidFill>
+                <a:latin typeface="Consolas" pitchFamily="34" charset="0"/>
+                <a:ea typeface="Consolas" pitchFamily="34" charset="-122"/>
+                <a:cs typeface="Consolas" pitchFamily="34" charset="-120"/>
+              </a:rPr>
+              <a:t>750</a:t>
+            </a:r>
+            <a:endParaRPr lang="en-US" sz="6000" dirty="0"/>
+          </a:p>
+        </p:txBody>
+      </p:sp>
+      <p:sp>
+        <p:nvSpPr>
+          <p:cNvPr id="5" name="text-142"/>
+          <p:cNvSpPr txBox="1"/>
+          <p:nvPr/>
+        </p:nvSpPr>
+        <p:spPr>
+          <a:xfrm>
+            <a:off x="2788920" y="1828800"/>
+            <a:ext cx="3749040" cy="777240"/>
+          </a:xfrm>
+          <a:prstGeom prst="rect">
+            <a:avLst/>
+          </a:prstGeom>
+          <a:noFill/>
+          <a:ln/>
+        </p:spPr>
+        <p:txBody>
+          <a:bodyPr wrap="square" lIns="0" tIns="0" rIns="0" bIns="0" rtlCol="0" anchor="ctr"/>
+          <a:lstStyle/>
+          <a:p>
+            <a:pPr indent="0" marL="0">
+              <a:buNone/>
+            </a:pPr>
+            <a:r>
+              <a:rPr lang="en-US" sz="1600" dirty="0">
+                <a:solidFill>
+                  <a:srgbClr val="14213D"/>
+                </a:solidFill>
+                <a:latin typeface="Malgun Gothic" pitchFamily="34" charset="0"/>
+                <a:ea typeface="Malgun Gothic" pitchFamily="34" charset="-122"/>
+                <a:cs typeface="Malgun Gothic" pitchFamily="34" charset="-120"/>
+              </a:rPr>
+              <a:t>번의 "detected collision ahead!"</a:t>
+            </a:r>
+            <a:endParaRPr lang="en-US" sz="1600" dirty="0"/>
+          </a:p>
+          <a:p>
+            <a:pPr indent="0" marL="0">
+              <a:buNone/>
+            </a:pPr>
+            <a:r>
+              <a:rPr lang="en-US" sz="1600" dirty="0">
+                <a:solidFill>
+                  <a:srgbClr val="14213D"/>
+                </a:solidFill>
+                <a:latin typeface="Malgun Gothic" pitchFamily="34" charset="0"/>
+                <a:ea typeface="Malgun Gothic" pitchFamily="34" charset="-122"/>
+                <a:cs typeface="Malgun Gothic" pitchFamily="34" charset="-120"/>
+              </a:rPr>
+              <a:t>복구 10회 → error 104</a:t>
+            </a:r>
+            <a:endParaRPr lang="en-US" sz="1600" dirty="0"/>
+          </a:p>
+        </p:txBody>
+      </p:sp>
+      <p:sp>
+        <p:nvSpPr>
+          <p:cNvPr id="6" name="text-143"/>
+          <p:cNvSpPr txBox="1"/>
+          <p:nvPr/>
+        </p:nvSpPr>
+        <p:spPr>
+          <a:xfrm>
+            <a:off x="548640" y="2926080"/>
+            <a:ext cx="6035040" cy="320040"/>
+          </a:xfrm>
+          <a:prstGeom prst="rect">
+            <a:avLst/>
+          </a:prstGeom>
+          <a:noFill/>
+          <a:ln/>
+        </p:spPr>
+        <p:txBody>
+          <a:bodyPr wrap="square" lIns="0" tIns="0" rIns="0" bIns="0" rtlCol="0" anchor="t"/>
+          <a:lstStyle/>
+          <a:p>
+            <a:pPr indent="0" marL="0">
+              <a:buNone/>
+            </a:pPr>
+            <a:r>
+              <a:rPr lang="en-US" sz="1500" b="1" dirty="0">
+                <a:solidFill>
+                  <a:srgbClr val="A85A12"/>
+                </a:solidFill>
+                <a:latin typeface="Malgun Gothic" pitchFamily="34" charset="0"/>
+                <a:ea typeface="Malgun Gothic" pitchFamily="34" charset="-122"/>
+                <a:cs typeface="Malgun Gothic" pitchFamily="34" charset="-120"/>
+              </a:rPr>
+              <a:t>원인</a:t>
+            </a:r>
+            <a:endParaRPr lang="en-US" sz="1500" dirty="0"/>
+          </a:p>
+        </p:txBody>
+      </p:sp>
+      <p:sp>
+        <p:nvSpPr>
+          <p:cNvPr id="7" name="text-144"/>
+          <p:cNvSpPr txBox="1"/>
+          <p:nvPr/>
+        </p:nvSpPr>
+        <p:spPr>
+          <a:xfrm>
+            <a:off x="548640" y="3255264"/>
+            <a:ext cx="6035040" cy="640080"/>
+          </a:xfrm>
+          <a:prstGeom prst="rect">
+            <a:avLst/>
+          </a:prstGeom>
+          <a:noFill/>
+          <a:ln/>
+        </p:spPr>
+        <p:txBody>
+          <a:bodyPr wrap="square" lIns="0" tIns="0" rIns="0" bIns="0" rtlCol="0" anchor="t"/>
+          <a:lstStyle/>
+          <a:p>
+            <a:pPr indent="0" marL="0">
+              <a:lnSpc>
+                <a:spcPct val="120000"/>
+              </a:lnSpc>
+              <a:buNone/>
+            </a:pPr>
+            <a:r>
+              <a:rPr lang="en-US" sz="1300" dirty="0">
+                <a:solidFill>
+                  <a:srgbClr val="4A5568"/>
+                </a:solidFill>
+                <a:latin typeface="Malgun Gothic" pitchFamily="34" charset="0"/>
+                <a:ea typeface="Malgun Gothic" pitchFamily="34" charset="-122"/>
+                <a:cs typeface="Malgun Gothic" pitchFamily="34" charset="-120"/>
+              </a:rPr>
+              <a:t>시뮬 LiDAR 노이즈 σ 0.02 m, costmap 해상도 0.01 m → 문틀 점이 셀 단위로 흔들려 경로와 순간 겹침. 0.3 s 지속만으로 실패</a:t>
+            </a:r>
+            <a:endParaRPr lang="en-US" sz="1300" dirty="0"/>
+          </a:p>
+        </p:txBody>
+      </p:sp>
+      <p:sp>
+        <p:nvSpPr>
+          <p:cNvPr id="8" name="text-145"/>
+          <p:cNvSpPr txBox="1"/>
+          <p:nvPr/>
+        </p:nvSpPr>
+        <p:spPr>
+          <a:xfrm>
+            <a:off x="548640" y="3950208"/>
+            <a:ext cx="6035040" cy="320040"/>
+          </a:xfrm>
+          <a:prstGeom prst="rect">
+            <a:avLst/>
+          </a:prstGeom>
+          <a:noFill/>
+          <a:ln/>
+        </p:spPr>
+        <p:txBody>
+          <a:bodyPr wrap="square" lIns="0" tIns="0" rIns="0" bIns="0" rtlCol="0" anchor="t"/>
+          <a:lstStyle/>
+          <a:p>
+            <a:pPr indent="0" marL="0">
+              <a:buNone/>
+            </a:pPr>
+            <a:r>
+              <a:rPr lang="en-US" sz="1500" b="1" dirty="0">
+                <a:solidFill>
+                  <a:srgbClr val="2E7D4F"/>
+                </a:solidFill>
+                <a:latin typeface="Malgun Gothic" pitchFamily="34" charset="0"/>
+                <a:ea typeface="Malgun Gothic" pitchFamily="34" charset="-122"/>
+                <a:cs typeface="Malgun Gothic" pitchFamily="34" charset="-120"/>
+              </a:rPr>
+              <a:t>조치</a:t>
+            </a:r>
+            <a:endParaRPr lang="en-US" sz="1500" dirty="0"/>
+          </a:p>
+        </p:txBody>
+      </p:sp>
+      <p:sp>
+        <p:nvSpPr>
+          <p:cNvPr id="9" name="text-146"/>
+          <p:cNvSpPr txBox="1"/>
+          <p:nvPr/>
+        </p:nvSpPr>
+        <p:spPr>
+          <a:xfrm>
+            <a:off x="548640" y="4279392"/>
+            <a:ext cx="6035040" cy="640080"/>
+          </a:xfrm>
+          <a:prstGeom prst="rect">
+            <a:avLst/>
+          </a:prstGeom>
+          <a:noFill/>
+          <a:ln/>
+        </p:spPr>
+        <p:txBody>
+          <a:bodyPr wrap="square" lIns="0" tIns="0" rIns="0" bIns="0" rtlCol="0" anchor="t"/>
+          <a:lstStyle/>
+          <a:p>
+            <a:pPr indent="0" marL="0">
+              <a:lnSpc>
+                <a:spcPct val="120000"/>
+              </a:lnSpc>
+              <a:buNone/>
+            </a:pPr>
+            <a:r>
+              <a:rPr lang="en-US" sz="1300" dirty="0">
+                <a:solidFill>
+                  <a:srgbClr val="4A5568"/>
+                </a:solidFill>
+                <a:latin typeface="Malgun Gothic" pitchFamily="34" charset="0"/>
+                <a:ea typeface="Malgun Gothic" pitchFamily="34" charset="-122"/>
+                <a:cs typeface="Malgun Gothic" pitchFamily="34" charset="-120"/>
+              </a:rPr>
+              <a:t>failure_tolerance 1.5 s · 충돌 검사 0.5 s · 104/105/106/0 재시도 3회</a:t>
+            </a:r>
+            <a:endParaRPr lang="en-US" sz="1300" dirty="0"/>
+          </a:p>
+        </p:txBody>
+      </p:sp>
+      <p:sp>
+        <p:nvSpPr>
+          <p:cNvPr id="10" name="text-147"/>
+          <p:cNvSpPr txBox="1"/>
+          <p:nvPr/>
+        </p:nvSpPr>
+        <p:spPr>
+          <a:xfrm>
+            <a:off x="548640" y="4974336"/>
+            <a:ext cx="6035040" cy="320040"/>
+          </a:xfrm>
+          <a:prstGeom prst="rect">
+            <a:avLst/>
+          </a:prstGeom>
+          <a:noFill/>
+          <a:ln/>
+        </p:spPr>
+        <p:txBody>
+          <a:bodyPr wrap="square" lIns="0" tIns="0" rIns="0" bIns="0" rtlCol="0" anchor="t"/>
+          <a:lstStyle/>
+          <a:p>
+            <a:pPr indent="0" marL="0">
+              <a:buNone/>
+            </a:pPr>
+            <a:r>
+              <a:rPr lang="en-US" sz="1500" b="1" dirty="0">
+                <a:solidFill>
+                  <a:srgbClr val="2F6FDB"/>
+                </a:solidFill>
+                <a:latin typeface="Malgun Gothic" pitchFamily="34" charset="0"/>
+                <a:ea typeface="Malgun Gothic" pitchFamily="34" charset="-122"/>
+                <a:cs typeface="Malgun Gothic" pitchFamily="34" charset="-120"/>
+              </a:rPr>
+              <a:t>결과</a:t>
+            </a:r>
+            <a:endParaRPr lang="en-US" sz="1500" dirty="0"/>
+          </a:p>
+        </p:txBody>
+      </p:sp>
+      <p:sp>
+        <p:nvSpPr>
+          <p:cNvPr id="11" name="text-148"/>
+          <p:cNvSpPr txBox="1"/>
+          <p:nvPr/>
+        </p:nvSpPr>
+        <p:spPr>
+          <a:xfrm>
+            <a:off x="548640" y="5303520"/>
+            <a:ext cx="6035040" cy="640080"/>
+          </a:xfrm>
+          <a:prstGeom prst="rect">
+            <a:avLst/>
+          </a:prstGeom>
+          <a:noFill/>
+          <a:ln/>
+        </p:spPr>
+        <p:txBody>
+          <a:bodyPr wrap="square" lIns="0" tIns="0" rIns="0" bIns="0" rtlCol="0" anchor="t"/>
+          <a:lstStyle/>
+          <a:p>
+            <a:pPr indent="0" marL="0">
+              <a:lnSpc>
+                <a:spcPct val="120000"/>
+              </a:lnSpc>
+              <a:buNone/>
+            </a:pPr>
+            <a:r>
+              <a:rPr lang="en-US" sz="1300" dirty="0">
+                <a:solidFill>
+                  <a:srgbClr val="4A5568"/>
+                </a:solidFill>
+                <a:latin typeface="Malgun Gothic" pitchFamily="34" charset="0"/>
+                <a:ea typeface="Malgun Gothic" pitchFamily="34" charset="-122"/>
+                <a:cs typeface="Malgun Gothic" pitchFamily="34" charset="-120"/>
+              </a:rPr>
+              <a:t>"막혀서 실패 → 다시 보냄 (1/3)" 후 도착 확인. Nav2 값 단독 효과는 추가 검증 필요</a:t>
+            </a:r>
+            <a:endParaRPr lang="en-US" sz="1300" dirty="0"/>
+          </a:p>
+        </p:txBody>
+      </p:sp>
+      <p:sp>
+        <p:nvSpPr>
+          <p:cNvPr id="12" name="card-149"/>
+          <p:cNvSpPr/>
+          <p:nvPr/>
+        </p:nvSpPr>
+        <p:spPr>
+          <a:xfrm>
+            <a:off x="6903720" y="1691640"/>
+            <a:ext cx="4736592" cy="4434840"/>
+          </a:xfrm>
+          <a:prstGeom prst="roundRect">
+            <a:avLst>
+              <a:gd name="adj" fmla="val 2474"/>
+            </a:avLst>
+          </a:prstGeom>
+          <a:solidFill>
+            <a:srgbClr val="1B2333"/>
+          </a:solidFill>
+          <a:ln w="9525">
+            <a:solidFill>
+              <a:srgbClr val="1B2333"/>
+            </a:solidFill>
+            <a:prstDash val="solid"/>
+          </a:ln>
+        </p:spPr>
+      </p:sp>
+      <p:pic>
+        <p:nvPicPr>
+          <p:cNvPr id="13" name="door-shot" descr="관제 화면 캡처: 문 안의 robot2가 장애물 없이 복구 10회를 기록한 상태">    </p:cNvPr>
+          <p:cNvPicPr>
+            <a:picLocks noChangeAspect="1"/>
+          </p:cNvPicPr>
+          <p:nvPr/>
+        </p:nvPicPr>
+        <p:blipFill>
+          <a:blip r:embed="rId1"/>
+          <a:stretch>
+            <a:fillRect/>
+          </a:stretch>
+        </p:blipFill>
+        <p:spPr>
+          <a:xfrm>
+            <a:off x="7086600" y="1828800"/>
+            <a:ext cx="4224528" cy="4169664"/>
+          </a:xfrm>
+          <a:prstGeom prst="rect">
+            <a:avLst/>
+          </a:prstGeom>
+        </p:spPr>
+      </p:pic>
+      <p:sp>
+        <p:nvSpPr>
+          <p:cNvPr id="25" name="Slide Number Placeholder 0"/>
+          <p:cNvSpPr>
+            <a:spLocks noGrp="1"/>
+          </p:cNvSpPr>
+          <p:nvPr>
+            <p:ph type="sldNum" sz="quarter" idx="4294967295"/>
+          </p:nvPr>
+        </p:nvSpPr>
+        <p:spPr>
+          <a:xfrm>
+            <a:off x="11183112" y="6355080"/>
+            <a:ext cx="457200" cy="274320"/>
+          </a:xfrm>
+          <a:prstGeom prst="rect">
+            <a:avLst/>
+          </a:prstGeom>
+          <a:extLst>
+            <a:ext uri="{C572A759-6A51-4108-AA02-DFA0A04FC94B}">
+              <ma14:wrappingTextBoxFlag xmlns:ma14="http://schemas.microsoft.com/office/mac/drawingml/2011/main" val="0"/>
+            </a:ext>
+          </a:extLst>
+        </p:spPr>
+        <p:txBody>
+          <a:bodyPr/>
+          <a:lstStyle>
+            <a:lvl1pPr>
+              <a:defRPr sz="1000">
+                <a:solidFill>
+                  <a:srgbClr val="8A94A6"/>
+                </a:solidFill>
+                <a:latin typeface="Malgun Gothic"/>
+                <a:ea typeface="Malgun Gothic"/>
+                <a:cs typeface="Malgun Gothic"/>
+              </a:defRPr>
+            </a:lvl1pPr>
+          </a:lstStyle>
+          <a:p>
+            <a:pPr algn="r"/>
+            <a:fld id="{F7021451-1387-4CA6-816F-3879F97B5CBC}" type="slidenum">
+              <a:rPr b="0" lang="en-US"/>
+              <a:t>14</a:t>
+            </a:fld>
+            <a:endParaRPr lang="en-US"/>
+          </a:p>
+        </p:txBody>
+      </p:sp>
+    </p:spTree>
+  </p:cSld>
+  <p:clrMapOvr>
+    <a:masterClrMapping/>
+  </p:clrMapOvr>
+</p:sld>
+</file>
+
+<file path=ppt/slides/slide15.xml><?xml version="1.0" encoding="utf-8"?>
+<p:sld xmlns:a="http://schemas.openxmlformats.org/drawingml/2006/main" xmlns:r="http://schemas.openxmlformats.org/officeDocument/2006/relationships" xmlns:p="http://schemas.openxmlformats.org/presentationml/2006/main">
+  <p:cSld name="Slide 15">
     <p:spTree>
       <p:nvGrpSpPr>
         <p:cNvPr id="1" name=""/>
@@ -7280,7 +9941,7 @@
       </p:sp>
       <p:graphicFrame>
         <p:nvGraphicFramePr>
-          <p:cNvPr id="14" name="table-137"/>
+          <p:cNvPr id="16" name="table-150"/>
           <p:cNvGraphicFramePr>
             <a:graphicFrameLocks noGrp="1"/>
           </p:cNvGraphicFramePr>
@@ -9230,7 +11891,7 @@
       </p:graphicFrame>
       <p:sp>
         <p:nvSpPr>
-          <p:cNvPr id="5" name="card-138"/>
+          <p:cNvPr id="5" name="card-151"/>
           <p:cNvSpPr/>
           <p:nvPr/>
         </p:nvSpPr>
@@ -9257,7 +11918,7 @@
       </p:sp>
       <p:sp>
         <p:nvSpPr>
-          <p:cNvPr id="6" name="text-139"/>
+          <p:cNvPr id="6" name="text-152"/>
           <p:cNvSpPr txBox="1"/>
           <p:nvPr/>
         </p:nvSpPr>
@@ -9296,7 +11957,7 @@
       </p:sp>
       <p:sp>
         <p:nvSpPr>
-          <p:cNvPr id="7" name="text-140"/>
+          <p:cNvPr id="7" name="text-153"/>
           <p:cNvSpPr txBox="1"/>
           <p:nvPr/>
         </p:nvSpPr>
@@ -9335,7 +11996,7 @@
       </p:sp>
       <p:sp>
         <p:nvSpPr>
-          <p:cNvPr id="8" name="text-141"/>
+          <p:cNvPr id="8" name="text-154"/>
           <p:cNvSpPr txBox="1"/>
           <p:nvPr/>
         </p:nvSpPr>
@@ -9417,7 +12078,7 @@
             <a:pPr algn="r"/>
             <a:fld id="{F7021451-1387-4CA6-816F-3879F97B5CBC}" type="slidenum">
               <a:rPr b="0" lang="en-US"/>
-              <a:t>13</a:t>
+              <a:t>15</a:t>
             </a:fld>
             <a:endParaRPr lang="en-US"/>
           </a:p>
@@ -9431,9 +12092,9 @@
 </p:sld>
 </file>
 
-<file path=ppt/slides/slide14.xml><?xml version="1.0" encoding="utf-8"?>
+<file path=ppt/slides/slide16.xml><?xml version="1.0" encoding="utf-8"?>
 <p:sld xmlns:a="http://schemas.openxmlformats.org/drawingml/2006/main" xmlns:r="http://schemas.openxmlformats.org/officeDocument/2006/relationships" xmlns:p="http://schemas.openxmlformats.org/presentationml/2006/main">
-  <p:cSld name="Slide 14">
+  <p:cSld name="Slide 16">
     <p:spTree>
       <p:nvGrpSpPr>
         <p:cNvPr id="1" name=""/>
@@ -9532,7 +12193,7 @@
       </p:sp>
       <p:sp>
         <p:nvSpPr>
-          <p:cNvPr id="4" name="card-142"/>
+          <p:cNvPr id="4" name="card-155"/>
           <p:cNvSpPr/>
           <p:nvPr/>
         </p:nvSpPr>
@@ -9559,7 +12220,7 @@
       </p:sp>
       <p:sp>
         <p:nvSpPr>
-          <p:cNvPr id="5" name="text-143"/>
+          <p:cNvPr id="5" name="text-156"/>
           <p:cNvSpPr txBox="1"/>
           <p:nvPr/>
         </p:nvSpPr>
@@ -9598,7 +12259,7 @@
       </p:sp>
       <p:sp>
         <p:nvSpPr>
-          <p:cNvPr id="6" name="text-144"/>
+          <p:cNvPr id="6" name="text-157"/>
           <p:cNvSpPr txBox="1"/>
           <p:nvPr/>
         </p:nvSpPr>
@@ -9640,7 +12301,7 @@
       </p:sp>
       <p:sp>
         <p:nvSpPr>
-          <p:cNvPr id="7" name="text-145"/>
+          <p:cNvPr id="7" name="text-158"/>
           <p:cNvSpPr txBox="1"/>
           <p:nvPr/>
         </p:nvSpPr>
@@ -9679,7 +12340,7 @@
       </p:sp>
       <p:sp>
         <p:nvSpPr>
-          <p:cNvPr id="8" name="card-146"/>
+          <p:cNvPr id="8" name="card-159"/>
           <p:cNvSpPr/>
           <p:nvPr/>
         </p:nvSpPr>
@@ -9706,7 +12367,7 @@
       </p:sp>
       <p:sp>
         <p:nvSpPr>
-          <p:cNvPr id="9" name="text-147"/>
+          <p:cNvPr id="9" name="text-160"/>
           <p:cNvSpPr txBox="1"/>
           <p:nvPr/>
         </p:nvSpPr>
@@ -9745,7 +12406,7 @@
       </p:sp>
       <p:sp>
         <p:nvSpPr>
-          <p:cNvPr id="10" name="text-148"/>
+          <p:cNvPr id="10" name="text-161"/>
           <p:cNvSpPr txBox="1"/>
           <p:nvPr/>
         </p:nvSpPr>
@@ -9787,7 +12448,7 @@
       </p:sp>
       <p:sp>
         <p:nvSpPr>
-          <p:cNvPr id="11" name="text-149"/>
+          <p:cNvPr id="11" name="text-162"/>
           <p:cNvSpPr txBox="1"/>
           <p:nvPr/>
         </p:nvSpPr>
@@ -9826,7 +12487,7 @@
       </p:sp>
       <p:sp>
         <p:nvSpPr>
-          <p:cNvPr id="12" name="card-150"/>
+          <p:cNvPr id="12" name="card-163"/>
           <p:cNvSpPr/>
           <p:nvPr/>
         </p:nvSpPr>
@@ -9853,7 +12514,7 @@
       </p:sp>
       <p:sp>
         <p:nvSpPr>
-          <p:cNvPr id="13" name="text-151"/>
+          <p:cNvPr id="13" name="text-164"/>
           <p:cNvSpPr txBox="1"/>
           <p:nvPr/>
         </p:nvSpPr>
@@ -9892,7 +12553,7 @@
       </p:sp>
       <p:sp>
         <p:nvSpPr>
-          <p:cNvPr id="14" name="text-152"/>
+          <p:cNvPr id="14" name="text-165"/>
           <p:cNvSpPr txBox="1"/>
           <p:nvPr/>
         </p:nvSpPr>
@@ -9934,7 +12595,7 @@
       </p:sp>
       <p:sp>
         <p:nvSpPr>
-          <p:cNvPr id="15" name="text-153"/>
+          <p:cNvPr id="15" name="text-166"/>
           <p:cNvSpPr txBox="1"/>
           <p:nvPr/>
         </p:nvSpPr>
@@ -9973,7 +12634,7 @@
       </p:sp>
       <p:sp>
         <p:nvSpPr>
-          <p:cNvPr id="16" name="card-154"/>
+          <p:cNvPr id="16" name="card-167"/>
           <p:cNvSpPr/>
           <p:nvPr/>
         </p:nvSpPr>
@@ -10000,7 +12661,7 @@
       </p:sp>
       <p:sp>
         <p:nvSpPr>
-          <p:cNvPr id="17" name="text-155"/>
+          <p:cNvPr id="17" name="text-168"/>
           <p:cNvSpPr txBox="1"/>
           <p:nvPr/>
         </p:nvSpPr>
@@ -10039,7 +12700,7 @@
       </p:sp>
       <p:sp>
         <p:nvSpPr>
-          <p:cNvPr id="18" name="text-156"/>
+          <p:cNvPr id="18" name="text-169"/>
           <p:cNvSpPr txBox="1"/>
           <p:nvPr/>
         </p:nvSpPr>
@@ -10081,7 +12742,7 @@
       </p:sp>
       <p:sp>
         <p:nvSpPr>
-          <p:cNvPr id="19" name="text-157"/>
+          <p:cNvPr id="19" name="text-170"/>
           <p:cNvSpPr txBox="1"/>
           <p:nvPr/>
         </p:nvSpPr>
@@ -10160,7 +12821,7 @@
             <a:pPr algn="r"/>
             <a:fld id="{F7021451-1387-4CA6-816F-3879F97B5CBC}" type="slidenum">
               <a:rPr b="0" lang="en-US"/>
-              <a:t>14</a:t>
+              <a:t>16</a:t>
             </a:fld>
             <a:endParaRPr lang="en-US"/>
           </a:p>
@@ -10174,9 +12835,9 @@
 </p:sld>
 </file>
 
-<file path=ppt/slides/slide15.xml><?xml version="1.0" encoding="utf-8"?>
+<file path=ppt/slides/slide17.xml><?xml version="1.0" encoding="utf-8"?>
 <p:sld xmlns:a="http://schemas.openxmlformats.org/drawingml/2006/main" xmlns:r="http://schemas.openxmlformats.org/officeDocument/2006/relationships" xmlns:p="http://schemas.openxmlformats.org/presentationml/2006/main">
-  <p:cSld name="Slide 15">
+  <p:cSld name="Slide 17">
     <p:spTree>
       <p:nvGrpSpPr>
         <p:cNvPr id="1" name=""/>
@@ -10275,7 +12936,7 @@
       </p:sp>
       <p:graphicFrame>
         <p:nvGraphicFramePr>
-          <p:cNvPr id="16" name="table-158"/>
+          <p:cNvPr id="18" name="table-171"/>
           <p:cNvGraphicFramePr>
             <a:graphicFrameLocks noGrp="1"/>
           </p:cNvGraphicFramePr>
@@ -11788,7 +14449,7 @@
             <a:pPr algn="r"/>
             <a:fld id="{F7021451-1387-4CA6-816F-3879F97B5CBC}" type="slidenum">
               <a:rPr b="0" lang="en-US"/>
-              <a:t>15</a:t>
+              <a:t>17</a:t>
             </a:fld>
             <a:endParaRPr lang="en-US"/>
           </a:p>
@@ -11802,9 +14463,9 @@
 </p:sld>
 </file>
 
-<file path=ppt/slides/slide16.xml><?xml version="1.0" encoding="utf-8"?>
+<file path=ppt/slides/slide18.xml><?xml version="1.0" encoding="utf-8"?>
 <p:sld xmlns:a="http://schemas.openxmlformats.org/drawingml/2006/main" xmlns:r="http://schemas.openxmlformats.org/officeDocument/2006/relationships" xmlns:p="http://schemas.openxmlformats.org/presentationml/2006/main">
-  <p:cSld name="Slide 16">
+  <p:cSld name="Slide 18">
     <p:spTree>
       <p:nvGrpSpPr>
         <p:cNvPr id="1" name=""/>
@@ -11821,7 +14482,7 @@
       </p:grpSpPr>
       <p:sp>
         <p:nvSpPr>
-          <p:cNvPr id="2" name="text-159"/>
+          <p:cNvPr id="2" name="text-172"/>
           <p:cNvSpPr txBox="1"/>
           <p:nvPr/>
         </p:nvSpPr>
@@ -11860,7 +14521,7 @@
       </p:sp>
       <p:sp>
         <p:nvSpPr>
-          <p:cNvPr id="3" name="text-160"/>
+          <p:cNvPr id="3" name="text-173"/>
           <p:cNvSpPr txBox="1"/>
           <p:nvPr/>
         </p:nvSpPr>
@@ -11939,7 +14600,7 @@
       </p:sp>
       <p:sp>
         <p:nvSpPr>
-          <p:cNvPr id="4" name="text-161"/>
+          <p:cNvPr id="4" name="text-174"/>
           <p:cNvSpPr txBox="1"/>
           <p:nvPr/>
         </p:nvSpPr>
@@ -11978,7 +14639,7 @@
       </p:sp>
       <p:sp>
         <p:nvSpPr>
-          <p:cNvPr id="5" name="text-162"/>
+          <p:cNvPr id="5" name="text-175"/>
           <p:cNvSpPr txBox="1"/>
           <p:nvPr/>
         </p:nvSpPr>
@@ -12017,7 +14678,7 @@
       </p:sp>
       <p:sp>
         <p:nvSpPr>
-          <p:cNvPr id="6" name="text-163"/>
+          <p:cNvPr id="6" name="text-176"/>
           <p:cNvSpPr txBox="1"/>
           <p:nvPr/>
         </p:nvSpPr>
@@ -12056,7 +14717,7 @@
       </p:sp>
       <p:sp>
         <p:nvSpPr>
-          <p:cNvPr id="7" name="text-164"/>
+          <p:cNvPr id="7" name="text-177"/>
           <p:cNvSpPr txBox="1"/>
           <p:nvPr/>
         </p:nvSpPr>
@@ -12095,7 +14756,7 @@
       </p:sp>
       <p:sp>
         <p:nvSpPr>
-          <p:cNvPr id="8" name="text-165"/>
+          <p:cNvPr id="8" name="text-178"/>
           <p:cNvSpPr txBox="1"/>
           <p:nvPr/>
         </p:nvSpPr>
@@ -12134,7 +14795,7 @@
       </p:sp>
       <p:sp>
         <p:nvSpPr>
-          <p:cNvPr id="9" name="text-166"/>
+          <p:cNvPr id="9" name="text-179"/>
           <p:cNvSpPr txBox="1"/>
           <p:nvPr/>
         </p:nvSpPr>
@@ -12173,7 +14834,7 @@
       </p:sp>
       <p:sp>
         <p:nvSpPr>
-          <p:cNvPr id="10" name="text-167"/>
+          <p:cNvPr id="10" name="text-180"/>
           <p:cNvSpPr txBox="1"/>
           <p:nvPr/>
         </p:nvSpPr>
@@ -16485,7 +19146,7 @@
                 <a:ea typeface="Consolas" pitchFamily="34" charset="-122"/>
                 <a:cs typeface="Consolas" pitchFamily="34" charset="-120"/>
               </a:rPr>
-              <a:t>02 · 관제 프로세스 내부</a:t>
+              <a:t>02 · 실물 미들웨어</a:t>
             </a:r>
             <a:endParaRPr lang="en-US" sz="1200" dirty="0"/>
           </a:p>
@@ -16526,7 +19187,7 @@
                 <a:ea typeface="Malgun Gothic" pitchFamily="34" charset="-122"/>
                 <a:cs typeface="Malgun Gothic" pitchFamily="34" charset="-120"/>
               </a:rPr>
-              <a:t>판단은 순수 Python, ROS 입출력은 한 곳에</a:t>
+              <a:t>멀티캐스트가 막힌 AP 위에서 Cyclone DDS 유니캐스트</a:t>
             </a:r>
             <a:endParaRPr lang="en-US" sz="2800" dirty="0"/>
           </a:p>
@@ -16541,19 +19202,19 @@
         <p:spPr>
           <a:xfrm>
             <a:off x="548640" y="1737360"/>
-            <a:ext cx="3520440" cy="1234440"/>
+            <a:ext cx="6675120" cy="4343400"/>
           </a:xfrm>
           <a:prstGeom prst="roundRect">
             <a:avLst>
-              <a:gd name="adj" fmla="val 8889"/>
+              <a:gd name="adj" fmla="val 2526"/>
             </a:avLst>
           </a:prstGeom>
           <a:solidFill>
-            <a:srgbClr val="F3F5F8"/>
+            <a:srgbClr val="14213D"/>
           </a:solidFill>
           <a:ln w="9525">
             <a:solidFill>
-              <a:srgbClr val="F3F5F8"/>
+              <a:srgbClr val="14213D"/>
             </a:solidFill>
             <a:prstDash val="solid"/>
           </a:ln>
@@ -16567,8 +19228,8 @@
         </p:nvSpPr>
         <p:spPr>
           <a:xfrm>
-            <a:off x="822960" y="1920240"/>
-            <a:ext cx="3017520" cy="347472"/>
+            <a:off x="868680" y="2011680"/>
+            <a:ext cx="6035040" cy="3794760"/>
           </a:xfrm>
           <a:prstGeom prst="rect">
             <a:avLst/>
@@ -16581,20 +19242,272 @@
           <a:lstStyle/>
           <a:p>
             <a:pPr indent="0" marL="0">
+              <a:lnSpc>
+                <a:spcPct val="125000"/>
+              </a:lnSpc>
               <a:buNone/>
             </a:pPr>
             <a:r>
-              <a:rPr lang="en-US" sz="1500" b="1" dirty="0">
+              <a:rPr lang="en-US" sz="1300" dirty="0">
                 <a:solidFill>
-                  <a:srgbClr val="2E7D4F"/>
+                  <a:srgbClr val="8A94A6"/>
                 </a:solidFill>
                 <a:latin typeface="Consolas" pitchFamily="34" charset="0"/>
                 <a:ea typeface="Consolas" pitchFamily="34" charset="-122"/>
                 <a:cs typeface="Consolas" pitchFamily="34" charset="-120"/>
               </a:rPr>
-              <a:t>robot.py</a:t>
+              <a:t>&lt;!-- ~/.ros/cyclonedds_pc.xml --&gt;</a:t>
             </a:r>
-            <a:endParaRPr lang="en-US" sz="1500" dirty="0"/>
+            <a:endParaRPr lang="en-US" sz="1300" dirty="0"/>
+          </a:p>
+          <a:p>
+            <a:pPr indent="0" marL="0">
+              <a:lnSpc>
+                <a:spcPct val="125000"/>
+              </a:lnSpc>
+              <a:buNone/>
+            </a:pPr>
+            <a:r>
+              <a:rPr lang="en-US" sz="1300" dirty="0">
+                <a:solidFill>
+                  <a:srgbClr val="FFFFFF"/>
+                </a:solidFill>
+                <a:latin typeface="Consolas" pitchFamily="34" charset="0"/>
+                <a:ea typeface="Consolas" pitchFamily="34" charset="-122"/>
+                <a:cs typeface="Consolas" pitchFamily="34" charset="-120"/>
+              </a:rPr>
+              <a:t>&lt;NetworkInterface name="wlo1" multicast="false"/&gt;</a:t>
+            </a:r>
+            <a:endParaRPr lang="en-US" sz="1300" dirty="0"/>
+          </a:p>
+          <a:p>
+            <a:pPr indent="0" marL="0">
+              <a:lnSpc>
+                <a:spcPct val="125000"/>
+              </a:lnSpc>
+              <a:buNone/>
+            </a:pPr>
+            <a:r>
+              <a:rPr lang="en-US" sz="1300" dirty="0">
+                <a:solidFill>
+                  <a:srgbClr val="FFFFFF"/>
+                </a:solidFill>
+                <a:latin typeface="Consolas" pitchFamily="34" charset="0"/>
+                <a:ea typeface="Consolas" pitchFamily="34" charset="-122"/>
+                <a:cs typeface="Consolas" pitchFamily="34" charset="-120"/>
+              </a:rPr>
+              <a:t>&lt;AllowMulticast&gt;false&lt;/AllowMulticast&gt;</a:t>
+            </a:r>
+            <a:endParaRPr lang="en-US" sz="1300" dirty="0"/>
+          </a:p>
+          <a:p>
+            <a:pPr indent="0" marL="0">
+              <a:lnSpc>
+                <a:spcPct val="125000"/>
+              </a:lnSpc>
+              <a:buNone/>
+            </a:pPr>
+            <a:r>
+              <a:rPr lang="en-US" sz="1300" dirty="0">
+                <a:solidFill>
+                  <a:srgbClr val="FFFFFF"/>
+                </a:solidFill>
+                <a:latin typeface="Consolas" pitchFamily="34" charset="0"/>
+                <a:ea typeface="Consolas" pitchFamily="34" charset="-122"/>
+                <a:cs typeface="Consolas" pitchFamily="34" charset="-120"/>
+              </a:rPr>
+              <a:t>&lt;ParticipantIndex&gt;auto&lt;/ParticipantIndex&gt;</a:t>
+            </a:r>
+            <a:endParaRPr lang="en-US" sz="1300" dirty="0"/>
+          </a:p>
+          <a:p>
+            <a:pPr indent="0" marL="0">
+              <a:lnSpc>
+                <a:spcPct val="125000"/>
+              </a:lnSpc>
+              <a:buNone/>
+            </a:pPr>
+            <a:r>
+              <a:rPr lang="en-US" sz="1300" dirty="0">
+                <a:solidFill>
+                  <a:srgbClr val="F2A65A"/>
+                </a:solidFill>
+                <a:latin typeface="Consolas" pitchFamily="34" charset="0"/>
+                <a:ea typeface="Consolas" pitchFamily="34" charset="-122"/>
+                <a:cs typeface="Consolas" pitchFamily="34" charset="-120"/>
+              </a:rPr>
+              <a:t>&lt;MaxAutoParticipantIndex&gt;50&lt;/MaxAutoParticipantIndex&gt;</a:t>
+            </a:r>
+            <a:endParaRPr lang="en-US" sz="1300" dirty="0"/>
+          </a:p>
+          <a:p>
+            <a:pPr indent="0" marL="0">
+              <a:lnSpc>
+                <a:spcPct val="125000"/>
+              </a:lnSpc>
+              <a:buNone/>
+            </a:pPr>
+            <a:r>
+              <a:rPr lang="en-US" sz="1300" dirty="0">
+                <a:solidFill>
+                  <a:srgbClr val="FFFFFF"/>
+                </a:solidFill>
+                <a:latin typeface="Consolas" pitchFamily="34" charset="0"/>
+                <a:ea typeface="Consolas" pitchFamily="34" charset="-122"/>
+                <a:cs typeface="Consolas" pitchFamily="34" charset="-120"/>
+              </a:rPr>
+              <a:t>&lt;Peers&gt;</a:t>
+            </a:r>
+            <a:endParaRPr lang="en-US" sz="1300" dirty="0"/>
+          </a:p>
+          <a:p>
+            <a:pPr indent="0" marL="0">
+              <a:lnSpc>
+                <a:spcPct val="125000"/>
+              </a:lnSpc>
+              <a:buNone/>
+            </a:pPr>
+            <a:r>
+              <a:rPr lang="en-US" sz="1300" dirty="0">
+                <a:solidFill>
+                  <a:srgbClr val="8FB3F0"/>
+                </a:solidFill>
+                <a:latin typeface="Consolas" pitchFamily="34" charset="0"/>
+                <a:ea typeface="Consolas" pitchFamily="34" charset="-122"/>
+                <a:cs typeface="Consolas" pitchFamily="34" charset="-120"/>
+              </a:rPr>
+              <a:t>  &lt;Peer Address="192.168.0.6"/&gt;  &lt;!-- robot1 --&gt;</a:t>
+            </a:r>
+            <a:endParaRPr lang="en-US" sz="1300" dirty="0"/>
+          </a:p>
+          <a:p>
+            <a:pPr indent="0" marL="0">
+              <a:lnSpc>
+                <a:spcPct val="125000"/>
+              </a:lnSpc>
+              <a:buNone/>
+            </a:pPr>
+            <a:r>
+              <a:rPr lang="en-US" sz="1300" dirty="0">
+                <a:solidFill>
+                  <a:srgbClr val="8FB3F0"/>
+                </a:solidFill>
+                <a:latin typeface="Consolas" pitchFamily="34" charset="0"/>
+                <a:ea typeface="Consolas" pitchFamily="34" charset="-122"/>
+                <a:cs typeface="Consolas" pitchFamily="34" charset="-120"/>
+              </a:rPr>
+              <a:t>  &lt;Peer Address="192.168.0.8"/&gt;  &lt;!-- robot2 --&gt;</a:t>
+            </a:r>
+            <a:endParaRPr lang="en-US" sz="1300" dirty="0"/>
+          </a:p>
+          <a:p>
+            <a:pPr indent="0" marL="0">
+              <a:lnSpc>
+                <a:spcPct val="125000"/>
+              </a:lnSpc>
+              <a:buNone/>
+            </a:pPr>
+            <a:r>
+              <a:rPr lang="en-US" sz="1300" dirty="0">
+                <a:solidFill>
+                  <a:srgbClr val="8FB3F0"/>
+                </a:solidFill>
+                <a:latin typeface="Consolas" pitchFamily="34" charset="0"/>
+                <a:ea typeface="Consolas" pitchFamily="34" charset="-122"/>
+                <a:cs typeface="Consolas" pitchFamily="34" charset="-120"/>
+              </a:rPr>
+              <a:t>  &lt;Peer Address="192.168.0.4"/&gt;  &lt;!-- 관제 PC --&gt;</a:t>
+            </a:r>
+            <a:endParaRPr lang="en-US" sz="1300" dirty="0"/>
+          </a:p>
+          <a:p>
+            <a:pPr indent="0" marL="0">
+              <a:lnSpc>
+                <a:spcPct val="125000"/>
+              </a:lnSpc>
+              <a:buNone/>
+            </a:pPr>
+            <a:r>
+              <a:rPr lang="en-US" sz="1300" dirty="0">
+                <a:solidFill>
+                  <a:srgbClr val="FFFFFF"/>
+                </a:solidFill>
+                <a:latin typeface="Consolas" pitchFamily="34" charset="0"/>
+                <a:ea typeface="Consolas" pitchFamily="34" charset="-122"/>
+                <a:cs typeface="Consolas" pitchFamily="34" charset="-120"/>
+              </a:rPr>
+              <a:t>&lt;/Peers&gt;</a:t>
+            </a:r>
+            <a:endParaRPr lang="en-US" sz="1300" dirty="0"/>
+          </a:p>
+          <a:p>
+            <a:pPr indent="0" marL="0">
+              <a:lnSpc>
+                <a:spcPct val="125000"/>
+              </a:lnSpc>
+              <a:buNone/>
+            </a:pPr>
+            <a:endParaRPr lang="en-US" sz="1300" dirty="0"/>
+          </a:p>
+          <a:p>
+            <a:pPr indent="0" marL="0">
+              <a:lnSpc>
+                <a:spcPct val="125000"/>
+              </a:lnSpc>
+              <a:buNone/>
+            </a:pPr>
+            <a:r>
+              <a:rPr lang="en-US" sz="1300" dirty="0">
+                <a:solidFill>
+                  <a:srgbClr val="8A94A6"/>
+                </a:solidFill>
+                <a:latin typeface="Consolas" pitchFamily="34" charset="0"/>
+                <a:ea typeface="Consolas" pitchFamily="34" charset="-122"/>
+                <a:cs typeface="Consolas" pitchFamily="34" charset="-120"/>
+              </a:rPr>
+              <a:t># ~/.bashrc</a:t>
+            </a:r>
+            <a:endParaRPr lang="en-US" sz="1300" dirty="0"/>
+          </a:p>
+          <a:p>
+            <a:pPr indent="0" marL="0">
+              <a:lnSpc>
+                <a:spcPct val="125000"/>
+              </a:lnSpc>
+              <a:buNone/>
+            </a:pPr>
+            <a:r>
+              <a:rPr lang="en-US" sz="1300" dirty="0">
+                <a:solidFill>
+                  <a:srgbClr val="FFFFFF"/>
+                </a:solidFill>
+                <a:latin typeface="Consolas" pitchFamily="34" charset="0"/>
+                <a:ea typeface="Consolas" pitchFamily="34" charset="-122"/>
+                <a:cs typeface="Consolas" pitchFamily="34" charset="-120"/>
+              </a:rPr>
+              <a:t>export RMW_IMPLEMENTATION=rmw_cyclonedds_cpp</a:t>
+            </a:r>
+            <a:endParaRPr lang="en-US" sz="1300" dirty="0"/>
+          </a:p>
+          <a:p>
+            <a:pPr indent="0" marL="0">
+              <a:lnSpc>
+                <a:spcPct val="125000"/>
+              </a:lnSpc>
+              <a:buNone/>
+            </a:pPr>
+            <a:r>
+              <a:rPr lang="en-US" sz="1300" dirty="0">
+                <a:solidFill>
+                  <a:srgbClr val="FFFFFF"/>
+                </a:solidFill>
+                <a:latin typeface="Consolas" pitchFamily="34" charset="0"/>
+                <a:ea typeface="Consolas" pitchFamily="34" charset="-122"/>
+                <a:cs typeface="Consolas" pitchFamily="34" charset="-120"/>
+              </a:rPr>
+              <a:t>export CYCLONEDDS_URI=$HOME/.ros/cyclonedds_pc.xml</a:t>
+            </a:r>
+            <a:endParaRPr lang="en-US" sz="1300" dirty="0"/>
           </a:p>
         </p:txBody>
       </p:sp>
@@ -16606,8 +19519,47 @@
         </p:nvSpPr>
         <p:spPr>
           <a:xfrm>
-            <a:off x="822960" y="2304288"/>
-            <a:ext cx="3017520" cy="566928"/>
+            <a:off x="7498080" y="1737360"/>
+            <a:ext cx="4142232" cy="347472"/>
+          </a:xfrm>
+          <a:prstGeom prst="rect">
+            <a:avLst/>
+          </a:prstGeom>
+          <a:noFill/>
+          <a:ln/>
+        </p:spPr>
+        <p:txBody>
+          <a:bodyPr wrap="square" lIns="0" tIns="0" rIns="0" bIns="0" rtlCol="0" anchor="t"/>
+          <a:lstStyle/>
+          <a:p>
+            <a:pPr indent="0" marL="0">
+              <a:buNone/>
+            </a:pPr>
+            <a:r>
+              <a:rPr lang="en-US" sz="1600" b="1" dirty="0">
+                <a:solidFill>
+                  <a:srgbClr val="14213D"/>
+                </a:solidFill>
+                <a:latin typeface="Malgun Gothic" pitchFamily="34" charset="0"/>
+                <a:ea typeface="Malgun Gothic" pitchFamily="34" charset="-122"/>
+                <a:cs typeface="Malgun Gothic" pitchFamily="34" charset="-120"/>
+              </a:rPr>
+              <a:t>멀티캐스트 끄고 peer 명시</a:t>
+            </a:r>
+            <a:endParaRPr lang="en-US" sz="1600" dirty="0"/>
+          </a:p>
+        </p:txBody>
+      </p:sp>
+      <p:sp>
+        <p:nvSpPr>
+          <p:cNvPr id="7" name="text-52"/>
+          <p:cNvSpPr txBox="1"/>
+          <p:nvPr/>
+        </p:nvSpPr>
+        <p:spPr>
+          <a:xfrm>
+            <a:off x="7498080" y="2103120"/>
+            <a:ext cx="4142232" cy="685800"/>
           </a:xfrm>
           <a:prstGeom prst="rect">
             <a:avLst/>
@@ -16634,38 +19586,11 @@
                 <a:ea typeface="Malgun Gothic" pitchFamily="34" charset="-122"/>
                 <a:cs typeface="Malgun Gothic" pitchFamily="34" charset="-120"/>
               </a:rPr>
-              <a:t>로봇 1대의 ROS 인터페이스. 액션·구독·서비스 전부</a:t>
+              <a:t>AP가 SPDP 멀티캐스트를 차단 → 로봇 2대와 PC를 유니캐스트 peer로 직접 지정</a:t>
             </a:r>
             <a:endParaRPr lang="en-US" sz="1300" dirty="0"/>
           </a:p>
         </p:txBody>
-      </p:sp>
-      <p:sp>
-        <p:nvSpPr>
-          <p:cNvPr id="7" name="card-52"/>
-          <p:cNvSpPr/>
-          <p:nvPr/>
-        </p:nvSpPr>
-        <p:spPr>
-          <a:xfrm>
-            <a:off x="4251960" y="1737360"/>
-            <a:ext cx="3520440" cy="1234440"/>
-          </a:xfrm>
-          <a:prstGeom prst="roundRect">
-            <a:avLst>
-              <a:gd name="adj" fmla="val 8889"/>
-            </a:avLst>
-          </a:prstGeom>
-          <a:solidFill>
-            <a:srgbClr val="F3F5F8"/>
-          </a:solidFill>
-          <a:ln w="9525">
-            <a:solidFill>
-              <a:srgbClr val="F3F5F8"/>
-            </a:solidFill>
-            <a:prstDash val="solid"/>
-          </a:ln>
-        </p:spPr>
       </p:sp>
       <p:sp>
         <p:nvSpPr>
@@ -16675,8 +19600,8 @@
         </p:nvSpPr>
         <p:spPr>
           <a:xfrm>
-            <a:off x="4526280" y="1920240"/>
-            <a:ext cx="3017520" cy="347472"/>
+            <a:off x="7498080" y="2834640"/>
+            <a:ext cx="4142232" cy="347472"/>
           </a:xfrm>
           <a:prstGeom prst="rect">
             <a:avLst/>
@@ -16692,17 +19617,17 @@
               <a:buNone/>
             </a:pPr>
             <a:r>
-              <a:rPr lang="en-US" sz="1500" b="1" dirty="0">
+              <a:rPr lang="en-US" sz="1600" b="1" dirty="0">
                 <a:solidFill>
-                  <a:srgbClr val="2E7D4F"/>
+                  <a:srgbClr val="14213D"/>
                 </a:solidFill>
-                <a:latin typeface="Consolas" pitchFamily="34" charset="0"/>
-                <a:ea typeface="Consolas" pitchFamily="34" charset="-122"/>
-                <a:cs typeface="Consolas" pitchFamily="34" charset="-120"/>
+                <a:latin typeface="Malgun Gothic" pitchFamily="34" charset="0"/>
+                <a:ea typeface="Malgun Gothic" pitchFamily="34" charset="-122"/>
+                <a:cs typeface="Malgun Gothic" pitchFamily="34" charset="-120"/>
               </a:rPr>
-              <a:t>fleet.py</a:t>
+              <a:t>MaxAutoParticipantIndex 50</a:t>
             </a:r>
-            <a:endParaRPr lang="en-US" sz="1500" dirty="0"/>
+            <a:endParaRPr lang="en-US" sz="1600" dirty="0"/>
           </a:p>
         </p:txBody>
       </p:sp>
@@ -16714,8 +19639,8 @@
         </p:nvSpPr>
         <p:spPr>
           <a:xfrm>
-            <a:off x="4526280" y="2304288"/>
-            <a:ext cx="3017520" cy="566928"/>
+            <a:off x="7498080" y="3200400"/>
+            <a:ext cx="4142232" cy="685800"/>
           </a:xfrm>
           <a:prstGeom prst="rect">
             <a:avLst/>
@@ -16742,7 +19667,7 @@
                 <a:ea typeface="Malgun Gothic" pitchFamily="34" charset="-122"/>
                 <a:cs typeface="Malgun Gothic" pitchFamily="34" charset="-120"/>
               </a:rPr>
-              <a:t>명령 라우팅 · 상태 집계 · 교통 스레드 0.2 s · 재시도</a:t>
+              <a:t>유니캐스트에선 PC·도메인당 참가자 수 상한이 기본 약 10개. Nav2 + 대시보드 + ros2 CLI가 겹치면 모자람</a:t>
             </a:r>
             <a:endParaRPr lang="en-US" sz="1300" dirty="0"/>
           </a:p>
@@ -16750,41 +19675,14 @@
       </p:sp>
       <p:sp>
         <p:nvSpPr>
-          <p:cNvPr id="10" name="card-55"/>
-          <p:cNvSpPr/>
+          <p:cNvPr id="10" name="text-55"/>
+          <p:cNvSpPr txBox="1"/>
           <p:nvPr/>
         </p:nvSpPr>
         <p:spPr>
           <a:xfrm>
-            <a:off x="548640" y="3154680"/>
-            <a:ext cx="3520440" cy="1234440"/>
-          </a:xfrm>
-          <a:prstGeom prst="roundRect">
-            <a:avLst>
-              <a:gd name="adj" fmla="val 8889"/>
-            </a:avLst>
-          </a:prstGeom>
-          <a:solidFill>
-            <a:srgbClr val="FFF4E6"/>
-          </a:solidFill>
-          <a:ln w="19050">
-            <a:solidFill>
-              <a:srgbClr val="D9822B"/>
-            </a:solidFill>
-            <a:prstDash val="solid"/>
-          </a:ln>
-        </p:spPr>
-      </p:sp>
-      <p:sp>
-        <p:nvSpPr>
-          <p:cNvPr id="11" name="text-56"/>
-          <p:cNvSpPr txBox="1"/>
-          <p:nvPr/>
-        </p:nvSpPr>
-        <p:spPr>
-          <a:xfrm>
-            <a:off x="822960" y="3337560"/>
-            <a:ext cx="3017520" cy="347472"/>
+            <a:off x="7498080" y="3931920"/>
+            <a:ext cx="4142232" cy="347472"/>
           </a:xfrm>
           <a:prstGeom prst="rect">
             <a:avLst/>
@@ -16800,30 +19698,30 @@
               <a:buNone/>
             </a:pPr>
             <a:r>
-              <a:rPr lang="en-US" sz="1500" b="1" dirty="0">
+              <a:rPr lang="en-US" sz="1600" b="1" dirty="0">
                 <a:solidFill>
-                  <a:srgbClr val="A85A12"/>
+                  <a:srgbClr val="14213D"/>
                 </a:solidFill>
-                <a:latin typeface="Consolas" pitchFamily="34" charset="0"/>
-                <a:ea typeface="Consolas" pitchFamily="34" charset="-122"/>
-                <a:cs typeface="Consolas" pitchFamily="34" charset="-120"/>
+                <a:latin typeface="Malgun Gothic" pitchFamily="34" charset="0"/>
+                <a:ea typeface="Malgun Gothic" pitchFamily="34" charset="-122"/>
+                <a:cs typeface="Malgun Gothic" pitchFamily="34" charset="-120"/>
               </a:rPr>
-              <a:t>traffic.py</a:t>
+              <a:t>PC와 로봇이 같은 RMW</a:t>
             </a:r>
-            <a:endParaRPr lang="en-US" sz="1500" dirty="0"/>
+            <a:endParaRPr lang="en-US" sz="1600" dirty="0"/>
           </a:p>
         </p:txBody>
       </p:sp>
       <p:sp>
         <p:nvSpPr>
-          <p:cNvPr id="12" name="text-57"/>
+          <p:cNvPr id="11" name="text-56"/>
           <p:cNvSpPr txBox="1"/>
           <p:nvPr/>
         </p:nvSpPr>
         <p:spPr>
           <a:xfrm>
-            <a:off x="822960" y="3721608"/>
-            <a:ext cx="3017520" cy="566928"/>
+            <a:off x="7498080" y="4297680"/>
+            <a:ext cx="4142232" cy="685800"/>
           </a:xfrm>
           <a:prstGeom prst="rect">
             <a:avLst/>
@@ -16850,7 +19748,7 @@
                 <a:ea typeface="Malgun Gothic" pitchFamily="34" charset="-122"/>
                 <a:cs typeface="Malgun Gothic" pitchFamily="34" charset="-120"/>
               </a:rPr>
-              <a:t>TrafficGate · YieldRule · 기하. ROS import 없음</a:t>
+              <a:t>로봇 bringup도 Cyclone이어야 함. 섞으면 /odom·TF가 PC에 안 옴</a:t>
             </a:r>
             <a:endParaRPr lang="en-US" sz="1300" dirty="0"/>
           </a:p>
@@ -16858,41 +19756,14 @@
       </p:sp>
       <p:sp>
         <p:nvSpPr>
-          <p:cNvPr id="13" name="card-58"/>
-          <p:cNvSpPr/>
+          <p:cNvPr id="12" name="text-57"/>
+          <p:cNvSpPr txBox="1"/>
           <p:nvPr/>
         </p:nvSpPr>
         <p:spPr>
           <a:xfrm>
-            <a:off x="4251960" y="3154680"/>
-            <a:ext cx="3520440" cy="1234440"/>
-          </a:xfrm>
-          <a:prstGeom prst="roundRect">
-            <a:avLst>
-              <a:gd name="adj" fmla="val 8889"/>
-            </a:avLst>
-          </a:prstGeom>
-          <a:solidFill>
-            <a:srgbClr val="FFF4E6"/>
-          </a:solidFill>
-          <a:ln w="19050">
-            <a:solidFill>
-              <a:srgbClr val="D9822B"/>
-            </a:solidFill>
-            <a:prstDash val="solid"/>
-          </a:ln>
-        </p:spPr>
-      </p:sp>
-      <p:sp>
-        <p:nvSpPr>
-          <p:cNvPr id="14" name="text-59"/>
-          <p:cNvSpPr txBox="1"/>
-          <p:nvPr/>
-        </p:nvSpPr>
-        <p:spPr>
-          <a:xfrm>
-            <a:off x="4526280" y="3337560"/>
-            <a:ext cx="3017520" cy="347472"/>
+            <a:off x="7498080" y="5029200"/>
+            <a:ext cx="4142232" cy="347472"/>
           </a:xfrm>
           <a:prstGeom prst="rect">
             <a:avLst/>
@@ -16908,30 +19779,30 @@
               <a:buNone/>
             </a:pPr>
             <a:r>
-              <a:rPr lang="en-US" sz="1500" b="1" dirty="0">
+              <a:rPr lang="en-US" sz="1600" b="1" dirty="0">
                 <a:solidFill>
-                  <a:srgbClr val="A85A12"/>
+                  <a:srgbClr val="14213D"/>
                 </a:solidFill>
-                <a:latin typeface="Consolas" pitchFamily="34" charset="0"/>
-                <a:ea typeface="Consolas" pitchFamily="34" charset="-122"/>
-                <a:cs typeface="Consolas" pitchFamily="34" charset="-120"/>
+                <a:latin typeface="Malgun Gothic" pitchFamily="34" charset="0"/>
+                <a:ea typeface="Malgun Gothic" pitchFamily="34" charset="-122"/>
+                <a:cs typeface="Malgun Gothic" pitchFamily="34" charset="-120"/>
               </a:rPr>
-              <a:t>localize.py</a:t>
+              <a:t>시뮬은 반대로</a:t>
             </a:r>
-            <a:endParaRPr lang="en-US" sz="1500" dirty="0"/>
+            <a:endParaRPr lang="en-US" sz="1600" dirty="0"/>
           </a:p>
         </p:txBody>
       </p:sp>
       <p:sp>
         <p:nvSpPr>
-          <p:cNvPr id="15" name="text-60"/>
+          <p:cNvPr id="13" name="text-58"/>
           <p:cNvSpPr txBox="1"/>
           <p:nvPr/>
         </p:nvSpPr>
         <p:spPr>
           <a:xfrm>
-            <a:off x="4526280" y="3721608"/>
-            <a:ext cx="3017520" cy="566928"/>
+            <a:off x="7498080" y="5394960"/>
+            <a:ext cx="4142232" cy="685800"/>
           </a:xfrm>
           <a:prstGeom prst="rect">
             <a:avLst/>
@@ -16958,372 +19829,9 @@
                 <a:ea typeface="Malgun Gothic" pitchFamily="34" charset="-122"/>
                 <a:cs typeface="Malgun Gothic" pitchFamily="34" charset="-120"/>
               </a:rPr>
-              <a:t>전역 위치 추정 상태 머신. ROS import 없음</a:t>
+              <a:t>sim.launch가 Fast DDS + LOCALHOST로 바꾸고 CYCLONEDDS_URI·peer를 지운다</a:t>
             </a:r>
             <a:endParaRPr lang="en-US" sz="1300" dirty="0"/>
-          </a:p>
-        </p:txBody>
-      </p:sp>
-      <p:sp>
-        <p:nvSpPr>
-          <p:cNvPr id="16" name="card-61"/>
-          <p:cNvSpPr/>
-          <p:nvPr/>
-        </p:nvSpPr>
-        <p:spPr>
-          <a:xfrm>
-            <a:off x="548640" y="4572000"/>
-            <a:ext cx="3520440" cy="1234440"/>
-          </a:xfrm>
-          <a:prstGeom prst="roundRect">
-            <a:avLst>
-              <a:gd name="adj" fmla="val 8889"/>
-            </a:avLst>
-          </a:prstGeom>
-          <a:solidFill>
-            <a:srgbClr val="F3F5F8"/>
-          </a:solidFill>
-          <a:ln w="9525">
-            <a:solidFill>
-              <a:srgbClr val="F3F5F8"/>
-            </a:solidFill>
-            <a:prstDash val="solid"/>
-          </a:ln>
-        </p:spPr>
-      </p:sp>
-      <p:sp>
-        <p:nvSpPr>
-          <p:cNvPr id="17" name="text-62"/>
-          <p:cNvSpPr txBox="1"/>
-          <p:nvPr/>
-        </p:nvSpPr>
-        <p:spPr>
-          <a:xfrm>
-            <a:off x="822960" y="4754880"/>
-            <a:ext cx="3017520" cy="347472"/>
-          </a:xfrm>
-          <a:prstGeom prst="rect">
-            <a:avLst/>
-          </a:prstGeom>
-          <a:noFill/>
-          <a:ln/>
-        </p:spPr>
-        <p:txBody>
-          <a:bodyPr wrap="square" lIns="0" tIns="0" rIns="0" bIns="0" rtlCol="0" anchor="t"/>
-          <a:lstStyle/>
-          <a:p>
-            <a:pPr indent="0" marL="0">
-              <a:buNone/>
-            </a:pPr>
-            <a:r>
-              <a:rPr lang="en-US" sz="1500" b="1" dirty="0">
-                <a:solidFill>
-                  <a:srgbClr val="2E7D4F"/>
-                </a:solidFill>
-                <a:latin typeface="Consolas" pitchFamily="34" charset="0"/>
-                <a:ea typeface="Consolas" pitchFamily="34" charset="-122"/>
-                <a:cs typeface="Consolas" pitchFamily="34" charset="-120"/>
-              </a:rPr>
-              <a:t>dashboard_http.py</a:t>
-            </a:r>
-            <a:endParaRPr lang="en-US" sz="1500" dirty="0"/>
-          </a:p>
-        </p:txBody>
-      </p:sp>
-      <p:sp>
-        <p:nvSpPr>
-          <p:cNvPr id="18" name="text-63"/>
-          <p:cNvSpPr txBox="1"/>
-          <p:nvPr/>
-        </p:nvSpPr>
-        <p:spPr>
-          <a:xfrm>
-            <a:off x="822960" y="5138928"/>
-            <a:ext cx="3017520" cy="566928"/>
-          </a:xfrm>
-          <a:prstGeom prst="rect">
-            <a:avLst/>
-          </a:prstGeom>
-          <a:noFill/>
-          <a:ln/>
-        </p:spPr>
-        <p:txBody>
-          <a:bodyPr wrap="square" lIns="0" tIns="0" rIns="0" bIns="0" rtlCol="0" anchor="t"/>
-          <a:lstStyle/>
-          <a:p>
-            <a:pPr indent="0" marL="0">
-              <a:lnSpc>
-                <a:spcPct val="120000"/>
-              </a:lnSpc>
-              <a:buNone/>
-            </a:pPr>
-            <a:r>
-              <a:rPr lang="en-US" sz="1300" dirty="0">
-                <a:solidFill>
-                  <a:srgbClr val="4A5568"/>
-                </a:solidFill>
-                <a:latin typeface="Malgun Gothic" pitchFamily="34" charset="0"/>
-                <a:ea typeface="Malgun Gothic" pitchFamily="34" charset="-122"/>
-                <a:cs typeface="Malgun Gothic" pitchFamily="34" charset="-120"/>
-              </a:rPr>
-              <a:t>REST 라우팅 (JSON, 4 KB 제한)</a:t>
-            </a:r>
-            <a:endParaRPr lang="en-US" sz="1300" dirty="0"/>
-          </a:p>
-        </p:txBody>
-      </p:sp>
-      <p:sp>
-        <p:nvSpPr>
-          <p:cNvPr id="19" name="card-64"/>
-          <p:cNvSpPr/>
-          <p:nvPr/>
-        </p:nvSpPr>
-        <p:spPr>
-          <a:xfrm>
-            <a:off x="4251960" y="4572000"/>
-            <a:ext cx="3520440" cy="1234440"/>
-          </a:xfrm>
-          <a:prstGeom prst="roundRect">
-            <a:avLst>
-              <a:gd name="adj" fmla="val 8889"/>
-            </a:avLst>
-          </a:prstGeom>
-          <a:solidFill>
-            <a:srgbClr val="F3F5F8"/>
-          </a:solidFill>
-          <a:ln w="9525">
-            <a:solidFill>
-              <a:srgbClr val="F3F5F8"/>
-            </a:solidFill>
-            <a:prstDash val="solid"/>
-          </a:ln>
-        </p:spPr>
-      </p:sp>
-      <p:sp>
-        <p:nvSpPr>
-          <p:cNvPr id="20" name="text-65"/>
-          <p:cNvSpPr txBox="1"/>
-          <p:nvPr/>
-        </p:nvSpPr>
-        <p:spPr>
-          <a:xfrm>
-            <a:off x="4526280" y="4754880"/>
-            <a:ext cx="3017520" cy="347472"/>
-          </a:xfrm>
-          <a:prstGeom prst="rect">
-            <a:avLst/>
-          </a:prstGeom>
-          <a:noFill/>
-          <a:ln/>
-        </p:spPr>
-        <p:txBody>
-          <a:bodyPr wrap="square" lIns="0" tIns="0" rIns="0" bIns="0" rtlCol="0" anchor="t"/>
-          <a:lstStyle/>
-          <a:p>
-            <a:pPr indent="0" marL="0">
-              <a:buNone/>
-            </a:pPr>
-            <a:r>
-              <a:rPr lang="en-US" sz="1500" b="1" dirty="0">
-                <a:solidFill>
-                  <a:srgbClr val="2E7D4F"/>
-                </a:solidFill>
-                <a:latin typeface="Consolas" pitchFamily="34" charset="0"/>
-                <a:ea typeface="Consolas" pitchFamily="34" charset="-122"/>
-                <a:cs typeface="Consolas" pitchFamily="34" charset="-120"/>
-              </a:rPr>
-              <a:t>web/fleet.html</a:t>
-            </a:r>
-            <a:endParaRPr lang="en-US" sz="1500" dirty="0"/>
-          </a:p>
-        </p:txBody>
-      </p:sp>
-      <p:sp>
-        <p:nvSpPr>
-          <p:cNvPr id="21" name="text-66"/>
-          <p:cNvSpPr txBox="1"/>
-          <p:nvPr/>
-        </p:nvSpPr>
-        <p:spPr>
-          <a:xfrm>
-            <a:off x="4526280" y="5138928"/>
-            <a:ext cx="3017520" cy="566928"/>
-          </a:xfrm>
-          <a:prstGeom prst="rect">
-            <a:avLst/>
-          </a:prstGeom>
-          <a:noFill/>
-          <a:ln/>
-        </p:spPr>
-        <p:txBody>
-          <a:bodyPr wrap="square" lIns="0" tIns="0" rIns="0" bIns="0" rtlCol="0" anchor="t"/>
-          <a:lstStyle/>
-          <a:p>
-            <a:pPr indent="0" marL="0">
-              <a:lnSpc>
-                <a:spcPct val="120000"/>
-              </a:lnSpc>
-              <a:buNone/>
-            </a:pPr>
-            <a:r>
-              <a:rPr lang="en-US" sz="1300" dirty="0">
-                <a:solidFill>
-                  <a:srgbClr val="4A5568"/>
-                </a:solidFill>
-                <a:latin typeface="Malgun Gothic" pitchFamily="34" charset="0"/>
-                <a:ea typeface="Malgun Gothic" pitchFamily="34" charset="-122"/>
-                <a:cs typeface="Malgun Gothic" pitchFamily="34" charset="-120"/>
-              </a:rPr>
-              <a:t>Canvas 지도 · 경로, 500 ms 폴링</a:t>
-            </a:r>
-            <a:endParaRPr lang="en-US" sz="1300" dirty="0"/>
-          </a:p>
-        </p:txBody>
-      </p:sp>
-      <p:sp>
-        <p:nvSpPr>
-          <p:cNvPr id="22" name="card-67"/>
-          <p:cNvSpPr/>
-          <p:nvPr/>
-        </p:nvSpPr>
-        <p:spPr>
-          <a:xfrm>
-            <a:off x="8183880" y="1737360"/>
-            <a:ext cx="3456432" cy="4069080"/>
-          </a:xfrm>
-          <a:prstGeom prst="roundRect">
-            <a:avLst>
-              <a:gd name="adj" fmla="val 3175"/>
-            </a:avLst>
-          </a:prstGeom>
-          <a:solidFill>
-            <a:srgbClr val="14213D"/>
-          </a:solidFill>
-          <a:ln w="9525">
-            <a:solidFill>
-              <a:srgbClr val="14213D"/>
-            </a:solidFill>
-            <a:prstDash val="solid"/>
-          </a:ln>
-        </p:spPr>
-      </p:sp>
-      <p:sp>
-        <p:nvSpPr>
-          <p:cNvPr id="23" name="text-68"/>
-          <p:cNvSpPr txBox="1"/>
-          <p:nvPr/>
-        </p:nvSpPr>
-        <p:spPr>
-          <a:xfrm>
-            <a:off x="8503920" y="2103120"/>
-            <a:ext cx="2834640" cy="1005840"/>
-          </a:xfrm>
-          <a:prstGeom prst="rect">
-            <a:avLst/>
-          </a:prstGeom>
-          <a:noFill/>
-          <a:ln/>
-        </p:spPr>
-        <p:txBody>
-          <a:bodyPr wrap="square" lIns="0" tIns="0" rIns="0" bIns="0" rtlCol="0" anchor="t"/>
-          <a:lstStyle/>
-          <a:p>
-            <a:pPr indent="0" marL="0">
-              <a:buNone/>
-            </a:pPr>
-            <a:r>
-              <a:rPr lang="en-US" sz="6000" b="1" dirty="0">
-                <a:solidFill>
-                  <a:srgbClr val="F2A65A"/>
-                </a:solidFill>
-                <a:latin typeface="Consolas" pitchFamily="34" charset="0"/>
-                <a:ea typeface="Consolas" pitchFamily="34" charset="-122"/>
-                <a:cs typeface="Consolas" pitchFamily="34" charset="-120"/>
-              </a:rPr>
-              <a:t>113</a:t>
-            </a:r>
-            <a:endParaRPr lang="en-US" sz="6000" dirty="0"/>
-          </a:p>
-        </p:txBody>
-      </p:sp>
-      <p:sp>
-        <p:nvSpPr>
-          <p:cNvPr id="24" name="text-69"/>
-          <p:cNvSpPr txBox="1"/>
-          <p:nvPr/>
-        </p:nvSpPr>
-        <p:spPr>
-          <a:xfrm>
-            <a:off x="8503920" y="3200400"/>
-            <a:ext cx="2834640" cy="411480"/>
-          </a:xfrm>
-          <a:prstGeom prst="rect">
-            <a:avLst/>
-          </a:prstGeom>
-          <a:noFill/>
-          <a:ln/>
-        </p:spPr>
-        <p:txBody>
-          <a:bodyPr wrap="square" lIns="0" tIns="0" rIns="0" bIns="0" rtlCol="0" anchor="t"/>
-          <a:lstStyle/>
-          <a:p>
-            <a:pPr indent="0" marL="0">
-              <a:buNone/>
-            </a:pPr>
-            <a:r>
-              <a:rPr lang="en-US" sz="1800" b="1" dirty="0">
-                <a:solidFill>
-                  <a:srgbClr val="F6F7F4"/>
-                </a:solidFill>
-                <a:latin typeface="Malgun Gothic" pitchFamily="34" charset="0"/>
-                <a:ea typeface="Malgun Gothic" pitchFamily="34" charset="-122"/>
-                <a:cs typeface="Malgun Gothic" pitchFamily="34" charset="-120"/>
-              </a:rPr>
-              <a:t>pytest, DDS 없이 수 초</a:t>
-            </a:r>
-            <a:endParaRPr lang="en-US" sz="1800" dirty="0"/>
-          </a:p>
-        </p:txBody>
-      </p:sp>
-      <p:sp>
-        <p:nvSpPr>
-          <p:cNvPr id="25" name="text-70"/>
-          <p:cNvSpPr txBox="1"/>
-          <p:nvPr/>
-        </p:nvSpPr>
-        <p:spPr>
-          <a:xfrm>
-            <a:off x="8503920" y="3703320"/>
-            <a:ext cx="2834640" cy="1737360"/>
-          </a:xfrm>
-          <a:prstGeom prst="rect">
-            <a:avLst/>
-          </a:prstGeom>
-          <a:noFill/>
-          <a:ln/>
-        </p:spPr>
-        <p:txBody>
-          <a:bodyPr wrap="square" lIns="0" tIns="0" rIns="0" bIns="0" rtlCol="0" anchor="t"/>
-          <a:lstStyle/>
-          <a:p>
-            <a:pPr indent="0" marL="0">
-              <a:lnSpc>
-                <a:spcPct val="130000"/>
-              </a:lnSpc>
-              <a:buNone/>
-            </a:pPr>
-            <a:r>
-              <a:rPr lang="en-US" sz="1400" dirty="0">
-                <a:solidFill>
-                  <a:srgbClr val="C9D3E3"/>
-                </a:solidFill>
-                <a:latin typeface="Malgun Gothic" pitchFamily="34" charset="0"/>
-                <a:ea typeface="Malgun Gothic" pitchFamily="34" charset="-122"/>
-                <a:cs typeface="Malgun Gothic" pitchFamily="34" charset="-120"/>
-              </a:rPr>
-              <a:t>교통 규칙은 입력이 좌표·경로 점뿐인 순수 함수. 정면 교차·후진 한계를 좌표만으로 재현한다.</a:t>
-            </a:r>
-            <a:endParaRPr lang="en-US" sz="1400" dirty="0"/>
           </a:p>
         </p:txBody>
       </p:sp>
@@ -17435,6 +19943,956 @@
                 <a:ea typeface="Consolas" pitchFamily="34" charset="-122"/>
                 <a:cs typeface="Consolas" pitchFamily="34" charset="-120"/>
               </a:rPr>
+              <a:t>02 · 관제 프로세스 내부</a:t>
+            </a:r>
+            <a:endParaRPr lang="en-US" sz="1200" dirty="0"/>
+          </a:p>
+        </p:txBody>
+      </p:sp>
+      <p:sp>
+        <p:nvSpPr>
+          <p:cNvPr id="3" name="Text 0"/>
+          <p:cNvSpPr/>
+          <p:nvPr>
+            <p:ph idx="101" type="title" hasCustomPrompt="1"/>
+          </p:nvPr>
+        </p:nvSpPr>
+        <p:spPr>
+          <a:xfrm>
+            <a:off x="548640" y="731520"/>
+            <a:ext cx="11094415" cy="685800"/>
+          </a:xfrm>
+          <a:prstGeom prst="rect">
+            <a:avLst/>
+          </a:prstGeom>
+          <a:noFill/>
+          <a:ln/>
+        </p:spPr>
+        <p:txBody>
+          <a:bodyPr wrap="square" lIns="0" tIns="0" rIns="0" bIns="0" rtlCol="0" anchor="ctr"/>
+          <a:lstStyle/>
+          <a:p>
+            <a:pPr algn="l" indent="0" marL="0">
+              <a:buNone/>
+            </a:pPr>
+            <a:r>
+              <a:rPr lang="en-US" sz="2800" b="1" dirty="0">
+                <a:solidFill>
+                  <a:srgbClr val="14213D"/>
+                </a:solidFill>
+                <a:latin typeface="Malgun Gothic" pitchFamily="34" charset="0"/>
+                <a:ea typeface="Malgun Gothic" pitchFamily="34" charset="-122"/>
+                <a:cs typeface="Malgun Gothic" pitchFamily="34" charset="-120"/>
+              </a:rPr>
+              <a:t>판단은 순수 Python, ROS 입출력은 한 곳에</a:t>
+            </a:r>
+            <a:endParaRPr lang="en-US" sz="2800" dirty="0"/>
+          </a:p>
+        </p:txBody>
+      </p:sp>
+      <p:sp>
+        <p:nvSpPr>
+          <p:cNvPr id="4" name="card-59"/>
+          <p:cNvSpPr/>
+          <p:nvPr/>
+        </p:nvSpPr>
+        <p:spPr>
+          <a:xfrm>
+            <a:off x="548640" y="1737360"/>
+            <a:ext cx="3520440" cy="1234440"/>
+          </a:xfrm>
+          <a:prstGeom prst="roundRect">
+            <a:avLst>
+              <a:gd name="adj" fmla="val 8889"/>
+            </a:avLst>
+          </a:prstGeom>
+          <a:solidFill>
+            <a:srgbClr val="F3F5F8"/>
+          </a:solidFill>
+          <a:ln w="9525">
+            <a:solidFill>
+              <a:srgbClr val="F3F5F8"/>
+            </a:solidFill>
+            <a:prstDash val="solid"/>
+          </a:ln>
+        </p:spPr>
+      </p:sp>
+      <p:sp>
+        <p:nvSpPr>
+          <p:cNvPr id="5" name="text-60"/>
+          <p:cNvSpPr txBox="1"/>
+          <p:nvPr/>
+        </p:nvSpPr>
+        <p:spPr>
+          <a:xfrm>
+            <a:off x="822960" y="1920240"/>
+            <a:ext cx="3017520" cy="347472"/>
+          </a:xfrm>
+          <a:prstGeom prst="rect">
+            <a:avLst/>
+          </a:prstGeom>
+          <a:noFill/>
+          <a:ln/>
+        </p:spPr>
+        <p:txBody>
+          <a:bodyPr wrap="square" lIns="0" tIns="0" rIns="0" bIns="0" rtlCol="0" anchor="t"/>
+          <a:lstStyle/>
+          <a:p>
+            <a:pPr indent="0" marL="0">
+              <a:buNone/>
+            </a:pPr>
+            <a:r>
+              <a:rPr lang="en-US" sz="1500" b="1" dirty="0">
+                <a:solidFill>
+                  <a:srgbClr val="2E7D4F"/>
+                </a:solidFill>
+                <a:latin typeface="Consolas" pitchFamily="34" charset="0"/>
+                <a:ea typeface="Consolas" pitchFamily="34" charset="-122"/>
+                <a:cs typeface="Consolas" pitchFamily="34" charset="-120"/>
+              </a:rPr>
+              <a:t>robot.py</a:t>
+            </a:r>
+            <a:endParaRPr lang="en-US" sz="1500" dirty="0"/>
+          </a:p>
+        </p:txBody>
+      </p:sp>
+      <p:sp>
+        <p:nvSpPr>
+          <p:cNvPr id="6" name="text-61"/>
+          <p:cNvSpPr txBox="1"/>
+          <p:nvPr/>
+        </p:nvSpPr>
+        <p:spPr>
+          <a:xfrm>
+            <a:off x="822960" y="2304288"/>
+            <a:ext cx="3017520" cy="566928"/>
+          </a:xfrm>
+          <a:prstGeom prst="rect">
+            <a:avLst/>
+          </a:prstGeom>
+          <a:noFill/>
+          <a:ln/>
+        </p:spPr>
+        <p:txBody>
+          <a:bodyPr wrap="square" lIns="0" tIns="0" rIns="0" bIns="0" rtlCol="0" anchor="t"/>
+          <a:lstStyle/>
+          <a:p>
+            <a:pPr indent="0" marL="0">
+              <a:lnSpc>
+                <a:spcPct val="120000"/>
+              </a:lnSpc>
+              <a:buNone/>
+            </a:pPr>
+            <a:r>
+              <a:rPr lang="en-US" sz="1300" dirty="0">
+                <a:solidFill>
+                  <a:srgbClr val="4A5568"/>
+                </a:solidFill>
+                <a:latin typeface="Malgun Gothic" pitchFamily="34" charset="0"/>
+                <a:ea typeface="Malgun Gothic" pitchFamily="34" charset="-122"/>
+                <a:cs typeface="Malgun Gothic" pitchFamily="34" charset="-120"/>
+              </a:rPr>
+              <a:t>로봇 1대의 ROS 인터페이스. 액션·구독·서비스 전부</a:t>
+            </a:r>
+            <a:endParaRPr lang="en-US" sz="1300" dirty="0"/>
+          </a:p>
+        </p:txBody>
+      </p:sp>
+      <p:sp>
+        <p:nvSpPr>
+          <p:cNvPr id="7" name="card-62"/>
+          <p:cNvSpPr/>
+          <p:nvPr/>
+        </p:nvSpPr>
+        <p:spPr>
+          <a:xfrm>
+            <a:off x="4251960" y="1737360"/>
+            <a:ext cx="3520440" cy="1234440"/>
+          </a:xfrm>
+          <a:prstGeom prst="roundRect">
+            <a:avLst>
+              <a:gd name="adj" fmla="val 8889"/>
+            </a:avLst>
+          </a:prstGeom>
+          <a:solidFill>
+            <a:srgbClr val="F3F5F8"/>
+          </a:solidFill>
+          <a:ln w="9525">
+            <a:solidFill>
+              <a:srgbClr val="F3F5F8"/>
+            </a:solidFill>
+            <a:prstDash val="solid"/>
+          </a:ln>
+        </p:spPr>
+      </p:sp>
+      <p:sp>
+        <p:nvSpPr>
+          <p:cNvPr id="8" name="text-63"/>
+          <p:cNvSpPr txBox="1"/>
+          <p:nvPr/>
+        </p:nvSpPr>
+        <p:spPr>
+          <a:xfrm>
+            <a:off x="4526280" y="1920240"/>
+            <a:ext cx="3017520" cy="347472"/>
+          </a:xfrm>
+          <a:prstGeom prst="rect">
+            <a:avLst/>
+          </a:prstGeom>
+          <a:noFill/>
+          <a:ln/>
+        </p:spPr>
+        <p:txBody>
+          <a:bodyPr wrap="square" lIns="0" tIns="0" rIns="0" bIns="0" rtlCol="0" anchor="t"/>
+          <a:lstStyle/>
+          <a:p>
+            <a:pPr indent="0" marL="0">
+              <a:buNone/>
+            </a:pPr>
+            <a:r>
+              <a:rPr lang="en-US" sz="1500" b="1" dirty="0">
+                <a:solidFill>
+                  <a:srgbClr val="2E7D4F"/>
+                </a:solidFill>
+                <a:latin typeface="Consolas" pitchFamily="34" charset="0"/>
+                <a:ea typeface="Consolas" pitchFamily="34" charset="-122"/>
+                <a:cs typeface="Consolas" pitchFamily="34" charset="-120"/>
+              </a:rPr>
+              <a:t>fleet.py</a:t>
+            </a:r>
+            <a:endParaRPr lang="en-US" sz="1500" dirty="0"/>
+          </a:p>
+        </p:txBody>
+      </p:sp>
+      <p:sp>
+        <p:nvSpPr>
+          <p:cNvPr id="9" name="text-64"/>
+          <p:cNvSpPr txBox="1"/>
+          <p:nvPr/>
+        </p:nvSpPr>
+        <p:spPr>
+          <a:xfrm>
+            <a:off x="4526280" y="2304288"/>
+            <a:ext cx="3017520" cy="566928"/>
+          </a:xfrm>
+          <a:prstGeom prst="rect">
+            <a:avLst/>
+          </a:prstGeom>
+          <a:noFill/>
+          <a:ln/>
+        </p:spPr>
+        <p:txBody>
+          <a:bodyPr wrap="square" lIns="0" tIns="0" rIns="0" bIns="0" rtlCol="0" anchor="t"/>
+          <a:lstStyle/>
+          <a:p>
+            <a:pPr indent="0" marL="0">
+              <a:lnSpc>
+                <a:spcPct val="120000"/>
+              </a:lnSpc>
+              <a:buNone/>
+            </a:pPr>
+            <a:r>
+              <a:rPr lang="en-US" sz="1300" dirty="0">
+                <a:solidFill>
+                  <a:srgbClr val="4A5568"/>
+                </a:solidFill>
+                <a:latin typeface="Malgun Gothic" pitchFamily="34" charset="0"/>
+                <a:ea typeface="Malgun Gothic" pitchFamily="34" charset="-122"/>
+                <a:cs typeface="Malgun Gothic" pitchFamily="34" charset="-120"/>
+              </a:rPr>
+              <a:t>명령 라우팅 · 상태 집계 · 교통 스레드 0.2 s · 재시도</a:t>
+            </a:r>
+            <a:endParaRPr lang="en-US" sz="1300" dirty="0"/>
+          </a:p>
+        </p:txBody>
+      </p:sp>
+      <p:sp>
+        <p:nvSpPr>
+          <p:cNvPr id="10" name="card-65"/>
+          <p:cNvSpPr/>
+          <p:nvPr/>
+        </p:nvSpPr>
+        <p:spPr>
+          <a:xfrm>
+            <a:off x="548640" y="3154680"/>
+            <a:ext cx="3520440" cy="1234440"/>
+          </a:xfrm>
+          <a:prstGeom prst="roundRect">
+            <a:avLst>
+              <a:gd name="adj" fmla="val 8889"/>
+            </a:avLst>
+          </a:prstGeom>
+          <a:solidFill>
+            <a:srgbClr val="FFF4E6"/>
+          </a:solidFill>
+          <a:ln w="19050">
+            <a:solidFill>
+              <a:srgbClr val="D9822B"/>
+            </a:solidFill>
+            <a:prstDash val="solid"/>
+          </a:ln>
+        </p:spPr>
+      </p:sp>
+      <p:sp>
+        <p:nvSpPr>
+          <p:cNvPr id="11" name="text-66"/>
+          <p:cNvSpPr txBox="1"/>
+          <p:nvPr/>
+        </p:nvSpPr>
+        <p:spPr>
+          <a:xfrm>
+            <a:off x="822960" y="3337560"/>
+            <a:ext cx="3017520" cy="347472"/>
+          </a:xfrm>
+          <a:prstGeom prst="rect">
+            <a:avLst/>
+          </a:prstGeom>
+          <a:noFill/>
+          <a:ln/>
+        </p:spPr>
+        <p:txBody>
+          <a:bodyPr wrap="square" lIns="0" tIns="0" rIns="0" bIns="0" rtlCol="0" anchor="t"/>
+          <a:lstStyle/>
+          <a:p>
+            <a:pPr indent="0" marL="0">
+              <a:buNone/>
+            </a:pPr>
+            <a:r>
+              <a:rPr lang="en-US" sz="1500" b="1" dirty="0">
+                <a:solidFill>
+                  <a:srgbClr val="A85A12"/>
+                </a:solidFill>
+                <a:latin typeface="Consolas" pitchFamily="34" charset="0"/>
+                <a:ea typeface="Consolas" pitchFamily="34" charset="-122"/>
+                <a:cs typeface="Consolas" pitchFamily="34" charset="-120"/>
+              </a:rPr>
+              <a:t>traffic.py</a:t>
+            </a:r>
+            <a:endParaRPr lang="en-US" sz="1500" dirty="0"/>
+          </a:p>
+        </p:txBody>
+      </p:sp>
+      <p:sp>
+        <p:nvSpPr>
+          <p:cNvPr id="12" name="text-67"/>
+          <p:cNvSpPr txBox="1"/>
+          <p:nvPr/>
+        </p:nvSpPr>
+        <p:spPr>
+          <a:xfrm>
+            <a:off x="822960" y="3721608"/>
+            <a:ext cx="3017520" cy="566928"/>
+          </a:xfrm>
+          <a:prstGeom prst="rect">
+            <a:avLst/>
+          </a:prstGeom>
+          <a:noFill/>
+          <a:ln/>
+        </p:spPr>
+        <p:txBody>
+          <a:bodyPr wrap="square" lIns="0" tIns="0" rIns="0" bIns="0" rtlCol="0" anchor="t"/>
+          <a:lstStyle/>
+          <a:p>
+            <a:pPr indent="0" marL="0">
+              <a:lnSpc>
+                <a:spcPct val="120000"/>
+              </a:lnSpc>
+              <a:buNone/>
+            </a:pPr>
+            <a:r>
+              <a:rPr lang="en-US" sz="1300" dirty="0">
+                <a:solidFill>
+                  <a:srgbClr val="4A5568"/>
+                </a:solidFill>
+                <a:latin typeface="Malgun Gothic" pitchFamily="34" charset="0"/>
+                <a:ea typeface="Malgun Gothic" pitchFamily="34" charset="-122"/>
+                <a:cs typeface="Malgun Gothic" pitchFamily="34" charset="-120"/>
+              </a:rPr>
+              <a:t>TrafficGate · YieldRule · 기하. ROS import 없음</a:t>
+            </a:r>
+            <a:endParaRPr lang="en-US" sz="1300" dirty="0"/>
+          </a:p>
+        </p:txBody>
+      </p:sp>
+      <p:sp>
+        <p:nvSpPr>
+          <p:cNvPr id="13" name="card-68"/>
+          <p:cNvSpPr/>
+          <p:nvPr/>
+        </p:nvSpPr>
+        <p:spPr>
+          <a:xfrm>
+            <a:off x="4251960" y="3154680"/>
+            <a:ext cx="3520440" cy="1234440"/>
+          </a:xfrm>
+          <a:prstGeom prst="roundRect">
+            <a:avLst>
+              <a:gd name="adj" fmla="val 8889"/>
+            </a:avLst>
+          </a:prstGeom>
+          <a:solidFill>
+            <a:srgbClr val="FFF4E6"/>
+          </a:solidFill>
+          <a:ln w="19050">
+            <a:solidFill>
+              <a:srgbClr val="D9822B"/>
+            </a:solidFill>
+            <a:prstDash val="solid"/>
+          </a:ln>
+        </p:spPr>
+      </p:sp>
+      <p:sp>
+        <p:nvSpPr>
+          <p:cNvPr id="14" name="text-69"/>
+          <p:cNvSpPr txBox="1"/>
+          <p:nvPr/>
+        </p:nvSpPr>
+        <p:spPr>
+          <a:xfrm>
+            <a:off x="4526280" y="3337560"/>
+            <a:ext cx="3017520" cy="347472"/>
+          </a:xfrm>
+          <a:prstGeom prst="rect">
+            <a:avLst/>
+          </a:prstGeom>
+          <a:noFill/>
+          <a:ln/>
+        </p:spPr>
+        <p:txBody>
+          <a:bodyPr wrap="square" lIns="0" tIns="0" rIns="0" bIns="0" rtlCol="0" anchor="t"/>
+          <a:lstStyle/>
+          <a:p>
+            <a:pPr indent="0" marL="0">
+              <a:buNone/>
+            </a:pPr>
+            <a:r>
+              <a:rPr lang="en-US" sz="1500" b="1" dirty="0">
+                <a:solidFill>
+                  <a:srgbClr val="A85A12"/>
+                </a:solidFill>
+                <a:latin typeface="Consolas" pitchFamily="34" charset="0"/>
+                <a:ea typeface="Consolas" pitchFamily="34" charset="-122"/>
+                <a:cs typeface="Consolas" pitchFamily="34" charset="-120"/>
+              </a:rPr>
+              <a:t>localize.py</a:t>
+            </a:r>
+            <a:endParaRPr lang="en-US" sz="1500" dirty="0"/>
+          </a:p>
+        </p:txBody>
+      </p:sp>
+      <p:sp>
+        <p:nvSpPr>
+          <p:cNvPr id="15" name="text-70"/>
+          <p:cNvSpPr txBox="1"/>
+          <p:nvPr/>
+        </p:nvSpPr>
+        <p:spPr>
+          <a:xfrm>
+            <a:off x="4526280" y="3721608"/>
+            <a:ext cx="3017520" cy="566928"/>
+          </a:xfrm>
+          <a:prstGeom prst="rect">
+            <a:avLst/>
+          </a:prstGeom>
+          <a:noFill/>
+          <a:ln/>
+        </p:spPr>
+        <p:txBody>
+          <a:bodyPr wrap="square" lIns="0" tIns="0" rIns="0" bIns="0" rtlCol="0" anchor="t"/>
+          <a:lstStyle/>
+          <a:p>
+            <a:pPr indent="0" marL="0">
+              <a:lnSpc>
+                <a:spcPct val="120000"/>
+              </a:lnSpc>
+              <a:buNone/>
+            </a:pPr>
+            <a:r>
+              <a:rPr lang="en-US" sz="1300" dirty="0">
+                <a:solidFill>
+                  <a:srgbClr val="4A5568"/>
+                </a:solidFill>
+                <a:latin typeface="Malgun Gothic" pitchFamily="34" charset="0"/>
+                <a:ea typeface="Malgun Gothic" pitchFamily="34" charset="-122"/>
+                <a:cs typeface="Malgun Gothic" pitchFamily="34" charset="-120"/>
+              </a:rPr>
+              <a:t>전역 위치 추정 상태 머신. ROS import 없음</a:t>
+            </a:r>
+            <a:endParaRPr lang="en-US" sz="1300" dirty="0"/>
+          </a:p>
+        </p:txBody>
+      </p:sp>
+      <p:sp>
+        <p:nvSpPr>
+          <p:cNvPr id="16" name="card-71"/>
+          <p:cNvSpPr/>
+          <p:nvPr/>
+        </p:nvSpPr>
+        <p:spPr>
+          <a:xfrm>
+            <a:off x="548640" y="4572000"/>
+            <a:ext cx="3520440" cy="1234440"/>
+          </a:xfrm>
+          <a:prstGeom prst="roundRect">
+            <a:avLst>
+              <a:gd name="adj" fmla="val 8889"/>
+            </a:avLst>
+          </a:prstGeom>
+          <a:solidFill>
+            <a:srgbClr val="F3F5F8"/>
+          </a:solidFill>
+          <a:ln w="9525">
+            <a:solidFill>
+              <a:srgbClr val="F3F5F8"/>
+            </a:solidFill>
+            <a:prstDash val="solid"/>
+          </a:ln>
+        </p:spPr>
+      </p:sp>
+      <p:sp>
+        <p:nvSpPr>
+          <p:cNvPr id="17" name="text-72"/>
+          <p:cNvSpPr txBox="1"/>
+          <p:nvPr/>
+        </p:nvSpPr>
+        <p:spPr>
+          <a:xfrm>
+            <a:off x="822960" y="4754880"/>
+            <a:ext cx="3017520" cy="347472"/>
+          </a:xfrm>
+          <a:prstGeom prst="rect">
+            <a:avLst/>
+          </a:prstGeom>
+          <a:noFill/>
+          <a:ln/>
+        </p:spPr>
+        <p:txBody>
+          <a:bodyPr wrap="square" lIns="0" tIns="0" rIns="0" bIns="0" rtlCol="0" anchor="t"/>
+          <a:lstStyle/>
+          <a:p>
+            <a:pPr indent="0" marL="0">
+              <a:buNone/>
+            </a:pPr>
+            <a:r>
+              <a:rPr lang="en-US" sz="1500" b="1" dirty="0">
+                <a:solidFill>
+                  <a:srgbClr val="2E7D4F"/>
+                </a:solidFill>
+                <a:latin typeface="Consolas" pitchFamily="34" charset="0"/>
+                <a:ea typeface="Consolas" pitchFamily="34" charset="-122"/>
+                <a:cs typeface="Consolas" pitchFamily="34" charset="-120"/>
+              </a:rPr>
+              <a:t>dashboard_http.py</a:t>
+            </a:r>
+            <a:endParaRPr lang="en-US" sz="1500" dirty="0"/>
+          </a:p>
+        </p:txBody>
+      </p:sp>
+      <p:sp>
+        <p:nvSpPr>
+          <p:cNvPr id="18" name="text-73"/>
+          <p:cNvSpPr txBox="1"/>
+          <p:nvPr/>
+        </p:nvSpPr>
+        <p:spPr>
+          <a:xfrm>
+            <a:off x="822960" y="5138928"/>
+            <a:ext cx="3017520" cy="566928"/>
+          </a:xfrm>
+          <a:prstGeom prst="rect">
+            <a:avLst/>
+          </a:prstGeom>
+          <a:noFill/>
+          <a:ln/>
+        </p:spPr>
+        <p:txBody>
+          <a:bodyPr wrap="square" lIns="0" tIns="0" rIns="0" bIns="0" rtlCol="0" anchor="t"/>
+          <a:lstStyle/>
+          <a:p>
+            <a:pPr indent="0" marL="0">
+              <a:lnSpc>
+                <a:spcPct val="120000"/>
+              </a:lnSpc>
+              <a:buNone/>
+            </a:pPr>
+            <a:r>
+              <a:rPr lang="en-US" sz="1300" dirty="0">
+                <a:solidFill>
+                  <a:srgbClr val="4A5568"/>
+                </a:solidFill>
+                <a:latin typeface="Malgun Gothic" pitchFamily="34" charset="0"/>
+                <a:ea typeface="Malgun Gothic" pitchFamily="34" charset="-122"/>
+                <a:cs typeface="Malgun Gothic" pitchFamily="34" charset="-120"/>
+              </a:rPr>
+              <a:t>REST 라우팅 (JSON, 4 KB 제한)</a:t>
+            </a:r>
+            <a:endParaRPr lang="en-US" sz="1300" dirty="0"/>
+          </a:p>
+        </p:txBody>
+      </p:sp>
+      <p:sp>
+        <p:nvSpPr>
+          <p:cNvPr id="19" name="card-74"/>
+          <p:cNvSpPr/>
+          <p:nvPr/>
+        </p:nvSpPr>
+        <p:spPr>
+          <a:xfrm>
+            <a:off x="4251960" y="4572000"/>
+            <a:ext cx="3520440" cy="1234440"/>
+          </a:xfrm>
+          <a:prstGeom prst="roundRect">
+            <a:avLst>
+              <a:gd name="adj" fmla="val 8889"/>
+            </a:avLst>
+          </a:prstGeom>
+          <a:solidFill>
+            <a:srgbClr val="F3F5F8"/>
+          </a:solidFill>
+          <a:ln w="9525">
+            <a:solidFill>
+              <a:srgbClr val="F3F5F8"/>
+            </a:solidFill>
+            <a:prstDash val="solid"/>
+          </a:ln>
+        </p:spPr>
+      </p:sp>
+      <p:sp>
+        <p:nvSpPr>
+          <p:cNvPr id="20" name="text-75"/>
+          <p:cNvSpPr txBox="1"/>
+          <p:nvPr/>
+        </p:nvSpPr>
+        <p:spPr>
+          <a:xfrm>
+            <a:off x="4526280" y="4754880"/>
+            <a:ext cx="3017520" cy="347472"/>
+          </a:xfrm>
+          <a:prstGeom prst="rect">
+            <a:avLst/>
+          </a:prstGeom>
+          <a:noFill/>
+          <a:ln/>
+        </p:spPr>
+        <p:txBody>
+          <a:bodyPr wrap="square" lIns="0" tIns="0" rIns="0" bIns="0" rtlCol="0" anchor="t"/>
+          <a:lstStyle/>
+          <a:p>
+            <a:pPr indent="0" marL="0">
+              <a:buNone/>
+            </a:pPr>
+            <a:r>
+              <a:rPr lang="en-US" sz="1500" b="1" dirty="0">
+                <a:solidFill>
+                  <a:srgbClr val="2E7D4F"/>
+                </a:solidFill>
+                <a:latin typeface="Consolas" pitchFamily="34" charset="0"/>
+                <a:ea typeface="Consolas" pitchFamily="34" charset="-122"/>
+                <a:cs typeface="Consolas" pitchFamily="34" charset="-120"/>
+              </a:rPr>
+              <a:t>web/fleet.html</a:t>
+            </a:r>
+            <a:endParaRPr lang="en-US" sz="1500" dirty="0"/>
+          </a:p>
+        </p:txBody>
+      </p:sp>
+      <p:sp>
+        <p:nvSpPr>
+          <p:cNvPr id="21" name="text-76"/>
+          <p:cNvSpPr txBox="1"/>
+          <p:nvPr/>
+        </p:nvSpPr>
+        <p:spPr>
+          <a:xfrm>
+            <a:off x="4526280" y="5138928"/>
+            <a:ext cx="3017520" cy="566928"/>
+          </a:xfrm>
+          <a:prstGeom prst="rect">
+            <a:avLst/>
+          </a:prstGeom>
+          <a:noFill/>
+          <a:ln/>
+        </p:spPr>
+        <p:txBody>
+          <a:bodyPr wrap="square" lIns="0" tIns="0" rIns="0" bIns="0" rtlCol="0" anchor="t"/>
+          <a:lstStyle/>
+          <a:p>
+            <a:pPr indent="0" marL="0">
+              <a:lnSpc>
+                <a:spcPct val="120000"/>
+              </a:lnSpc>
+              <a:buNone/>
+            </a:pPr>
+            <a:r>
+              <a:rPr lang="en-US" sz="1300" dirty="0">
+                <a:solidFill>
+                  <a:srgbClr val="4A5568"/>
+                </a:solidFill>
+                <a:latin typeface="Malgun Gothic" pitchFamily="34" charset="0"/>
+                <a:ea typeface="Malgun Gothic" pitchFamily="34" charset="-122"/>
+                <a:cs typeface="Malgun Gothic" pitchFamily="34" charset="-120"/>
+              </a:rPr>
+              <a:t>Canvas 지도 · 경로, 500 ms 폴링</a:t>
+            </a:r>
+            <a:endParaRPr lang="en-US" sz="1300" dirty="0"/>
+          </a:p>
+        </p:txBody>
+      </p:sp>
+      <p:sp>
+        <p:nvSpPr>
+          <p:cNvPr id="22" name="card-77"/>
+          <p:cNvSpPr/>
+          <p:nvPr/>
+        </p:nvSpPr>
+        <p:spPr>
+          <a:xfrm>
+            <a:off x="8183880" y="1737360"/>
+            <a:ext cx="3456432" cy="4069080"/>
+          </a:xfrm>
+          <a:prstGeom prst="roundRect">
+            <a:avLst>
+              <a:gd name="adj" fmla="val 3175"/>
+            </a:avLst>
+          </a:prstGeom>
+          <a:solidFill>
+            <a:srgbClr val="14213D"/>
+          </a:solidFill>
+          <a:ln w="9525">
+            <a:solidFill>
+              <a:srgbClr val="14213D"/>
+            </a:solidFill>
+            <a:prstDash val="solid"/>
+          </a:ln>
+        </p:spPr>
+      </p:sp>
+      <p:sp>
+        <p:nvSpPr>
+          <p:cNvPr id="23" name="text-78"/>
+          <p:cNvSpPr txBox="1"/>
+          <p:nvPr/>
+        </p:nvSpPr>
+        <p:spPr>
+          <a:xfrm>
+            <a:off x="8503920" y="2103120"/>
+            <a:ext cx="2834640" cy="1005840"/>
+          </a:xfrm>
+          <a:prstGeom prst="rect">
+            <a:avLst/>
+          </a:prstGeom>
+          <a:noFill/>
+          <a:ln/>
+        </p:spPr>
+        <p:txBody>
+          <a:bodyPr wrap="square" lIns="0" tIns="0" rIns="0" bIns="0" rtlCol="0" anchor="t"/>
+          <a:lstStyle/>
+          <a:p>
+            <a:pPr indent="0" marL="0">
+              <a:buNone/>
+            </a:pPr>
+            <a:r>
+              <a:rPr lang="en-US" sz="6000" b="1" dirty="0">
+                <a:solidFill>
+                  <a:srgbClr val="F2A65A"/>
+                </a:solidFill>
+                <a:latin typeface="Consolas" pitchFamily="34" charset="0"/>
+                <a:ea typeface="Consolas" pitchFamily="34" charset="-122"/>
+                <a:cs typeface="Consolas" pitchFamily="34" charset="-120"/>
+              </a:rPr>
+              <a:t>113</a:t>
+            </a:r>
+            <a:endParaRPr lang="en-US" sz="6000" dirty="0"/>
+          </a:p>
+        </p:txBody>
+      </p:sp>
+      <p:sp>
+        <p:nvSpPr>
+          <p:cNvPr id="24" name="text-79"/>
+          <p:cNvSpPr txBox="1"/>
+          <p:nvPr/>
+        </p:nvSpPr>
+        <p:spPr>
+          <a:xfrm>
+            <a:off x="8503920" y="3200400"/>
+            <a:ext cx="2834640" cy="411480"/>
+          </a:xfrm>
+          <a:prstGeom prst="rect">
+            <a:avLst/>
+          </a:prstGeom>
+          <a:noFill/>
+          <a:ln/>
+        </p:spPr>
+        <p:txBody>
+          <a:bodyPr wrap="square" lIns="0" tIns="0" rIns="0" bIns="0" rtlCol="0" anchor="t"/>
+          <a:lstStyle/>
+          <a:p>
+            <a:pPr indent="0" marL="0">
+              <a:buNone/>
+            </a:pPr>
+            <a:r>
+              <a:rPr lang="en-US" sz="1800" b="1" dirty="0">
+                <a:solidFill>
+                  <a:srgbClr val="F6F7F4"/>
+                </a:solidFill>
+                <a:latin typeface="Malgun Gothic" pitchFamily="34" charset="0"/>
+                <a:ea typeface="Malgun Gothic" pitchFamily="34" charset="-122"/>
+                <a:cs typeface="Malgun Gothic" pitchFamily="34" charset="-120"/>
+              </a:rPr>
+              <a:t>pytest, DDS 없이 수 초</a:t>
+            </a:r>
+            <a:endParaRPr lang="en-US" sz="1800" dirty="0"/>
+          </a:p>
+        </p:txBody>
+      </p:sp>
+      <p:sp>
+        <p:nvSpPr>
+          <p:cNvPr id="25" name="text-80"/>
+          <p:cNvSpPr txBox="1"/>
+          <p:nvPr/>
+        </p:nvSpPr>
+        <p:spPr>
+          <a:xfrm>
+            <a:off x="8503920" y="3703320"/>
+            <a:ext cx="2834640" cy="1737360"/>
+          </a:xfrm>
+          <a:prstGeom prst="rect">
+            <a:avLst/>
+          </a:prstGeom>
+          <a:noFill/>
+          <a:ln/>
+        </p:spPr>
+        <p:txBody>
+          <a:bodyPr wrap="square" lIns="0" tIns="0" rIns="0" bIns="0" rtlCol="0" anchor="t"/>
+          <a:lstStyle/>
+          <a:p>
+            <a:pPr indent="0" marL="0">
+              <a:lnSpc>
+                <a:spcPct val="130000"/>
+              </a:lnSpc>
+              <a:buNone/>
+            </a:pPr>
+            <a:r>
+              <a:rPr lang="en-US" sz="1400" dirty="0">
+                <a:solidFill>
+                  <a:srgbClr val="C9D3E3"/>
+                </a:solidFill>
+                <a:latin typeface="Malgun Gothic" pitchFamily="34" charset="0"/>
+                <a:ea typeface="Malgun Gothic" pitchFamily="34" charset="-122"/>
+                <a:cs typeface="Malgun Gothic" pitchFamily="34" charset="-120"/>
+              </a:rPr>
+              <a:t>교통 규칙은 입력이 좌표·경로 점뿐인 순수 함수. 정면 교차·후진 한계를 좌표만으로 재현한다.</a:t>
+            </a:r>
+            <a:endParaRPr lang="en-US" sz="1400" dirty="0"/>
+          </a:p>
+        </p:txBody>
+      </p:sp>
+      <p:sp>
+        <p:nvSpPr>
+          <p:cNvPr id="25" name="Slide Number Placeholder 0"/>
+          <p:cNvSpPr>
+            <a:spLocks noGrp="1"/>
+          </p:cNvSpPr>
+          <p:nvPr>
+            <p:ph type="sldNum" sz="quarter" idx="4294967295"/>
+          </p:nvPr>
+        </p:nvSpPr>
+        <p:spPr>
+          <a:xfrm>
+            <a:off x="11183112" y="6355080"/>
+            <a:ext cx="457200" cy="274320"/>
+          </a:xfrm>
+          <a:prstGeom prst="rect">
+            <a:avLst/>
+          </a:prstGeom>
+          <a:extLst>
+            <a:ext uri="{C572A759-6A51-4108-AA02-DFA0A04FC94B}">
+              <ma14:wrappingTextBoxFlag xmlns:ma14="http://schemas.microsoft.com/office/mac/drawingml/2011/main" val="0"/>
+            </a:ext>
+          </a:extLst>
+        </p:spPr>
+        <p:txBody>
+          <a:bodyPr/>
+          <a:lstStyle>
+            <a:lvl1pPr>
+              <a:defRPr sz="1000">
+                <a:solidFill>
+                  <a:srgbClr val="8A94A6"/>
+                </a:solidFill>
+                <a:latin typeface="Malgun Gothic"/>
+                <a:ea typeface="Malgun Gothic"/>
+                <a:cs typeface="Malgun Gothic"/>
+              </a:defRPr>
+            </a:lvl1pPr>
+          </a:lstStyle>
+          <a:p>
+            <a:pPr algn="r"/>
+            <a:fld id="{F7021451-1387-4CA6-816F-3879F97B5CBC}" type="slidenum">
+              <a:rPr b="0" lang="en-US"/>
+              <a:t>7</a:t>
+            </a:fld>
+            <a:endParaRPr lang="en-US"/>
+          </a:p>
+        </p:txBody>
+      </p:sp>
+    </p:spTree>
+  </p:cSld>
+  <p:clrMapOvr>
+    <a:masterClrMapping/>
+  </p:clrMapOvr>
+</p:sld>
+</file>
+
+<file path=ppt/slides/slide8.xml><?xml version="1.0" encoding="utf-8"?>
+<p:sld xmlns:a="http://schemas.openxmlformats.org/drawingml/2006/main" xmlns:r="http://schemas.openxmlformats.org/officeDocument/2006/relationships" xmlns:p="http://schemas.openxmlformats.org/presentationml/2006/main">
+  <p:cSld name="Slide 8">
+    <p:spTree>
+      <p:nvGrpSpPr>
+        <p:cNvPr id="1" name=""/>
+        <p:cNvGrpSpPr/>
+        <p:nvPr/>
+      </p:nvGrpSpPr>
+      <p:grpSpPr>
+        <a:xfrm>
+          <a:off x="0" y="0"/>
+          <a:ext cx="0" cy="0"/>
+          <a:chOff x="0" y="0"/>
+          <a:chExt cx="0" cy="0"/>
+        </a:xfrm>
+      </p:grpSpPr>
+      <p:sp>
+        <p:nvSpPr>
+          <p:cNvPr id="2" name="Text 0"/>
+          <p:cNvSpPr/>
+          <p:nvPr>
+            <p:ph idx="100" type="body" hasCustomPrompt="1"/>
+          </p:nvPr>
+        </p:nvSpPr>
+        <p:spPr>
+          <a:xfrm>
+            <a:off x="548640" y="384048"/>
+            <a:ext cx="11094415" cy="329184"/>
+          </a:xfrm>
+          <a:prstGeom prst="rect">
+            <a:avLst/>
+          </a:prstGeom>
+          <a:noFill/>
+          <a:ln/>
+        </p:spPr>
+        <p:txBody>
+          <a:bodyPr wrap="square" lIns="0" tIns="0" rIns="0" bIns="0" rtlCol="0" anchor="ctr"/>
+          <a:lstStyle/>
+          <a:p>
+            <a:pPr indent="0" marL="0">
+              <a:buNone/>
+            </a:pPr>
+            <a:r>
+              <a:rPr lang="en-US" sz="1200" spc="200" kern="0" dirty="0">
+                <a:solidFill>
+                  <a:srgbClr val="2F6FDB"/>
+                </a:solidFill>
+                <a:latin typeface="Consolas" pitchFamily="34" charset="0"/>
+                <a:ea typeface="Consolas" pitchFamily="34" charset="-122"/>
+                <a:cs typeface="Consolas" pitchFamily="34" charset="-120"/>
+              </a:rPr>
               <a:t>03 · 위치 찾기</a:t>
             </a:r>
             <a:endParaRPr lang="en-US" sz="1200" dirty="0"/>
@@ -17484,7 +20942,7 @@
       </p:sp>
       <p:sp>
         <p:nvSpPr>
-          <p:cNvPr id="4" name="card-71"/>
+          <p:cNvPr id="4" name="card-81"/>
           <p:cNvSpPr/>
           <p:nvPr/>
         </p:nvSpPr>
@@ -17511,7 +20969,7 @@
       </p:sp>
       <p:sp>
         <p:nvSpPr>
-          <p:cNvPr id="5" name="text-72"/>
+          <p:cNvPr id="5" name="text-82"/>
           <p:cNvSpPr txBox="1"/>
           <p:nvPr/>
         </p:nvSpPr>
@@ -17550,7 +21008,7 @@
       </p:sp>
       <p:sp>
         <p:nvSpPr>
-          <p:cNvPr id="6" name="text-73"/>
+          <p:cNvPr id="6" name="text-83"/>
           <p:cNvSpPr txBox="1"/>
           <p:nvPr/>
         </p:nvSpPr>
@@ -17589,7 +21047,7 @@
       </p:sp>
       <p:sp>
         <p:nvSpPr>
-          <p:cNvPr id="7" name="arrow-74"/>
+          <p:cNvPr id="7" name="arrow-84"/>
           <p:cNvSpPr/>
           <p:nvPr/>
         </p:nvSpPr>
@@ -17614,7 +21072,7 @@
       </p:sp>
       <p:sp>
         <p:nvSpPr>
-          <p:cNvPr id="8" name="card-75"/>
+          <p:cNvPr id="8" name="card-85"/>
           <p:cNvSpPr/>
           <p:nvPr/>
         </p:nvSpPr>
@@ -17641,7 +21099,7 @@
       </p:sp>
       <p:sp>
         <p:nvSpPr>
-          <p:cNvPr id="9" name="text-76"/>
+          <p:cNvPr id="9" name="text-86"/>
           <p:cNvSpPr txBox="1"/>
           <p:nvPr/>
         </p:nvSpPr>
@@ -17680,7 +21138,7 @@
       </p:sp>
       <p:sp>
         <p:nvSpPr>
-          <p:cNvPr id="10" name="text-77"/>
+          <p:cNvPr id="10" name="text-87"/>
           <p:cNvSpPr txBox="1"/>
           <p:nvPr/>
         </p:nvSpPr>
@@ -17719,7 +21177,7 @@
       </p:sp>
       <p:sp>
         <p:nvSpPr>
-          <p:cNvPr id="11" name="arrow-78"/>
+          <p:cNvPr id="11" name="arrow-88"/>
           <p:cNvSpPr/>
           <p:nvPr/>
         </p:nvSpPr>
@@ -17744,7 +21202,7 @@
       </p:sp>
       <p:sp>
         <p:nvSpPr>
-          <p:cNvPr id="12" name="card-79"/>
+          <p:cNvPr id="12" name="card-89"/>
           <p:cNvSpPr/>
           <p:nvPr/>
         </p:nvSpPr>
@@ -17771,7 +21229,7 @@
       </p:sp>
       <p:sp>
         <p:nvSpPr>
-          <p:cNvPr id="13" name="text-80"/>
+          <p:cNvPr id="13" name="text-90"/>
           <p:cNvSpPr txBox="1"/>
           <p:nvPr/>
         </p:nvSpPr>
@@ -17810,7 +21268,7 @@
       </p:sp>
       <p:sp>
         <p:nvSpPr>
-          <p:cNvPr id="14" name="text-81"/>
+          <p:cNvPr id="14" name="text-91"/>
           <p:cNvSpPr txBox="1"/>
           <p:nvPr/>
         </p:nvSpPr>
@@ -17849,7 +21307,7 @@
       </p:sp>
       <p:sp>
         <p:nvSpPr>
-          <p:cNvPr id="15" name="text-82"/>
+          <p:cNvPr id="15" name="text-92"/>
           <p:cNvSpPr txBox="1"/>
           <p:nvPr/>
         </p:nvSpPr>
@@ -17888,7 +21346,7 @@
       </p:sp>
       <p:sp>
         <p:nvSpPr>
-          <p:cNvPr id="16" name="card-83"/>
+          <p:cNvPr id="16" name="card-93"/>
           <p:cNvSpPr/>
           <p:nvPr/>
         </p:nvSpPr>
@@ -17915,7 +21373,7 @@
       </p:sp>
       <p:sp>
         <p:nvSpPr>
-          <p:cNvPr id="17" name="text-84"/>
+          <p:cNvPr id="17" name="text-94"/>
           <p:cNvSpPr txBox="1"/>
           <p:nvPr/>
         </p:nvSpPr>
@@ -17954,7 +21412,7 @@
       </p:sp>
       <p:sp>
         <p:nvSpPr>
-          <p:cNvPr id="18" name="text-85"/>
+          <p:cNvPr id="18" name="text-95"/>
           <p:cNvSpPr txBox="1"/>
           <p:nvPr/>
         </p:nvSpPr>
@@ -17993,7 +21451,7 @@
       </p:sp>
       <p:graphicFrame>
         <p:nvGraphicFramePr>
-          <p:cNvPr id="8" name="table-86"/>
+          <p:cNvPr id="9" name="table-96"/>
           <p:cNvGraphicFramePr>
             <a:graphicFrameLocks noGrp="1"/>
           </p:cNvGraphicFramePr>
@@ -19054,7 +22512,7 @@
       </p:graphicFrame>
       <p:sp>
         <p:nvSpPr>
-          <p:cNvPr id="20" name="text-87"/>
+          <p:cNvPr id="20" name="text-97"/>
           <p:cNvSpPr txBox="1"/>
           <p:nvPr/>
         </p:nvSpPr>
@@ -19133,710 +22591,6 @@
             <a:pPr algn="r"/>
             <a:fld id="{F7021451-1387-4CA6-816F-3879F97B5CBC}" type="slidenum">
               <a:rPr b="0" lang="en-US"/>
-              <a:t>7</a:t>
-            </a:fld>
-            <a:endParaRPr lang="en-US"/>
-          </a:p>
-        </p:txBody>
-      </p:sp>
-    </p:spTree>
-  </p:cSld>
-  <p:clrMapOvr>
-    <a:masterClrMapping/>
-  </p:clrMapOvr>
-</p:sld>
-</file>
-
-<file path=ppt/slides/slide8.xml><?xml version="1.0" encoding="utf-8"?>
-<p:sld xmlns:a="http://schemas.openxmlformats.org/drawingml/2006/main" xmlns:r="http://schemas.openxmlformats.org/officeDocument/2006/relationships" xmlns:p="http://schemas.openxmlformats.org/presentationml/2006/main">
-  <p:cSld name="Slide 8">
-    <p:spTree>
-      <p:nvGrpSpPr>
-        <p:cNvPr id="1" name=""/>
-        <p:cNvGrpSpPr/>
-        <p:nvPr/>
-      </p:nvGrpSpPr>
-      <p:grpSpPr>
-        <a:xfrm>
-          <a:off x="0" y="0"/>
-          <a:ext cx="0" cy="0"/>
-          <a:chOff x="0" y="0"/>
-          <a:chExt cx="0" cy="0"/>
-        </a:xfrm>
-      </p:grpSpPr>
-      <p:sp>
-        <p:nvSpPr>
-          <p:cNvPr id="2" name="Text 0"/>
-          <p:cNvSpPr/>
-          <p:nvPr>
-            <p:ph idx="100" type="body" hasCustomPrompt="1"/>
-          </p:nvPr>
-        </p:nvSpPr>
-        <p:spPr>
-          <a:xfrm>
-            <a:off x="548640" y="384048"/>
-            <a:ext cx="11094415" cy="329184"/>
-          </a:xfrm>
-          <a:prstGeom prst="rect">
-            <a:avLst/>
-          </a:prstGeom>
-          <a:noFill/>
-          <a:ln/>
-        </p:spPr>
-        <p:txBody>
-          <a:bodyPr wrap="square" lIns="0" tIns="0" rIns="0" bIns="0" rtlCol="0" anchor="ctr"/>
-          <a:lstStyle/>
-          <a:p>
-            <a:pPr indent="0" marL="0">
-              <a:buNone/>
-            </a:pPr>
-            <a:r>
-              <a:rPr lang="en-US" sz="1200" spc="200" kern="0" dirty="0">
-                <a:solidFill>
-                  <a:srgbClr val="2F6FDB"/>
-                </a:solidFill>
-                <a:latin typeface="Consolas" pitchFamily="34" charset="0"/>
-                <a:ea typeface="Consolas" pitchFamily="34" charset="-122"/>
-                <a:cs typeface="Consolas" pitchFamily="34" charset="-120"/>
-              </a:rPr>
-              <a:t>03 · 교통 정리</a:t>
-            </a:r>
-            <a:endParaRPr lang="en-US" sz="1200" dirty="0"/>
-          </a:p>
-        </p:txBody>
-      </p:sp>
-      <p:sp>
-        <p:nvSpPr>
-          <p:cNvPr id="3" name="Text 0"/>
-          <p:cNvSpPr/>
-          <p:nvPr>
-            <p:ph idx="101" type="title" hasCustomPrompt="1"/>
-          </p:nvPr>
-        </p:nvSpPr>
-        <p:spPr>
-          <a:xfrm>
-            <a:off x="548640" y="731520"/>
-            <a:ext cx="11094415" cy="685800"/>
-          </a:xfrm>
-          <a:prstGeom prst="rect">
-            <a:avLst/>
-          </a:prstGeom>
-          <a:noFill/>
-          <a:ln/>
-        </p:spPr>
-        <p:txBody>
-          <a:bodyPr wrap="square" lIns="0" tIns="0" rIns="0" bIns="0" rtlCol="0" anchor="ctr"/>
-          <a:lstStyle/>
-          <a:p>
-            <a:pPr algn="l" indent="0" marL="0">
-              <a:buNone/>
-            </a:pPr>
-            <a:r>
-              <a:rPr lang="en-US" sz="2800" b="1" dirty="0">
-                <a:solidFill>
-                  <a:srgbClr val="14213D"/>
-                </a:solidFill>
-                <a:latin typeface="Malgun Gothic" pitchFamily="34" charset="0"/>
-                <a:ea typeface="Malgun Gothic" pitchFamily="34" charset="-122"/>
-                <a:cs typeface="Malgun Gothic" pitchFamily="34" charset="-120"/>
-              </a:rPr>
-              <a:t>예약에서 양보로: 안전하지만 답답한 v1을 버렸다</a:t>
-            </a:r>
-            <a:endParaRPr lang="en-US" sz="2800" dirty="0"/>
-          </a:p>
-        </p:txBody>
-      </p:sp>
-      <p:sp>
-        <p:nvSpPr>
-          <p:cNvPr id="4" name="card-88"/>
-          <p:cNvSpPr/>
-          <p:nvPr/>
-        </p:nvSpPr>
-        <p:spPr>
-          <a:xfrm>
-            <a:off x="548640" y="1737360"/>
-            <a:ext cx="5120640" cy="4343400"/>
-          </a:xfrm>
-          <a:prstGeom prst="roundRect">
-            <a:avLst>
-              <a:gd name="adj" fmla="val 2526"/>
-            </a:avLst>
-          </a:prstGeom>
-          <a:solidFill>
-            <a:srgbClr val="F3F5F8"/>
-          </a:solidFill>
-          <a:ln w="9525">
-            <a:solidFill>
-              <a:srgbClr val="F3F5F8"/>
-            </a:solidFill>
-            <a:prstDash val="solid"/>
-          </a:ln>
-        </p:spPr>
-      </p:sp>
-      <p:sp>
-        <p:nvSpPr>
-          <p:cNvPr id="5" name="text-89"/>
-          <p:cNvSpPr txBox="1"/>
-          <p:nvPr/>
-        </p:nvSpPr>
-        <p:spPr>
-          <a:xfrm>
-            <a:off x="914400" y="1965960"/>
-            <a:ext cx="4389120" cy="320040"/>
-          </a:xfrm>
-          <a:prstGeom prst="rect">
-            <a:avLst/>
-          </a:prstGeom>
-          <a:noFill/>
-          <a:ln/>
-        </p:spPr>
-        <p:txBody>
-          <a:bodyPr wrap="square" lIns="0" tIns="0" rIns="0" bIns="0" rtlCol="0" anchor="t"/>
-          <a:lstStyle/>
-          <a:p>
-            <a:pPr indent="0" marL="0">
-              <a:buNone/>
-            </a:pPr>
-            <a:r>
-              <a:rPr lang="en-US" sz="1300" dirty="0">
-                <a:solidFill>
-                  <a:srgbClr val="8A94A6"/>
-                </a:solidFill>
-                <a:latin typeface="Consolas" pitchFamily="34" charset="0"/>
-                <a:ea typeface="Consolas" pitchFamily="34" charset="-122"/>
-                <a:cs typeface="Consolas" pitchFamily="34" charset="-120"/>
-              </a:rPr>
-              <a:t>v1 · TrafficGate</a:t>
-            </a:r>
-            <a:endParaRPr lang="en-US" sz="1300" dirty="0"/>
-          </a:p>
-        </p:txBody>
-      </p:sp>
-      <p:sp>
-        <p:nvSpPr>
-          <p:cNvPr id="6" name="text-90"/>
-          <p:cNvSpPr txBox="1"/>
-          <p:nvPr/>
-        </p:nvSpPr>
-        <p:spPr>
-          <a:xfrm>
-            <a:off x="914400" y="2331720"/>
-            <a:ext cx="4389120" cy="457200"/>
-          </a:xfrm>
-          <a:prstGeom prst="rect">
-            <a:avLst/>
-          </a:prstGeom>
-          <a:noFill/>
-          <a:ln/>
-        </p:spPr>
-        <p:txBody>
-          <a:bodyPr wrap="square" lIns="0" tIns="0" rIns="0" bIns="0" rtlCol="0" anchor="t"/>
-          <a:lstStyle/>
-          <a:p>
-            <a:pPr indent="0" marL="0">
-              <a:buNone/>
-            </a:pPr>
-            <a:r>
-              <a:rPr lang="en-US" sz="2000" b="1" dirty="0">
-                <a:solidFill>
-                  <a:srgbClr val="14213D"/>
-                </a:solidFill>
-                <a:latin typeface="Malgun Gothic" pitchFamily="34" charset="0"/>
-                <a:ea typeface="Malgun Gothic" pitchFamily="34" charset="-122"/>
-                <a:cs typeface="Malgun Gothic" pitchFamily="34" charset="-120"/>
-              </a:rPr>
-              <a:t>칸 열쇠 (출발 전 예약)</a:t>
-            </a:r>
-            <a:endParaRPr lang="en-US" sz="2000" dirty="0"/>
-          </a:p>
-        </p:txBody>
-      </p:sp>
-      <p:sp>
-        <p:nvSpPr>
-          <p:cNvPr id="7" name="text-91"/>
-          <p:cNvSpPr txBox="1"/>
-          <p:nvPr/>
-        </p:nvSpPr>
-        <p:spPr>
-          <a:xfrm>
-            <a:off x="914400" y="2926080"/>
-            <a:ext cx="4389120" cy="2103120"/>
-          </a:xfrm>
-          <a:prstGeom prst="rect">
-            <a:avLst/>
-          </a:prstGeom>
-          <a:noFill/>
-          <a:ln/>
-        </p:spPr>
-        <p:txBody>
-          <a:bodyPr wrap="square" lIns="0" tIns="0" rIns="0" bIns="0" rtlCol="0" anchor="t"/>
-          <a:lstStyle/>
-          <a:p>
-            <a:pPr marL="342900" indent="-342900">
-              <a:lnSpc>
-                <a:spcPct val="120000"/>
-              </a:lnSpc>
-              <a:spcAft>
-                <a:spcPts val="600"/>
-              </a:spcAft>
-              <a:buSzPct val="100000"/>
-              <a:buChar char="•"/>
-            </a:pPr>
-            <a:r>
-              <a:rPr lang="en-US" sz="1500" dirty="0">
-                <a:solidFill>
-                  <a:srgbClr val="4A5568"/>
-                </a:solidFill>
-                <a:latin typeface="Malgun Gothic" pitchFamily="34" charset="0"/>
-                <a:ea typeface="Malgun Gothic" pitchFamily="34" charset="-122"/>
-                <a:cs typeface="Malgun Gothic" pitchFamily="34" charset="-120"/>
-              </a:rPr>
-              <a:t>지도를 칸 4개 + 좁은 통로 2개로 분할</a:t>
-            </a:r>
-            <a:endParaRPr lang="en-US" sz="1500" dirty="0"/>
-          </a:p>
-          <a:p>
-            <a:pPr marL="342900" indent="-342900">
-              <a:lnSpc>
-                <a:spcPct val="120000"/>
-              </a:lnSpc>
-              <a:spcAft>
-                <a:spcPts val="600"/>
-              </a:spcAft>
-              <a:buSzPct val="100000"/>
-              <a:buChar char="•"/>
-            </a:pPr>
-            <a:r>
-              <a:rPr lang="en-US" sz="1500" dirty="0">
-                <a:solidFill>
-                  <a:srgbClr val="4A5568"/>
-                </a:solidFill>
-                <a:latin typeface="Malgun Gothic" pitchFamily="34" charset="0"/>
-                <a:ea typeface="Malgun Gothic" pitchFamily="34" charset="-122"/>
-                <a:cs typeface="Malgun Gothic" pitchFamily="34" charset="-120"/>
-              </a:rPr>
-              <a:t>칸 그래프 BFS로 지나갈 칸 계산</a:t>
-            </a:r>
-            <a:endParaRPr lang="en-US" sz="1500" dirty="0"/>
-          </a:p>
-          <a:p>
-            <a:pPr marL="342900" indent="-342900">
-              <a:lnSpc>
-                <a:spcPct val="120000"/>
-              </a:lnSpc>
-              <a:spcAft>
-                <a:spcPts val="600"/>
-              </a:spcAft>
-              <a:buSzPct val="100000"/>
-              <a:buChar char="•"/>
-            </a:pPr>
-            <a:r>
-              <a:rPr lang="en-US" sz="1500" dirty="0">
-                <a:solidFill>
-                  <a:srgbClr val="4A5568"/>
-                </a:solidFill>
-                <a:latin typeface="Malgun Gothic" pitchFamily="34" charset="0"/>
-                <a:ea typeface="Malgun Gothic" pitchFamily="34" charset="-122"/>
-                <a:cs typeface="Malgun Gothic" pitchFamily="34" charset="-120"/>
-              </a:rPr>
-              <a:t>열쇠를 all-or-nothing으로 획득, 아니면 FIFO 대기</a:t>
-            </a:r>
-            <a:endParaRPr lang="en-US" sz="1500" dirty="0"/>
-          </a:p>
-          <a:p>
-            <a:pPr marL="342900" indent="-342900">
-              <a:lnSpc>
-                <a:spcPct val="120000"/>
-              </a:lnSpc>
-              <a:spcAft>
-                <a:spcPts val="600"/>
-              </a:spcAft>
-              <a:buSzPct val="100000"/>
-              <a:buChar char="•"/>
-            </a:pPr>
-            <a:r>
-              <a:rPr lang="en-US" sz="1500" dirty="0">
-                <a:solidFill>
-                  <a:srgbClr val="4A5568"/>
-                </a:solidFill>
-                <a:latin typeface="Malgun Gothic" pitchFamily="34" charset="0"/>
-                <a:ea typeface="Malgun Gothic" pitchFamily="34" charset="-122"/>
-                <a:cs typeface="Malgun Gothic" pitchFamily="34" charset="-120"/>
-              </a:rPr>
-              <a:t>hold-and-wait 없음 → 교착 불가</a:t>
-            </a:r>
-            <a:endParaRPr lang="en-US" sz="1500" dirty="0"/>
-          </a:p>
-        </p:txBody>
-      </p:sp>
-      <p:sp>
-        <p:nvSpPr>
-          <p:cNvPr id="8" name="text-92"/>
-          <p:cNvSpPr txBox="1"/>
-          <p:nvPr/>
-        </p:nvSpPr>
-        <p:spPr>
-          <a:xfrm>
-            <a:off x="914400" y="5212080"/>
-            <a:ext cx="4389120" cy="640080"/>
-          </a:xfrm>
-          <a:prstGeom prst="rect">
-            <a:avLst/>
-          </a:prstGeom>
-          <a:noFill/>
-          <a:ln/>
-        </p:spPr>
-        <p:txBody>
-          <a:bodyPr wrap="square" lIns="0" tIns="0" rIns="0" bIns="0" rtlCol="0" anchor="t"/>
-          <a:lstStyle/>
-          <a:p>
-            <a:pPr indent="0" marL="0">
-              <a:buNone/>
-            </a:pPr>
-            <a:r>
-              <a:rPr lang="en-US" sz="1500" b="1" dirty="0">
-                <a:solidFill>
-                  <a:srgbClr val="A85A12"/>
-                </a:solidFill>
-                <a:latin typeface="Malgun Gothic" pitchFamily="34" charset="0"/>
-                <a:ea typeface="Malgun Gothic" pitchFamily="34" charset="-122"/>
-                <a:cs typeface="Malgun Gothic" pitchFamily="34" charset="-120"/>
-              </a:rPr>
-              <a:t>한계: 경로가 조금만 겹쳐도 robot2가 출발조차 안 함</a:t>
-            </a:r>
-            <a:endParaRPr lang="en-US" sz="1500" dirty="0"/>
-          </a:p>
-        </p:txBody>
-      </p:sp>
-      <p:sp>
-        <p:nvSpPr>
-          <p:cNvPr id="9" name="v1-v2"/>
-          <p:cNvSpPr/>
-          <p:nvPr/>
-        </p:nvSpPr>
-        <p:spPr>
-          <a:xfrm>
-            <a:off x="5843016" y="3703320"/>
-            <a:ext cx="457200" cy="384048"/>
-          </a:xfrm>
-          <a:prstGeom prst="rightArrow">
-            <a:avLst/>
-          </a:prstGeom>
-          <a:solidFill>
-            <a:srgbClr val="2F6FDB"/>
-          </a:solidFill>
-          <a:ln w="12700">
-            <a:solidFill>
-              <a:srgbClr val="2F6FDB"/>
-            </a:solidFill>
-            <a:prstDash val="solid"/>
-          </a:ln>
-        </p:spPr>
-      </p:sp>
-      <p:sp>
-        <p:nvSpPr>
-          <p:cNvPr id="10" name="card-93"/>
-          <p:cNvSpPr/>
-          <p:nvPr/>
-        </p:nvSpPr>
-        <p:spPr>
-          <a:xfrm>
-            <a:off x="6519672" y="1737360"/>
-            <a:ext cx="5120640" cy="4343400"/>
-          </a:xfrm>
-          <a:prstGeom prst="roundRect">
-            <a:avLst>
-              <a:gd name="adj" fmla="val 2526"/>
-            </a:avLst>
-          </a:prstGeom>
-          <a:solidFill>
-            <a:srgbClr val="14213D"/>
-          </a:solidFill>
-          <a:ln w="9525">
-            <a:solidFill>
-              <a:srgbClr val="14213D"/>
-            </a:solidFill>
-            <a:prstDash val="solid"/>
-          </a:ln>
-        </p:spPr>
-      </p:sp>
-      <p:sp>
-        <p:nvSpPr>
-          <p:cNvPr id="11" name="text-94"/>
-          <p:cNvSpPr txBox="1"/>
-          <p:nvPr/>
-        </p:nvSpPr>
-        <p:spPr>
-          <a:xfrm>
-            <a:off x="6885432" y="1965960"/>
-            <a:ext cx="4389120" cy="320040"/>
-          </a:xfrm>
-          <a:prstGeom prst="rect">
-            <a:avLst/>
-          </a:prstGeom>
-          <a:noFill/>
-          <a:ln/>
-        </p:spPr>
-        <p:txBody>
-          <a:bodyPr wrap="square" lIns="0" tIns="0" rIns="0" bIns="0" rtlCol="0" anchor="t"/>
-          <a:lstStyle/>
-          <a:p>
-            <a:pPr indent="0" marL="0">
-              <a:buNone/>
-            </a:pPr>
-            <a:r>
-              <a:rPr lang="en-US" sz="1300" dirty="0">
-                <a:solidFill>
-                  <a:srgbClr val="8FB3F0"/>
-                </a:solidFill>
-                <a:latin typeface="Consolas" pitchFamily="34" charset="0"/>
-                <a:ea typeface="Consolas" pitchFamily="34" charset="-122"/>
-                <a:cs typeface="Consolas" pitchFamily="34" charset="-120"/>
-              </a:rPr>
-              <a:t>v2 · YieldRule (현재)</a:t>
-            </a:r>
-            <a:endParaRPr lang="en-US" sz="1300" dirty="0"/>
-          </a:p>
-        </p:txBody>
-      </p:sp>
-      <p:sp>
-        <p:nvSpPr>
-          <p:cNvPr id="12" name="text-95"/>
-          <p:cNvSpPr txBox="1"/>
-          <p:nvPr/>
-        </p:nvSpPr>
-        <p:spPr>
-          <a:xfrm>
-            <a:off x="6885432" y="2331720"/>
-            <a:ext cx="4389120" cy="457200"/>
-          </a:xfrm>
-          <a:prstGeom prst="rect">
-            <a:avLst/>
-          </a:prstGeom>
-          <a:noFill/>
-          <a:ln/>
-        </p:spPr>
-        <p:txBody>
-          <a:bodyPr wrap="square" lIns="0" tIns="0" rIns="0" bIns="0" rtlCol="0" anchor="t"/>
-          <a:lstStyle/>
-          <a:p>
-            <a:pPr indent="0" marL="0">
-              <a:buNone/>
-            </a:pPr>
-            <a:r>
-              <a:rPr lang="en-US" sz="2000" b="1" dirty="0">
-                <a:solidFill>
-                  <a:srgbClr val="F6F7F4"/>
-                </a:solidFill>
-                <a:latin typeface="Malgun Gothic" pitchFamily="34" charset="0"/>
-                <a:ea typeface="Malgun Gothic" pitchFamily="34" charset="-122"/>
-                <a:cs typeface="Malgun Gothic" pitchFamily="34" charset="-120"/>
-              </a:rPr>
-              <a:t>달리면서 양보</a:t>
-            </a:r>
-            <a:endParaRPr lang="en-US" sz="2000" dirty="0"/>
-          </a:p>
-        </p:txBody>
-      </p:sp>
-      <p:sp>
-        <p:nvSpPr>
-          <p:cNvPr id="13" name="text-96"/>
-          <p:cNvSpPr txBox="1"/>
-          <p:nvPr/>
-        </p:nvSpPr>
-        <p:spPr>
-          <a:xfrm>
-            <a:off x="6885432" y="2926080"/>
-            <a:ext cx="4389120" cy="2103120"/>
-          </a:xfrm>
-          <a:prstGeom prst="rect">
-            <a:avLst/>
-          </a:prstGeom>
-          <a:noFill/>
-          <a:ln/>
-        </p:spPr>
-        <p:txBody>
-          <a:bodyPr wrap="square" lIns="0" tIns="0" rIns="0" bIns="0" rtlCol="0" anchor="t"/>
-          <a:lstStyle/>
-          <a:p>
-            <a:pPr marL="342900" indent="-342900">
-              <a:lnSpc>
-                <a:spcPct val="120000"/>
-              </a:lnSpc>
-              <a:spcAft>
-                <a:spcPts val="600"/>
-              </a:spcAft>
-              <a:buSzPct val="100000"/>
-              <a:buChar char="•"/>
-            </a:pPr>
-            <a:r>
-              <a:rPr lang="en-US" sz="1500" dirty="0">
-                <a:solidFill>
-                  <a:srgbClr val="C9D3E3"/>
-                </a:solidFill>
-                <a:latin typeface="Malgun Gothic" pitchFamily="34" charset="0"/>
-                <a:ea typeface="Malgun Gothic" pitchFamily="34" charset="-122"/>
-                <a:cs typeface="Malgun Gothic" pitchFamily="34" charset="-120"/>
-              </a:rPr>
-              <a:t>0.2 s마다 두 로봇의 Nav2 계획 경로 비교</a:t>
-            </a:r>
-            <a:endParaRPr lang="en-US" sz="1500" dirty="0"/>
-          </a:p>
-          <a:p>
-            <a:pPr marL="342900" indent="-342900">
-              <a:lnSpc>
-                <a:spcPct val="120000"/>
-              </a:lnSpc>
-              <a:spcAft>
-                <a:spcPts val="600"/>
-              </a:spcAft>
-              <a:buSzPct val="100000"/>
-              <a:buChar char="•"/>
-            </a:pPr>
-            <a:r>
-              <a:rPr lang="en-US" sz="1500" dirty="0">
-                <a:solidFill>
-                  <a:srgbClr val="C9D3E3"/>
-                </a:solidFill>
-                <a:latin typeface="Malgun Gothic" pitchFamily="34" charset="0"/>
-                <a:ea typeface="Malgun Gothic" pitchFamily="34" charset="-122"/>
-                <a:cs typeface="Malgun Gothic" pitchFamily="34" charset="-120"/>
-              </a:rPr>
-              <a:t>고정 우선순위: robot1 먼저, robot2 양보</a:t>
-            </a:r>
-            <a:endParaRPr lang="en-US" sz="1500" dirty="0"/>
-          </a:p>
-          <a:p>
-            <a:pPr marL="342900" indent="-342900">
-              <a:lnSpc>
-                <a:spcPct val="120000"/>
-              </a:lnSpc>
-              <a:spcAft>
-                <a:spcPts val="600"/>
-              </a:spcAft>
-              <a:buSzPct val="100000"/>
-              <a:buChar char="•"/>
-            </a:pPr>
-            <a:r>
-              <a:rPr lang="en-US" sz="1500" dirty="0">
-                <a:solidFill>
-                  <a:srgbClr val="C9D3E3"/>
-                </a:solidFill>
-                <a:latin typeface="Malgun Gothic" pitchFamily="34" charset="0"/>
-                <a:ea typeface="Malgun Gothic" pitchFamily="34" charset="-122"/>
-                <a:cs typeface="Malgun Gothic" pitchFamily="34" charset="-120"/>
-              </a:rPr>
-              <a:t>겹치면 stop, 상대 경로 위면 back</a:t>
-            </a:r>
-            <a:endParaRPr lang="en-US" sz="1500" dirty="0"/>
-          </a:p>
-          <a:p>
-            <a:pPr marL="342900" indent="-342900">
-              <a:lnSpc>
-                <a:spcPct val="120000"/>
-              </a:lnSpc>
-              <a:spcAft>
-                <a:spcPts val="600"/>
-              </a:spcAft>
-              <a:buSzPct val="100000"/>
-              <a:buChar char="•"/>
-            </a:pPr>
-            <a:r>
-              <a:rPr lang="en-US" sz="1500" dirty="0">
-                <a:solidFill>
-                  <a:srgbClr val="C9D3E3"/>
-                </a:solidFill>
-                <a:latin typeface="Malgun Gothic" pitchFamily="34" charset="0"/>
-                <a:ea typeface="Malgun Gothic" pitchFamily="34" charset="-122"/>
-                <a:cs typeface="Malgun Gothic" pitchFamily="34" charset="-120"/>
-              </a:rPr>
-              <a:t>robot1이 지나가면 기억한 목적지로 자동 재출발</a:t>
-            </a:r>
-            <a:endParaRPr lang="en-US" sz="1500" dirty="0"/>
-          </a:p>
-        </p:txBody>
-      </p:sp>
-      <p:sp>
-        <p:nvSpPr>
-          <p:cNvPr id="14" name="text-97"/>
-          <p:cNvSpPr txBox="1"/>
-          <p:nvPr/>
-        </p:nvSpPr>
-        <p:spPr>
-          <a:xfrm>
-            <a:off x="6885432" y="5212080"/>
-            <a:ext cx="4389120" cy="640080"/>
-          </a:xfrm>
-          <a:prstGeom prst="rect">
-            <a:avLst/>
-          </a:prstGeom>
-          <a:noFill/>
-          <a:ln/>
-        </p:spPr>
-        <p:txBody>
-          <a:bodyPr wrap="square" lIns="0" tIns="0" rIns="0" bIns="0" rtlCol="0" anchor="t"/>
-          <a:lstStyle/>
-          <a:p>
-            <a:pPr indent="0" marL="0">
-              <a:buNone/>
-            </a:pPr>
-            <a:r>
-              <a:rPr lang="en-US" sz="1500" b="1" dirty="0">
-                <a:solidFill>
-                  <a:srgbClr val="F2A65A"/>
-                </a:solidFill>
-                <a:latin typeface="Malgun Gothic" pitchFamily="34" charset="0"/>
-                <a:ea typeface="Malgun Gothic" pitchFamily="34" charset="-122"/>
-                <a:cs typeface="Malgun Gothic" pitchFamily="34" charset="-120"/>
-              </a:rPr>
-              <a:t>둘이 같이 움직이다 부딪힐 때만 비킨다</a:t>
-            </a:r>
-            <a:endParaRPr lang="en-US" sz="1500" dirty="0"/>
-          </a:p>
-        </p:txBody>
-      </p:sp>
-      <p:sp>
-        <p:nvSpPr>
-          <p:cNvPr id="25" name="Slide Number Placeholder 0"/>
-          <p:cNvSpPr>
-            <a:spLocks noGrp="1"/>
-          </p:cNvSpPr>
-          <p:nvPr>
-            <p:ph type="sldNum" sz="quarter" idx="4294967295"/>
-          </p:nvPr>
-        </p:nvSpPr>
-        <p:spPr>
-          <a:xfrm>
-            <a:off x="11183112" y="6355080"/>
-            <a:ext cx="457200" cy="274320"/>
-          </a:xfrm>
-          <a:prstGeom prst="rect">
-            <a:avLst/>
-          </a:prstGeom>
-          <a:extLst>
-            <a:ext uri="{C572A759-6A51-4108-AA02-DFA0A04FC94B}">
-              <ma14:wrappingTextBoxFlag xmlns:ma14="http://schemas.microsoft.com/office/mac/drawingml/2011/main" val="0"/>
-            </a:ext>
-          </a:extLst>
-        </p:spPr>
-        <p:txBody>
-          <a:bodyPr/>
-          <a:lstStyle>
-            <a:lvl1pPr>
-              <a:defRPr sz="1000">
-                <a:solidFill>
-                  <a:srgbClr val="8A94A6"/>
-                </a:solidFill>
-                <a:latin typeface="Malgun Gothic"/>
-                <a:ea typeface="Malgun Gothic"/>
-                <a:cs typeface="Malgun Gothic"/>
-              </a:defRPr>
-            </a:lvl1pPr>
-          </a:lstStyle>
-          <a:p>
-            <a:pPr algn="r"/>
-            <a:fld id="{F7021451-1387-4CA6-816F-3879F97B5CBC}" type="slidenum">
-              <a:rPr b="0" lang="en-US"/>
               <a:t>8</a:t>
             </a:fld>
             <a:endParaRPr lang="en-US"/>
@@ -19903,7 +22657,7 @@
                 <a:ea typeface="Consolas" pitchFamily="34" charset="-122"/>
                 <a:cs typeface="Consolas" pitchFamily="34" charset="-120"/>
               </a:rPr>
-              <a:t>03 · YieldRule.decide()</a:t>
+              <a:t>03 · 교통 정리</a:t>
             </a:r>
             <a:endParaRPr lang="en-US" sz="1200" dirty="0"/>
           </a:p>
@@ -19944,7 +22698,7 @@
                 <a:ea typeface="Malgun Gothic" pitchFamily="34" charset="-122"/>
                 <a:cs typeface="Malgun Gothic" pitchFamily="34" charset="-120"/>
               </a:rPr>
-              <a:t>앞쪽 경로만 잘라서, 꺾은선 거리로 판단</a:t>
+              <a:t>예약에서 양보로: 안전하지만 답답한 v1을 버렸다</a:t>
             </a:r>
             <a:endParaRPr lang="en-US" sz="2800" dirty="0"/>
           </a:p>
@@ -19959,11 +22713,298 @@
         <p:spPr>
           <a:xfrm>
             <a:off x="548640" y="1737360"/>
-            <a:ext cx="6675120" cy="3931920"/>
+            <a:ext cx="5120640" cy="4343400"/>
           </a:xfrm>
           <a:prstGeom prst="roundRect">
             <a:avLst>
-              <a:gd name="adj" fmla="val 2791"/>
+              <a:gd name="adj" fmla="val 2526"/>
+            </a:avLst>
+          </a:prstGeom>
+          <a:solidFill>
+            <a:srgbClr val="F3F5F8"/>
+          </a:solidFill>
+          <a:ln w="9525">
+            <a:solidFill>
+              <a:srgbClr val="F3F5F8"/>
+            </a:solidFill>
+            <a:prstDash val="solid"/>
+          </a:ln>
+        </p:spPr>
+      </p:sp>
+      <p:sp>
+        <p:nvSpPr>
+          <p:cNvPr id="5" name="text-99"/>
+          <p:cNvSpPr txBox="1"/>
+          <p:nvPr/>
+        </p:nvSpPr>
+        <p:spPr>
+          <a:xfrm>
+            <a:off x="914400" y="1965960"/>
+            <a:ext cx="4389120" cy="320040"/>
+          </a:xfrm>
+          <a:prstGeom prst="rect">
+            <a:avLst/>
+          </a:prstGeom>
+          <a:noFill/>
+          <a:ln/>
+        </p:spPr>
+        <p:txBody>
+          <a:bodyPr wrap="square" lIns="0" tIns="0" rIns="0" bIns="0" rtlCol="0" anchor="t"/>
+          <a:lstStyle/>
+          <a:p>
+            <a:pPr indent="0" marL="0">
+              <a:buNone/>
+            </a:pPr>
+            <a:r>
+              <a:rPr lang="en-US" sz="1300" dirty="0">
+                <a:solidFill>
+                  <a:srgbClr val="8A94A6"/>
+                </a:solidFill>
+                <a:latin typeface="Consolas" pitchFamily="34" charset="0"/>
+                <a:ea typeface="Consolas" pitchFamily="34" charset="-122"/>
+                <a:cs typeface="Consolas" pitchFamily="34" charset="-120"/>
+              </a:rPr>
+              <a:t>v1 · TrafficGate</a:t>
+            </a:r>
+            <a:endParaRPr lang="en-US" sz="1300" dirty="0"/>
+          </a:p>
+        </p:txBody>
+      </p:sp>
+      <p:sp>
+        <p:nvSpPr>
+          <p:cNvPr id="6" name="text-100"/>
+          <p:cNvSpPr txBox="1"/>
+          <p:nvPr/>
+        </p:nvSpPr>
+        <p:spPr>
+          <a:xfrm>
+            <a:off x="914400" y="2331720"/>
+            <a:ext cx="4389120" cy="457200"/>
+          </a:xfrm>
+          <a:prstGeom prst="rect">
+            <a:avLst/>
+          </a:prstGeom>
+          <a:noFill/>
+          <a:ln/>
+        </p:spPr>
+        <p:txBody>
+          <a:bodyPr wrap="square" lIns="0" tIns="0" rIns="0" bIns="0" rtlCol="0" anchor="t"/>
+          <a:lstStyle/>
+          <a:p>
+            <a:pPr indent="0" marL="0">
+              <a:buNone/>
+            </a:pPr>
+            <a:r>
+              <a:rPr lang="en-US" sz="2000" b="1" dirty="0">
+                <a:solidFill>
+                  <a:srgbClr val="14213D"/>
+                </a:solidFill>
+                <a:latin typeface="Malgun Gothic" pitchFamily="34" charset="0"/>
+                <a:ea typeface="Malgun Gothic" pitchFamily="34" charset="-122"/>
+                <a:cs typeface="Malgun Gothic" pitchFamily="34" charset="-120"/>
+              </a:rPr>
+              <a:t>칸 열쇠 (출발 전 예약)</a:t>
+            </a:r>
+            <a:endParaRPr lang="en-US" sz="2000" dirty="0"/>
+          </a:p>
+        </p:txBody>
+      </p:sp>
+      <p:sp>
+        <p:nvSpPr>
+          <p:cNvPr id="7" name="text-101"/>
+          <p:cNvSpPr txBox="1"/>
+          <p:nvPr/>
+        </p:nvSpPr>
+        <p:spPr>
+          <a:xfrm>
+            <a:off x="914400" y="2926080"/>
+            <a:ext cx="4389120" cy="2103120"/>
+          </a:xfrm>
+          <a:prstGeom prst="rect">
+            <a:avLst/>
+          </a:prstGeom>
+          <a:noFill/>
+          <a:ln/>
+        </p:spPr>
+        <p:txBody>
+          <a:bodyPr wrap="square" lIns="0" tIns="0" rIns="0" bIns="0" rtlCol="0" anchor="t"/>
+          <a:lstStyle/>
+          <a:p>
+            <a:pPr marL="342900" indent="-342900">
+              <a:lnSpc>
+                <a:spcPct val="120000"/>
+              </a:lnSpc>
+              <a:spcAft>
+                <a:spcPts val="600"/>
+              </a:spcAft>
+              <a:buSzPct val="100000"/>
+              <a:buChar char="•"/>
+            </a:pPr>
+            <a:r>
+              <a:rPr lang="en-US" sz="1500" dirty="0">
+                <a:solidFill>
+                  <a:srgbClr val="4A5568"/>
+                </a:solidFill>
+                <a:latin typeface="Malgun Gothic" pitchFamily="34" charset="0"/>
+                <a:ea typeface="Malgun Gothic" pitchFamily="34" charset="-122"/>
+                <a:cs typeface="Malgun Gothic" pitchFamily="34" charset="-120"/>
+              </a:rPr>
+              <a:t>지도를 칸 4개 + 좁은 통로 2개로 분할</a:t>
+            </a:r>
+            <a:endParaRPr lang="en-US" sz="1500" dirty="0"/>
+          </a:p>
+          <a:p>
+            <a:pPr marL="342900" indent="-342900">
+              <a:lnSpc>
+                <a:spcPct val="120000"/>
+              </a:lnSpc>
+              <a:spcAft>
+                <a:spcPts val="600"/>
+              </a:spcAft>
+              <a:buSzPct val="100000"/>
+              <a:buChar char="•"/>
+            </a:pPr>
+            <a:r>
+              <a:rPr lang="en-US" sz="1500" dirty="0">
+                <a:solidFill>
+                  <a:srgbClr val="4A5568"/>
+                </a:solidFill>
+                <a:latin typeface="Malgun Gothic" pitchFamily="34" charset="0"/>
+                <a:ea typeface="Malgun Gothic" pitchFamily="34" charset="-122"/>
+                <a:cs typeface="Malgun Gothic" pitchFamily="34" charset="-120"/>
+              </a:rPr>
+              <a:t>칸 그래프 BFS로 지나갈 칸 계산</a:t>
+            </a:r>
+            <a:endParaRPr lang="en-US" sz="1500" dirty="0"/>
+          </a:p>
+          <a:p>
+            <a:pPr marL="342900" indent="-342900">
+              <a:lnSpc>
+                <a:spcPct val="120000"/>
+              </a:lnSpc>
+              <a:spcAft>
+                <a:spcPts val="600"/>
+              </a:spcAft>
+              <a:buSzPct val="100000"/>
+              <a:buChar char="•"/>
+            </a:pPr>
+            <a:r>
+              <a:rPr lang="en-US" sz="1500" dirty="0">
+                <a:solidFill>
+                  <a:srgbClr val="4A5568"/>
+                </a:solidFill>
+                <a:latin typeface="Malgun Gothic" pitchFamily="34" charset="0"/>
+                <a:ea typeface="Malgun Gothic" pitchFamily="34" charset="-122"/>
+                <a:cs typeface="Malgun Gothic" pitchFamily="34" charset="-120"/>
+              </a:rPr>
+              <a:t>열쇠를 all-or-nothing으로 획득, 아니면 FIFO 대기</a:t>
+            </a:r>
+            <a:endParaRPr lang="en-US" sz="1500" dirty="0"/>
+          </a:p>
+          <a:p>
+            <a:pPr marL="342900" indent="-342900">
+              <a:lnSpc>
+                <a:spcPct val="120000"/>
+              </a:lnSpc>
+              <a:spcAft>
+                <a:spcPts val="600"/>
+              </a:spcAft>
+              <a:buSzPct val="100000"/>
+              <a:buChar char="•"/>
+            </a:pPr>
+            <a:r>
+              <a:rPr lang="en-US" sz="1500" dirty="0">
+                <a:solidFill>
+                  <a:srgbClr val="4A5568"/>
+                </a:solidFill>
+                <a:latin typeface="Malgun Gothic" pitchFamily="34" charset="0"/>
+                <a:ea typeface="Malgun Gothic" pitchFamily="34" charset="-122"/>
+                <a:cs typeface="Malgun Gothic" pitchFamily="34" charset="-120"/>
+              </a:rPr>
+              <a:t>hold-and-wait 없음 → 교착 불가</a:t>
+            </a:r>
+            <a:endParaRPr lang="en-US" sz="1500" dirty="0"/>
+          </a:p>
+        </p:txBody>
+      </p:sp>
+      <p:sp>
+        <p:nvSpPr>
+          <p:cNvPr id="8" name="text-102"/>
+          <p:cNvSpPr txBox="1"/>
+          <p:nvPr/>
+        </p:nvSpPr>
+        <p:spPr>
+          <a:xfrm>
+            <a:off x="914400" y="5212080"/>
+            <a:ext cx="4389120" cy="640080"/>
+          </a:xfrm>
+          <a:prstGeom prst="rect">
+            <a:avLst/>
+          </a:prstGeom>
+          <a:noFill/>
+          <a:ln/>
+        </p:spPr>
+        <p:txBody>
+          <a:bodyPr wrap="square" lIns="0" tIns="0" rIns="0" bIns="0" rtlCol="0" anchor="t"/>
+          <a:lstStyle/>
+          <a:p>
+            <a:pPr indent="0" marL="0">
+              <a:buNone/>
+            </a:pPr>
+            <a:r>
+              <a:rPr lang="en-US" sz="1500" b="1" dirty="0">
+                <a:solidFill>
+                  <a:srgbClr val="A85A12"/>
+                </a:solidFill>
+                <a:latin typeface="Malgun Gothic" pitchFamily="34" charset="0"/>
+                <a:ea typeface="Malgun Gothic" pitchFamily="34" charset="-122"/>
+                <a:cs typeface="Malgun Gothic" pitchFamily="34" charset="-120"/>
+              </a:rPr>
+              <a:t>한계: 경로가 조금만 겹쳐도 robot2가 출발조차 안 함</a:t>
+            </a:r>
+            <a:endParaRPr lang="en-US" sz="1500" dirty="0"/>
+          </a:p>
+        </p:txBody>
+      </p:sp>
+      <p:sp>
+        <p:nvSpPr>
+          <p:cNvPr id="9" name="v1-v2"/>
+          <p:cNvSpPr/>
+          <p:nvPr/>
+        </p:nvSpPr>
+        <p:spPr>
+          <a:xfrm>
+            <a:off x="5843016" y="3703320"/>
+            <a:ext cx="457200" cy="384048"/>
+          </a:xfrm>
+          <a:prstGeom prst="rightArrow">
+            <a:avLst/>
+          </a:prstGeom>
+          <a:solidFill>
+            <a:srgbClr val="2F6FDB"/>
+          </a:solidFill>
+          <a:ln w="12700">
+            <a:solidFill>
+              <a:srgbClr val="2F6FDB"/>
+            </a:solidFill>
+            <a:prstDash val="solid"/>
+          </a:ln>
+        </p:spPr>
+      </p:sp>
+      <p:sp>
+        <p:nvSpPr>
+          <p:cNvPr id="10" name="card-103"/>
+          <p:cNvSpPr/>
+          <p:nvPr/>
+        </p:nvSpPr>
+        <p:spPr>
+          <a:xfrm>
+            <a:off x="6519672" y="1737360"/>
+            <a:ext cx="5120640" cy="4343400"/>
+          </a:xfrm>
+          <a:prstGeom prst="roundRect">
+            <a:avLst>
+              <a:gd name="adj" fmla="val 2526"/>
             </a:avLst>
           </a:prstGeom>
           <a:solidFill>
@@ -19979,14 +23020,14 @@
       </p:sp>
       <p:sp>
         <p:nvSpPr>
-          <p:cNvPr id="5" name="text-99"/>
+          <p:cNvPr id="11" name="text-104"/>
           <p:cNvSpPr txBox="1"/>
           <p:nvPr/>
         </p:nvSpPr>
         <p:spPr>
           <a:xfrm>
-            <a:off x="868680" y="2011680"/>
-            <a:ext cx="6035040" cy="3383280"/>
+            <a:off x="6885432" y="1965960"/>
+            <a:ext cx="4389120" cy="320040"/>
           </a:xfrm>
           <a:prstGeom prst="rect">
             <a:avLst/>
@@ -19999,213 +23040,10 @@
           <a:lstStyle/>
           <a:p>
             <a:pPr indent="0" marL="0">
-              <a:lnSpc>
-                <a:spcPct val="125000"/>
-              </a:lnSpc>
               <a:buNone/>
             </a:pPr>
             <a:r>
-              <a:rPr lang="en-US" sz="1400" dirty="0">
-                <a:solidFill>
-                  <a:srgbClr val="FFFFFF"/>
-                </a:solidFill>
-                <a:latin typeface="Consolas" pitchFamily="34" charset="0"/>
-                <a:ea typeface="Consolas" pitchFamily="34" charset="-122"/>
-                <a:cs typeface="Consolas" pitchFamily="34" charset="-120"/>
-              </a:rPr>
-              <a:t>if not leader.active: return "go"</a:t>
-            </a:r>
-            <a:endParaRPr lang="en-US" sz="1400" dirty="0"/>
-          </a:p>
-          <a:p>
-            <a:pPr indent="0" marL="0">
-              <a:lnSpc>
-                <a:spcPct val="125000"/>
-              </a:lnSpc>
-              <a:buNone/>
-            </a:pPr>
-            <a:r>
-              <a:rPr lang="en-US" sz="1400" dirty="0">
-                <a:solidFill>
-                  <a:srgbClr val="8A94A6"/>
-                </a:solidFill>
-                <a:latin typeface="Consolas" pitchFamily="34" charset="0"/>
-                <a:ea typeface="Consolas" pitchFamily="34" charset="-122"/>
-                <a:cs typeface="Consolas" pitchFamily="34" charset="-120"/>
-              </a:rPr>
-              <a:t># 하던 동작에만 여유 R (떨림 방지)</a:t>
-            </a:r>
-            <a:endParaRPr lang="en-US" sz="1400" dirty="0"/>
-          </a:p>
-          <a:p>
-            <a:pPr indent="0" marL="0">
-              <a:lnSpc>
-                <a:spcPct val="125000"/>
-              </a:lnSpc>
-              <a:buNone/>
-            </a:pPr>
-            <a:r>
-              <a:rPr lang="en-US" sz="1400" dirty="0">
-                <a:solidFill>
-                  <a:srgbClr val="FFFFFF"/>
-                </a:solidFill>
-                <a:latin typeface="Consolas" pitchFamily="34" charset="0"/>
-                <a:ea typeface="Consolas" pitchFamily="34" charset="-122"/>
-                <a:cs typeface="Consolas" pitchFamily="34" charset="-120"/>
-              </a:rPr>
-              <a:t>back_gap = D + R·(prev == "back")</a:t>
-            </a:r>
-            <a:endParaRPr lang="en-US" sz="1400" dirty="0"/>
-          </a:p>
-          <a:p>
-            <a:pPr indent="0" marL="0">
-              <a:lnSpc>
-                <a:spcPct val="125000"/>
-              </a:lnSpc>
-              <a:buNone/>
-            </a:pPr>
-            <a:r>
-              <a:rPr lang="en-US" sz="1400" dirty="0">
-                <a:solidFill>
-                  <a:srgbClr val="FFFFFF"/>
-                </a:solidFill>
-                <a:latin typeface="Consolas" pitchFamily="34" charset="0"/>
-                <a:ea typeface="Consolas" pitchFamily="34" charset="-122"/>
-                <a:cs typeface="Consolas" pitchFamily="34" charset="-120"/>
-              </a:rPr>
-              <a:t>stop_gap = D + R·(prev != "go")</a:t>
-            </a:r>
-            <a:endParaRPr lang="en-US" sz="1400" dirty="0"/>
-          </a:p>
-          <a:p>
-            <a:pPr indent="0" marL="0">
-              <a:lnSpc>
-                <a:spcPct val="125000"/>
-              </a:lnSpc>
-              <a:buNone/>
-            </a:pPr>
-            <a:r>
-              <a:rPr lang="en-US" sz="1400" dirty="0">
-                <a:solidFill>
-                  <a:srgbClr val="FFFFFF"/>
-                </a:solidFill>
-                <a:latin typeface="Consolas" pitchFamily="34" charset="0"/>
-                <a:ea typeface="Consolas" pitchFamily="34" charset="-122"/>
-                <a:cs typeface="Consolas" pitchFamily="34" charset="-120"/>
-              </a:rPr>
-              <a:t>lead  = path_ahead(leader, 0.8)</a:t>
-            </a:r>
-            <a:endParaRPr lang="en-US" sz="1400" dirty="0"/>
-          </a:p>
-          <a:p>
-            <a:pPr indent="0" marL="0">
-              <a:lnSpc>
-                <a:spcPct val="125000"/>
-              </a:lnSpc>
-              <a:buNone/>
-            </a:pPr>
-            <a:r>
-              <a:rPr lang="en-US" sz="1400" dirty="0">
-                <a:solidFill>
-                  <a:srgbClr val="FFFFFF"/>
-                </a:solidFill>
-                <a:latin typeface="Consolas" pitchFamily="34" charset="0"/>
-                <a:ea typeface="Consolas" pitchFamily="34" charset="-122"/>
-                <a:cs typeface="Consolas" pitchFamily="34" charset="-120"/>
-              </a:rPr>
-              <a:t>if dist(me.pose, lead) &lt; back_gap:</a:t>
-            </a:r>
-            <a:endParaRPr lang="en-US" sz="1400" dirty="0"/>
-          </a:p>
-          <a:p>
-            <a:pPr indent="0" marL="0">
-              <a:lnSpc>
-                <a:spcPct val="125000"/>
-              </a:lnSpc>
-              <a:buNone/>
-            </a:pPr>
-            <a:r>
-              <a:rPr lang="en-US" sz="1400" dirty="0">
-                <a:solidFill>
-                  <a:srgbClr val="F2A65A"/>
-                </a:solidFill>
-                <a:latin typeface="Consolas" pitchFamily="34" charset="0"/>
-                <a:ea typeface="Consolas" pitchFamily="34" charset="-122"/>
-                <a:cs typeface="Consolas" pitchFamily="34" charset="-120"/>
-              </a:rPr>
-              <a:t>    return "back"   # 내가 상대 경로 위</a:t>
-            </a:r>
-            <a:endParaRPr lang="en-US" sz="1400" dirty="0"/>
-          </a:p>
-          <a:p>
-            <a:pPr indent="0" marL="0">
-              <a:lnSpc>
-                <a:spcPct val="125000"/>
-              </a:lnSpc>
-              <a:buNone/>
-            </a:pPr>
-            <a:r>
-              <a:rPr lang="en-US" sz="1400" dirty="0">
-                <a:solidFill>
-                  <a:srgbClr val="FFFFFF"/>
-                </a:solidFill>
-                <a:latin typeface="Consolas" pitchFamily="34" charset="0"/>
-                <a:ea typeface="Consolas" pitchFamily="34" charset="-122"/>
-                <a:cs typeface="Consolas" pitchFamily="34" charset="-120"/>
-              </a:rPr>
-              <a:t>ahead = path_ahead(me, 0.5)</a:t>
-            </a:r>
-            <a:endParaRPr lang="en-US" sz="1400" dirty="0"/>
-          </a:p>
-          <a:p>
-            <a:pPr indent="0" marL="0">
-              <a:lnSpc>
-                <a:spcPct val="125000"/>
-              </a:lnSpc>
-              <a:buNone/>
-            </a:pPr>
-            <a:r>
-              <a:rPr lang="en-US" sz="1400" dirty="0">
-                <a:solidFill>
-                  <a:srgbClr val="FFFFFF"/>
-                </a:solidFill>
-                <a:latin typeface="Consolas" pitchFamily="34" charset="0"/>
-                <a:ea typeface="Consolas" pitchFamily="34" charset="-122"/>
-                <a:cs typeface="Consolas" pitchFamily="34" charset="-120"/>
-              </a:rPr>
-              <a:t>if dist(ahead, lead) &lt; stop_gap:</a:t>
-            </a:r>
-            <a:endParaRPr lang="en-US" sz="1400" dirty="0"/>
-          </a:p>
-          <a:p>
-            <a:pPr indent="0" marL="0">
-              <a:lnSpc>
-                <a:spcPct val="125000"/>
-              </a:lnSpc>
-              <a:buNone/>
-            </a:pPr>
-            <a:r>
-              <a:rPr lang="en-US" sz="1400" dirty="0">
-                <a:solidFill>
-                  <a:srgbClr val="F2A65A"/>
-                </a:solidFill>
-                <a:latin typeface="Consolas" pitchFamily="34" charset="0"/>
-                <a:ea typeface="Consolas" pitchFamily="34" charset="-122"/>
-                <a:cs typeface="Consolas" pitchFamily="34" charset="-120"/>
-              </a:rPr>
-              <a:t>    return "stop"   # 앞 경로가 겹침</a:t>
-            </a:r>
-            <a:endParaRPr lang="en-US" sz="1400" dirty="0"/>
-          </a:p>
-          <a:p>
-            <a:pPr indent="0" marL="0">
-              <a:lnSpc>
-                <a:spcPct val="125000"/>
-              </a:lnSpc>
-              <a:buNone/>
-            </a:pPr>
-            <a:r>
-              <a:rPr lang="en-US" sz="1400" dirty="0">
+              <a:rPr lang="en-US" sz="1300" dirty="0">
                 <a:solidFill>
                   <a:srgbClr val="8FB3F0"/>
                 </a:solidFill>
@@ -20213,49 +23051,22 @@
                 <a:ea typeface="Consolas" pitchFamily="34" charset="-122"/>
                 <a:cs typeface="Consolas" pitchFamily="34" charset="-120"/>
               </a:rPr>
-              <a:t>return "go"</a:t>
+              <a:t>v2 · YieldRule (현재)</a:t>
             </a:r>
-            <a:endParaRPr lang="en-US" sz="1400" dirty="0"/>
+            <a:endParaRPr lang="en-US" sz="1300" dirty="0"/>
           </a:p>
         </p:txBody>
       </p:sp>
       <p:sp>
         <p:nvSpPr>
-          <p:cNvPr id="6" name="card-100"/>
-          <p:cNvSpPr/>
+          <p:cNvPr id="12" name="text-105"/>
+          <p:cNvSpPr txBox="1"/>
           <p:nvPr/>
         </p:nvSpPr>
         <p:spPr>
           <a:xfrm>
-            <a:off x="7498080" y="1737360"/>
-            <a:ext cx="4142232" cy="1188720"/>
-          </a:xfrm>
-          <a:prstGeom prst="roundRect">
-            <a:avLst>
-              <a:gd name="adj" fmla="val 9231"/>
-            </a:avLst>
-          </a:prstGeom>
-          <a:solidFill>
-            <a:srgbClr val="F3F5F8"/>
-          </a:solidFill>
-          <a:ln w="9525">
-            <a:solidFill>
-              <a:srgbClr val="F3F5F8"/>
-            </a:solidFill>
-            <a:prstDash val="solid"/>
-          </a:ln>
-        </p:spPr>
-      </p:sp>
-      <p:sp>
-        <p:nvSpPr>
-          <p:cNvPr id="7" name="text-101"/>
-          <p:cNvSpPr txBox="1"/>
-          <p:nvPr/>
-        </p:nvSpPr>
-        <p:spPr>
-          <a:xfrm>
-            <a:off x="7772400" y="1901952"/>
-            <a:ext cx="3611880" cy="347472"/>
+            <a:off x="6885432" y="2331720"/>
+            <a:ext cx="4389120" cy="457200"/>
           </a:xfrm>
           <a:prstGeom prst="rect">
             <a:avLst/>
@@ -20271,30 +23082,30 @@
               <a:buNone/>
             </a:pPr>
             <a:r>
-              <a:rPr lang="en-US" sz="1600" b="1" dirty="0">
+              <a:rPr lang="en-US" sz="2000" b="1" dirty="0">
                 <a:solidFill>
-                  <a:srgbClr val="14213D"/>
+                  <a:srgbClr val="F6F7F4"/>
                 </a:solidFill>
-                <a:latin typeface="Consolas" pitchFamily="34" charset="0"/>
-                <a:ea typeface="Consolas" pitchFamily="34" charset="-122"/>
-                <a:cs typeface="Consolas" pitchFamily="34" charset="-120"/>
+                <a:latin typeface="Malgun Gothic" pitchFamily="34" charset="0"/>
+                <a:ea typeface="Malgun Gothic" pitchFamily="34" charset="-122"/>
+                <a:cs typeface="Malgun Gothic" pitchFamily="34" charset="-120"/>
               </a:rPr>
-              <a:t>stop</a:t>
+              <a:t>달리면서 양보</a:t>
             </a:r>
-            <a:endParaRPr lang="en-US" sz="1600" dirty="0"/>
+            <a:endParaRPr lang="en-US" sz="2000" dirty="0"/>
           </a:p>
         </p:txBody>
       </p:sp>
       <p:sp>
         <p:nvSpPr>
-          <p:cNvPr id="8" name="text-102"/>
+          <p:cNvPr id="13" name="text-106"/>
           <p:cNvSpPr txBox="1"/>
           <p:nvPr/>
         </p:nvSpPr>
         <p:spPr>
           <a:xfrm>
-            <a:off x="7772400" y="2267712"/>
-            <a:ext cx="3611880" cy="566928"/>
+            <a:off x="6885432" y="2926080"/>
+            <a:ext cx="4389120" cy="2103120"/>
           </a:xfrm>
           <a:prstGeom prst="rect">
             <a:avLst/>
@@ -20306,64 +23117,113 @@
           <a:bodyPr wrap="square" lIns="0" tIns="0" rIns="0" bIns="0" rtlCol="0" anchor="t"/>
           <a:lstStyle/>
           <a:p>
-            <a:pPr indent="0" marL="0">
+            <a:pPr marL="342900" indent="-342900">
               <a:lnSpc>
                 <a:spcPct val="120000"/>
               </a:lnSpc>
-              <a:buNone/>
+              <a:spcAft>
+                <a:spcPts val="600"/>
+              </a:spcAft>
+              <a:buSzPct val="100000"/>
+              <a:buChar char="•"/>
             </a:pPr>
             <a:r>
-              <a:rPr lang="en-US" sz="1300" dirty="0">
+              <a:rPr lang="en-US" sz="1500" dirty="0">
                 <a:solidFill>
-                  <a:srgbClr val="4A5568"/>
+                  <a:srgbClr val="C9D3E3"/>
                 </a:solidFill>
                 <a:latin typeface="Malgun Gothic" pitchFamily="34" charset="0"/>
                 <a:ea typeface="Malgun Gothic" pitchFamily="34" charset="-122"/>
                 <a:cs typeface="Malgun Gothic" pitchFamily="34" charset="-120"/>
               </a:rPr>
-              <a:t>목적지 기억 → Nav2 목표 취소 → 대기</a:t>
+              <a:t>0.2 s마다 두 로봇의 Nav2 계획 경로 비교</a:t>
             </a:r>
-            <a:endParaRPr lang="en-US" sz="1300" dirty="0"/>
+            <a:endParaRPr lang="en-US" sz="1500" dirty="0"/>
+          </a:p>
+          <a:p>
+            <a:pPr marL="342900" indent="-342900">
+              <a:lnSpc>
+                <a:spcPct val="120000"/>
+              </a:lnSpc>
+              <a:spcAft>
+                <a:spcPts val="600"/>
+              </a:spcAft>
+              <a:buSzPct val="100000"/>
+              <a:buChar char="•"/>
+            </a:pPr>
+            <a:r>
+              <a:rPr lang="en-US" sz="1500" dirty="0">
+                <a:solidFill>
+                  <a:srgbClr val="C9D3E3"/>
+                </a:solidFill>
+                <a:latin typeface="Malgun Gothic" pitchFamily="34" charset="0"/>
+                <a:ea typeface="Malgun Gothic" pitchFamily="34" charset="-122"/>
+                <a:cs typeface="Malgun Gothic" pitchFamily="34" charset="-120"/>
+              </a:rPr>
+              <a:t>고정 우선순위: robot1 먼저, robot2 양보</a:t>
+            </a:r>
+            <a:endParaRPr lang="en-US" sz="1500" dirty="0"/>
+          </a:p>
+          <a:p>
+            <a:pPr marL="342900" indent="-342900">
+              <a:lnSpc>
+                <a:spcPct val="120000"/>
+              </a:lnSpc>
+              <a:spcAft>
+                <a:spcPts val="600"/>
+              </a:spcAft>
+              <a:buSzPct val="100000"/>
+              <a:buChar char="•"/>
+            </a:pPr>
+            <a:r>
+              <a:rPr lang="en-US" sz="1500" dirty="0">
+                <a:solidFill>
+                  <a:srgbClr val="C9D3E3"/>
+                </a:solidFill>
+                <a:latin typeface="Malgun Gothic" pitchFamily="34" charset="0"/>
+                <a:ea typeface="Malgun Gothic" pitchFamily="34" charset="-122"/>
+                <a:cs typeface="Malgun Gothic" pitchFamily="34" charset="-120"/>
+              </a:rPr>
+              <a:t>겹치면 stop, 상대 경로 위면 back</a:t>
+            </a:r>
+            <a:endParaRPr lang="en-US" sz="1500" dirty="0"/>
+          </a:p>
+          <a:p>
+            <a:pPr marL="342900" indent="-342900">
+              <a:lnSpc>
+                <a:spcPct val="120000"/>
+              </a:lnSpc>
+              <a:spcAft>
+                <a:spcPts val="600"/>
+              </a:spcAft>
+              <a:buSzPct val="100000"/>
+              <a:buChar char="•"/>
+            </a:pPr>
+            <a:r>
+              <a:rPr lang="en-US" sz="1500" dirty="0">
+                <a:solidFill>
+                  <a:srgbClr val="C9D3E3"/>
+                </a:solidFill>
+                <a:latin typeface="Malgun Gothic" pitchFamily="34" charset="0"/>
+                <a:ea typeface="Malgun Gothic" pitchFamily="34" charset="-122"/>
+                <a:cs typeface="Malgun Gothic" pitchFamily="34" charset="-120"/>
+              </a:rPr>
+              <a:t>robot1이 지나가면 기억한 목적지로 자동 재출발</a:t>
+            </a:r>
+            <a:endParaRPr lang="en-US" sz="1500" dirty="0"/>
           </a:p>
         </p:txBody>
       </p:sp>
       <p:sp>
         <p:nvSpPr>
-          <p:cNvPr id="9" name="card-103"/>
-          <p:cNvSpPr/>
+          <p:cNvPr id="14" name="text-107"/>
+          <p:cNvSpPr txBox="1"/>
           <p:nvPr/>
         </p:nvSpPr>
         <p:spPr>
           <a:xfrm>
-            <a:off x="7498080" y="3081528"/>
-            <a:ext cx="4142232" cy="1188720"/>
-          </a:xfrm>
-          <a:prstGeom prst="roundRect">
-            <a:avLst>
-              <a:gd name="adj" fmla="val 9231"/>
-            </a:avLst>
-          </a:prstGeom>
-          <a:solidFill>
-            <a:srgbClr val="F3F5F8"/>
-          </a:solidFill>
-          <a:ln w="9525">
-            <a:solidFill>
-              <a:srgbClr val="F3F5F8"/>
-            </a:solidFill>
-            <a:prstDash val="solid"/>
-          </a:ln>
-        </p:spPr>
-      </p:sp>
-      <p:sp>
-        <p:nvSpPr>
-          <p:cNvPr id="10" name="text-104"/>
-          <p:cNvSpPr txBox="1"/>
-          <p:nvPr/>
-        </p:nvSpPr>
-        <p:spPr>
-          <a:xfrm>
-            <a:off x="7772400" y="3246120"/>
-            <a:ext cx="3611880" cy="347472"/>
+            <a:off x="6885432" y="5212080"/>
+            <a:ext cx="4389120" cy="640080"/>
           </a:xfrm>
           <a:prstGeom prst="rect">
             <a:avLst/>
@@ -20379,206 +23239,17 @@
               <a:buNone/>
             </a:pPr>
             <a:r>
-              <a:rPr lang="en-US" sz="1600" b="1" dirty="0">
+              <a:rPr lang="en-US" sz="1500" b="1" dirty="0">
                 <a:solidFill>
-                  <a:srgbClr val="14213D"/>
-                </a:solidFill>
-                <a:latin typeface="Consolas" pitchFamily="34" charset="0"/>
-                <a:ea typeface="Consolas" pitchFamily="34" charset="-122"/>
-                <a:cs typeface="Consolas" pitchFamily="34" charset="-120"/>
-              </a:rPr>
-              <a:t>back</a:t>
-            </a:r>
-            <a:endParaRPr lang="en-US" sz="1600" dirty="0"/>
-          </a:p>
-        </p:txBody>
-      </p:sp>
-      <p:sp>
-        <p:nvSpPr>
-          <p:cNvPr id="11" name="text-105"/>
-          <p:cNvSpPr txBox="1"/>
-          <p:nvPr/>
-        </p:nvSpPr>
-        <p:spPr>
-          <a:xfrm>
-            <a:off x="7772400" y="3611880"/>
-            <a:ext cx="3611880" cy="566928"/>
-          </a:xfrm>
-          <a:prstGeom prst="rect">
-            <a:avLst/>
-          </a:prstGeom>
-          <a:noFill/>
-          <a:ln/>
-        </p:spPr>
-        <p:txBody>
-          <a:bodyPr wrap="square" lIns="0" tIns="0" rIns="0" bIns="0" rtlCol="0" anchor="t"/>
-          <a:lstStyle/>
-          <a:p>
-            <a:pPr indent="0" marL="0">
-              <a:lnSpc>
-                <a:spcPct val="120000"/>
-              </a:lnSpc>
-              <a:buNone/>
-            </a:pPr>
-            <a:r>
-              <a:rPr lang="en-US" sz="1300" dirty="0">
-                <a:solidFill>
-                  <a:srgbClr val="4A5568"/>
+                  <a:srgbClr val="F2A65A"/>
                 </a:solidFill>
                 <a:latin typeface="Malgun Gothic" pitchFamily="34" charset="0"/>
                 <a:ea typeface="Malgun Gothic" pitchFamily="34" charset="-122"/>
                 <a:cs typeface="Malgun Gothic" pitchFamily="34" charset="-120"/>
               </a:rPr>
-              <a:t>Nav2 BackUp 0.15 m @ 0.08 m/s, 충돌 검사 포함. 3회 연속이면 stop</a:t>
+              <a:t>둘이 같이 움직이다 부딪힐 때만 비킨다</a:t>
             </a:r>
-            <a:endParaRPr lang="en-US" sz="1300" dirty="0"/>
-          </a:p>
-        </p:txBody>
-      </p:sp>
-      <p:sp>
-        <p:nvSpPr>
-          <p:cNvPr id="12" name="card-106"/>
-          <p:cNvSpPr/>
-          <p:nvPr/>
-        </p:nvSpPr>
-        <p:spPr>
-          <a:xfrm>
-            <a:off x="7498080" y="4425696"/>
-            <a:ext cx="4142232" cy="1188720"/>
-          </a:xfrm>
-          <a:prstGeom prst="roundRect">
-            <a:avLst>
-              <a:gd name="adj" fmla="val 9231"/>
-            </a:avLst>
-          </a:prstGeom>
-          <a:solidFill>
-            <a:srgbClr val="F3F5F8"/>
-          </a:solidFill>
-          <a:ln w="9525">
-            <a:solidFill>
-              <a:srgbClr val="F3F5F8"/>
-            </a:solidFill>
-            <a:prstDash val="solid"/>
-          </a:ln>
-        </p:spPr>
-      </p:sp>
-      <p:sp>
-        <p:nvSpPr>
-          <p:cNvPr id="13" name="text-107"/>
-          <p:cNvSpPr txBox="1"/>
-          <p:nvPr/>
-        </p:nvSpPr>
-        <p:spPr>
-          <a:xfrm>
-            <a:off x="7772400" y="4590288"/>
-            <a:ext cx="3611880" cy="347472"/>
-          </a:xfrm>
-          <a:prstGeom prst="rect">
-            <a:avLst/>
-          </a:prstGeom>
-          <a:noFill/>
-          <a:ln/>
-        </p:spPr>
-        <p:txBody>
-          <a:bodyPr wrap="square" lIns="0" tIns="0" rIns="0" bIns="0" rtlCol="0" anchor="t"/>
-          <a:lstStyle/>
-          <a:p>
-            <a:pPr indent="0" marL="0">
-              <a:buNone/>
-            </a:pPr>
-            <a:r>
-              <a:rPr lang="en-US" sz="1600" b="1" dirty="0">
-                <a:solidFill>
-                  <a:srgbClr val="14213D"/>
-                </a:solidFill>
-                <a:latin typeface="Consolas" pitchFamily="34" charset="0"/>
-                <a:ea typeface="Consolas" pitchFamily="34" charset="-122"/>
-                <a:cs typeface="Consolas" pitchFamily="34" charset="-120"/>
-              </a:rPr>
-              <a:t>go (복귀)</a:t>
-            </a:r>
-            <a:endParaRPr lang="en-US" sz="1600" dirty="0"/>
-          </a:p>
-        </p:txBody>
-      </p:sp>
-      <p:sp>
-        <p:nvSpPr>
-          <p:cNvPr id="14" name="text-108"/>
-          <p:cNvSpPr txBox="1"/>
-          <p:nvPr/>
-        </p:nvSpPr>
-        <p:spPr>
-          <a:xfrm>
-            <a:off x="7772400" y="4956048"/>
-            <a:ext cx="3611880" cy="566928"/>
-          </a:xfrm>
-          <a:prstGeom prst="rect">
-            <a:avLst/>
-          </a:prstGeom>
-          <a:noFill/>
-          <a:ln/>
-        </p:spPr>
-        <p:txBody>
-          <a:bodyPr wrap="square" lIns="0" tIns="0" rIns="0" bIns="0" rtlCol="0" anchor="t"/>
-          <a:lstStyle/>
-          <a:p>
-            <a:pPr indent="0" marL="0">
-              <a:lnSpc>
-                <a:spcPct val="120000"/>
-              </a:lnSpc>
-              <a:buNone/>
-            </a:pPr>
-            <a:r>
-              <a:rPr lang="en-US" sz="1300" dirty="0">
-                <a:solidFill>
-                  <a:srgbClr val="4A5568"/>
-                </a:solidFill>
-                <a:latin typeface="Malgun Gothic" pitchFamily="34" charset="0"/>
-                <a:ea typeface="Malgun Gothic" pitchFamily="34" charset="-122"/>
-                <a:cs typeface="Malgun Gothic" pitchFamily="34" charset="-120"/>
-              </a:rPr>
-              <a:t>기억한 목적지 재전송. 사람이 개입하면 기억 폐기</a:t>
-            </a:r>
-            <a:endParaRPr lang="en-US" sz="1300" dirty="0"/>
-          </a:p>
-        </p:txBody>
-      </p:sp>
-      <p:sp>
-        <p:nvSpPr>
-          <p:cNvPr id="15" name="text-109"/>
-          <p:cNvSpPr txBox="1"/>
-          <p:nvPr/>
-        </p:nvSpPr>
-        <p:spPr>
-          <a:xfrm>
-            <a:off x="548640" y="5806440"/>
-            <a:ext cx="11094415" cy="365760"/>
-          </a:xfrm>
-          <a:prstGeom prst="rect">
-            <a:avLst/>
-          </a:prstGeom>
-          <a:noFill/>
-          <a:ln/>
-        </p:spPr>
-        <p:txBody>
-          <a:bodyPr wrap="square" lIns="0" tIns="0" rIns="0" bIns="0" rtlCol="0" anchor="t"/>
-          <a:lstStyle/>
-          <a:p>
-            <a:pPr indent="0" marL="0">
-              <a:buNone/>
-            </a:pPr>
-            <a:r>
-              <a:rPr lang="en-US" sz="1300" dirty="0">
-                <a:solidFill>
-                  <a:srgbClr val="4A5568"/>
-                </a:solidFill>
-                <a:latin typeface="Malgun Gothic" pitchFamily="34" charset="0"/>
-                <a:ea typeface="Malgun Gothic" pitchFamily="34" charset="-122"/>
-                <a:cs typeface="Malgun Gothic" pitchFamily="34" charset="-120"/>
-              </a:rPr>
-              <a:t>D = 0.25 m · R = 0.10 m · dist = 선분-선분 최소 거리(교차 판정 포함) · 서 있는 로봇은 Nav2가 장애물로 회피</a:t>
-            </a:r>
-            <a:endParaRPr lang="en-US" sz="1300" dirty="0"/>
+            <a:endParaRPr lang="en-US" sz="1500" dirty="0"/>
           </a:p>
         </p:txBody>
       </p:sp>
